--- a/output/education/2026-03-27_medical-fee-revision-2026/medical-fee-revision-2026_slides_allstaff.pptx
+++ b/output/education/2026-03-27_medical-fee-revision-2026/medical-fee-revision-2026_slides_allstaff.pptx
@@ -3119,7 +3119,7 @@
           <a:noFill/>
         </p:spPr>
         <p:txBody>
-          <a:bodyPr wrap="square">
+          <a:bodyPr wrap="square" lIns="45720" rIns="45720" tIns="27432" bIns="27432">
             <a:spAutoFit/>
           </a:bodyPr>
           <a:lstStyle/>
@@ -3155,7 +3155,7 @@
           <a:noFill/>
         </p:spPr>
         <p:txBody>
-          <a:bodyPr wrap="square">
+          <a:bodyPr wrap="square" lIns="45720" rIns="45720" tIns="27432" bIns="27432">
             <a:spAutoFit/>
           </a:bodyPr>
           <a:lstStyle/>
@@ -3191,7 +3191,7 @@
           <a:noFill/>
         </p:spPr>
         <p:txBody>
-          <a:bodyPr wrap="square">
+          <a:bodyPr wrap="square" lIns="45720" rIns="45720" tIns="27432" bIns="27432">
             <a:spAutoFit/>
           </a:bodyPr>
           <a:lstStyle/>
@@ -3294,7 +3294,7 @@
                       </a:r>
                     </a:p>
                   </a:txBody>
-                  <a:tcPr>
+                  <a:tcPr marL="45720" marR="45720" marT="18288" marB="18288">
                     <a:solidFill>
                       <a:srgbClr val="3D6B5E"/>
                     </a:solidFill>
@@ -3318,7 +3318,7 @@
                       </a:r>
                     </a:p>
                   </a:txBody>
-                  <a:tcPr>
+                  <a:tcPr marL="45720" marR="45720" marT="18288" marB="18288">
                     <a:solidFill>
                       <a:srgbClr val="3D6B5E"/>
                     </a:solidFill>
@@ -3344,7 +3344,7 @@
                       </a:r>
                     </a:p>
                   </a:txBody>
-                  <a:tcPr>
+                  <a:tcPr marL="45720" marR="45720" marT="18288" marB="18288">
                     <a:solidFill>
                       <a:srgbClr val="F0F7F2"/>
                     </a:solidFill>
@@ -3368,7 +3368,7 @@
                       </a:r>
                     </a:p>
                   </a:txBody>
-                  <a:tcPr>
+                  <a:tcPr marL="45720" marR="45720" marT="18288" marB="18288">
                     <a:solidFill>
                       <a:srgbClr val="F0F7F2"/>
                     </a:solidFill>
@@ -3394,7 +3394,7 @@
                       </a:r>
                     </a:p>
                   </a:txBody>
-                  <a:tcPr>
+                  <a:tcPr marL="45720" marR="45720" marT="18288" marB="18288">
                     <a:solidFill>
                       <a:srgbClr val="FFF8F0"/>
                     </a:solidFill>
@@ -3418,7 +3418,7 @@
                       </a:r>
                     </a:p>
                   </a:txBody>
-                  <a:tcPr>
+                  <a:tcPr marL="45720" marR="45720" marT="18288" marB="18288">
                     <a:solidFill>
                       <a:srgbClr val="FFF8F0"/>
                     </a:solidFill>
@@ -3444,7 +3444,7 @@
                       </a:r>
                     </a:p>
                   </a:txBody>
-                  <a:tcPr>
+                  <a:tcPr marL="45720" marR="45720" marT="18288" marB="18288">
                     <a:solidFill>
                       <a:srgbClr val="F0F7F2"/>
                     </a:solidFill>
@@ -3468,7 +3468,7 @@
                       </a:r>
                     </a:p>
                   </a:txBody>
-                  <a:tcPr>
+                  <a:tcPr marL="45720" marR="45720" marT="18288" marB="18288">
                     <a:solidFill>
                       <a:srgbClr val="F0F7F2"/>
                     </a:solidFill>
@@ -3494,7 +3494,7 @@
                       </a:r>
                     </a:p>
                   </a:txBody>
-                  <a:tcPr>
+                  <a:tcPr marL="45720" marR="45720" marT="18288" marB="18288">
                     <a:solidFill>
                       <a:srgbClr val="FFF8F0"/>
                     </a:solidFill>
@@ -3518,7 +3518,7 @@
                       </a:r>
                     </a:p>
                   </a:txBody>
-                  <a:tcPr>
+                  <a:tcPr marL="45720" marR="45720" marT="18288" marB="18288">
                     <a:solidFill>
                       <a:srgbClr val="FFF8F0"/>
                     </a:solidFill>
@@ -3634,7 +3634,7 @@
           <a:noFill/>
         </p:spPr>
         <p:txBody>
-          <a:bodyPr wrap="square">
+          <a:bodyPr wrap="square" lIns="45720" rIns="45720" tIns="27432" bIns="27432">
             <a:spAutoFit/>
           </a:bodyPr>
           <a:lstStyle/>
@@ -3696,7 +3696,7 @@
           <a:noFill/>
         </p:spPr>
         <p:txBody>
-          <a:bodyPr wrap="square">
+          <a:bodyPr wrap="square" lIns="45720" rIns="45720" tIns="27432" bIns="27432">
             <a:spAutoFit/>
           </a:bodyPr>
           <a:lstStyle/>
@@ -3775,7 +3775,7 @@
           <a:noFill/>
         </p:spPr>
         <p:txBody>
-          <a:bodyPr wrap="square">
+          <a:bodyPr wrap="square" lIns="45720" rIns="45720" tIns="27432" bIns="27432">
             <a:spAutoFit/>
           </a:bodyPr>
           <a:lstStyle/>
@@ -3856,7 +3856,7 @@
           <a:noFill/>
         </p:spPr>
         <p:txBody>
-          <a:bodyPr wrap="square">
+          <a:bodyPr wrap="square" lIns="45720" rIns="45720" tIns="27432" bIns="27432">
             <a:spAutoFit/>
           </a:bodyPr>
           <a:lstStyle/>
@@ -3892,7 +3892,7 @@
           <a:noFill/>
         </p:spPr>
         <p:txBody>
-          <a:bodyPr wrap="square">
+          <a:bodyPr wrap="square" lIns="45720" rIns="45720" tIns="27432" bIns="27432">
             <a:spAutoFit/>
           </a:bodyPr>
           <a:lstStyle/>
@@ -3973,7 +3973,7 @@
           <a:noFill/>
         </p:spPr>
         <p:txBody>
-          <a:bodyPr wrap="square">
+          <a:bodyPr wrap="square" lIns="45720" rIns="45720" tIns="27432" bIns="27432">
             <a:spAutoFit/>
           </a:bodyPr>
           <a:lstStyle/>
@@ -4009,7 +4009,7 @@
           <a:noFill/>
         </p:spPr>
         <p:txBody>
-          <a:bodyPr wrap="square">
+          <a:bodyPr wrap="square" lIns="45720" rIns="45720" tIns="27432" bIns="27432">
             <a:spAutoFit/>
           </a:bodyPr>
           <a:lstStyle/>
@@ -4090,7 +4090,7 @@
           <a:noFill/>
         </p:spPr>
         <p:txBody>
-          <a:bodyPr wrap="square">
+          <a:bodyPr wrap="square" lIns="45720" rIns="45720" tIns="27432" bIns="27432">
             <a:spAutoFit/>
           </a:bodyPr>
           <a:lstStyle/>
@@ -4126,7 +4126,7 @@
           <a:noFill/>
         </p:spPr>
         <p:txBody>
-          <a:bodyPr wrap="square">
+          <a:bodyPr wrap="square" lIns="45720" rIns="45720" tIns="27432" bIns="27432">
             <a:spAutoFit/>
           </a:bodyPr>
           <a:lstStyle/>
@@ -4188,7 +4188,7 @@
           <a:noFill/>
         </p:spPr>
         <p:txBody>
-          <a:bodyPr wrap="square">
+          <a:bodyPr wrap="square" lIns="45720" rIns="45720" tIns="27432" bIns="27432">
             <a:spAutoFit/>
           </a:bodyPr>
           <a:lstStyle/>
@@ -4259,7 +4259,7 @@
         <p:spPr>
           <a:xfrm>
             <a:off x="457200" y="822960"/>
-            <a:ext cx="8229600" cy="274320"/>
+            <a:ext cx="4114800" cy="274320"/>
           </a:xfrm>
           <a:prstGeom prst="rect">
             <a:avLst/>
@@ -4267,7 +4267,7 @@
           <a:noFill/>
         </p:spPr>
         <p:txBody>
-          <a:bodyPr wrap="square">
+          <a:bodyPr wrap="square" lIns="45720" rIns="45720" tIns="27432" bIns="27432">
             <a:spAutoFit/>
           </a:bodyPr>
           <a:lstStyle/>
@@ -4325,7 +4325,7 @@
                       </a:pPr>
                     </a:p>
                   </a:txBody>
-                  <a:tcPr>
+                  <a:tcPr marL="45720" marR="45720" marT="18288" marB="18288">
                     <a:solidFill>
                       <a:srgbClr val="3D6B5E"/>
                     </a:solidFill>
@@ -4349,7 +4349,7 @@
                       </a:r>
                     </a:p>
                   </a:txBody>
-                  <a:tcPr>
+                  <a:tcPr marL="45720" marR="45720" marT="18288" marB="18288">
                     <a:solidFill>
                       <a:srgbClr val="3D6B5E"/>
                     </a:solidFill>
@@ -4373,7 +4373,7 @@
                       </a:r>
                     </a:p>
                   </a:txBody>
-                  <a:tcPr>
+                  <a:tcPr marL="45720" marR="45720" marT="18288" marB="18288">
                     <a:solidFill>
                       <a:srgbClr val="3D6B5E"/>
                     </a:solidFill>
@@ -4399,7 +4399,7 @@
                       </a:r>
                     </a:p>
                   </a:txBody>
-                  <a:tcPr>
+                  <a:tcPr marL="45720" marR="45720" marT="18288" marB="18288">
                     <a:solidFill>
                       <a:srgbClr val="F0F7F2"/>
                     </a:solidFill>
@@ -4423,7 +4423,7 @@
                       </a:r>
                     </a:p>
                   </a:txBody>
-                  <a:tcPr>
+                  <a:tcPr marL="45720" marR="45720" marT="18288" marB="18288">
                     <a:solidFill>
                       <a:srgbClr val="F0F7F2"/>
                     </a:solidFill>
@@ -4447,7 +4447,7 @@
                       </a:r>
                     </a:p>
                   </a:txBody>
-                  <a:tcPr>
+                  <a:tcPr marL="45720" marR="45720" marT="18288" marB="18288">
                     <a:solidFill>
                       <a:srgbClr val="F0F7F2"/>
                     </a:solidFill>
@@ -4473,7 +4473,7 @@
                       </a:r>
                     </a:p>
                   </a:txBody>
-                  <a:tcPr>
+                  <a:tcPr marL="45720" marR="45720" marT="18288" marB="18288">
                     <a:solidFill>
                       <a:srgbClr val="FFF8F0"/>
                     </a:solidFill>
@@ -4497,7 +4497,7 @@
                       </a:r>
                     </a:p>
                   </a:txBody>
-                  <a:tcPr>
+                  <a:tcPr marL="45720" marR="45720" marT="18288" marB="18288">
                     <a:solidFill>
                       <a:srgbClr val="FFF8F0"/>
                     </a:solidFill>
@@ -4521,7 +4521,7 @@
                       </a:r>
                     </a:p>
                   </a:txBody>
-                  <a:tcPr>
+                  <a:tcPr marL="45720" marR="45720" marT="18288" marB="18288">
                     <a:solidFill>
                       <a:srgbClr val="FFF8F0"/>
                     </a:solidFill>
@@ -4549,7 +4549,7 @@
           <a:noFill/>
         </p:spPr>
         <p:txBody>
-          <a:bodyPr wrap="square">
+          <a:bodyPr wrap="square" lIns="45720" rIns="45720" tIns="27432" bIns="27432">
             <a:spAutoFit/>
           </a:bodyPr>
           <a:lstStyle/>
@@ -4609,7 +4609,7 @@
                       </a:r>
                     </a:p>
                   </a:txBody>
-                  <a:tcPr>
+                  <a:tcPr marL="45720" marR="45720" marT="18288" marB="18288">
                     <a:solidFill>
                       <a:srgbClr val="3D6B5E"/>
                     </a:solidFill>
@@ -4633,7 +4633,7 @@
                       </a:r>
                     </a:p>
                   </a:txBody>
-                  <a:tcPr>
+                  <a:tcPr marL="45720" marR="45720" marT="18288" marB="18288">
                     <a:solidFill>
                       <a:srgbClr val="3D6B5E"/>
                     </a:solidFill>
@@ -4659,7 +4659,7 @@
                       </a:r>
                     </a:p>
                   </a:txBody>
-                  <a:tcPr>
+                  <a:tcPr marL="45720" marR="45720" marT="18288" marB="18288">
                     <a:solidFill>
                       <a:srgbClr val="F0F7F2"/>
                     </a:solidFill>
@@ -4683,7 +4683,7 @@
                       </a:r>
                     </a:p>
                   </a:txBody>
-                  <a:tcPr>
+                  <a:tcPr marL="45720" marR="45720" marT="18288" marB="18288">
                     <a:solidFill>
                       <a:srgbClr val="F0F7F2"/>
                     </a:solidFill>
@@ -4709,7 +4709,7 @@
                       </a:r>
                     </a:p>
                   </a:txBody>
-                  <a:tcPr>
+                  <a:tcPr marL="45720" marR="45720" marT="18288" marB="18288">
                     <a:solidFill>
                       <a:srgbClr val="FFF8F0"/>
                     </a:solidFill>
@@ -4733,7 +4733,7 @@
                       </a:r>
                     </a:p>
                   </a:txBody>
-                  <a:tcPr>
+                  <a:tcPr marL="45720" marR="45720" marT="18288" marB="18288">
                     <a:solidFill>
                       <a:srgbClr val="FFF8F0"/>
                     </a:solidFill>
@@ -4759,7 +4759,7 @@
                       </a:r>
                     </a:p>
                   </a:txBody>
-                  <a:tcPr>
+                  <a:tcPr marL="45720" marR="45720" marT="18288" marB="18288">
                     <a:solidFill>
                       <a:srgbClr val="F0F7F2"/>
                     </a:solidFill>
@@ -4783,7 +4783,7 @@
                       </a:r>
                     </a:p>
                   </a:txBody>
-                  <a:tcPr>
+                  <a:tcPr marL="45720" marR="45720" marT="18288" marB="18288">
                     <a:solidFill>
                       <a:srgbClr val="F0F7F2"/>
                     </a:solidFill>
@@ -4811,7 +4811,7 @@
           <a:noFill/>
         </p:spPr>
         <p:txBody>
-          <a:bodyPr wrap="square">
+          <a:bodyPr wrap="square" lIns="45720" rIns="45720" tIns="27432" bIns="27432">
             <a:spAutoFit/>
           </a:bodyPr>
           <a:lstStyle/>
@@ -4935,7 +4935,7 @@
           <a:noFill/>
         </p:spPr>
         <p:txBody>
-          <a:bodyPr wrap="square">
+          <a:bodyPr wrap="square" lIns="45720" rIns="45720" tIns="27432" bIns="27432">
             <a:spAutoFit/>
           </a:bodyPr>
           <a:lstStyle/>
@@ -4997,7 +4997,7 @@
           <a:noFill/>
         </p:spPr>
         <p:txBody>
-          <a:bodyPr wrap="square">
+          <a:bodyPr wrap="square" lIns="45720" rIns="45720" tIns="27432" bIns="27432">
             <a:spAutoFit/>
           </a:bodyPr>
           <a:lstStyle/>
@@ -5076,7 +5076,7 @@
           <a:noFill/>
         </p:spPr>
         <p:txBody>
-          <a:bodyPr wrap="square">
+          <a:bodyPr wrap="square" lIns="45720" rIns="45720" tIns="27432" bIns="27432">
             <a:spAutoFit/>
           </a:bodyPr>
           <a:lstStyle/>
@@ -5137,7 +5137,7 @@
                       </a:r>
                     </a:p>
                   </a:txBody>
-                  <a:tcPr>
+                  <a:tcPr marL="45720" marR="45720" marT="18288" marB="18288">
                     <a:solidFill>
                       <a:srgbClr val="3D6B5E"/>
                     </a:solidFill>
@@ -5161,7 +5161,7 @@
                       </a:r>
                     </a:p>
                   </a:txBody>
-                  <a:tcPr>
+                  <a:tcPr marL="45720" marR="45720" marT="18288" marB="18288">
                     <a:solidFill>
                       <a:srgbClr val="3D6B5E"/>
                     </a:solidFill>
@@ -5185,7 +5185,7 @@
                       </a:r>
                     </a:p>
                   </a:txBody>
-                  <a:tcPr>
+                  <a:tcPr marL="45720" marR="45720" marT="18288" marB="18288">
                     <a:solidFill>
                       <a:srgbClr val="3D6B5E"/>
                     </a:solidFill>
@@ -5211,7 +5211,7 @@
                       </a:r>
                     </a:p>
                   </a:txBody>
-                  <a:tcPr>
+                  <a:tcPr marL="45720" marR="45720" marT="18288" marB="18288">
                     <a:solidFill>
                       <a:srgbClr val="F0F7F2"/>
                     </a:solidFill>
@@ -5235,7 +5235,7 @@
                       </a:r>
                     </a:p>
                   </a:txBody>
-                  <a:tcPr>
+                  <a:tcPr marL="45720" marR="45720" marT="18288" marB="18288">
                     <a:solidFill>
                       <a:srgbClr val="F0F7F2"/>
                     </a:solidFill>
@@ -5259,7 +5259,7 @@
                       </a:r>
                     </a:p>
                   </a:txBody>
-                  <a:tcPr>
+                  <a:tcPr marL="45720" marR="45720" marT="18288" marB="18288">
                     <a:solidFill>
                       <a:srgbClr val="F0F7F2"/>
                     </a:solidFill>
@@ -5285,7 +5285,7 @@
                       </a:r>
                     </a:p>
                   </a:txBody>
-                  <a:tcPr>
+                  <a:tcPr marL="45720" marR="45720" marT="18288" marB="18288">
                     <a:solidFill>
                       <a:srgbClr val="FFF8F0"/>
                     </a:solidFill>
@@ -5309,7 +5309,7 @@
                       </a:r>
                     </a:p>
                   </a:txBody>
-                  <a:tcPr>
+                  <a:tcPr marL="45720" marR="45720" marT="18288" marB="18288">
                     <a:solidFill>
                       <a:srgbClr val="FFF8F0"/>
                     </a:solidFill>
@@ -5333,7 +5333,7 @@
                       </a:r>
                     </a:p>
                   </a:txBody>
-                  <a:tcPr>
+                  <a:tcPr marL="45720" marR="45720" marT="18288" marB="18288">
                     <a:solidFill>
                       <a:srgbClr val="FFF8F0"/>
                     </a:solidFill>
@@ -5359,7 +5359,7 @@
                       </a:r>
                     </a:p>
                   </a:txBody>
-                  <a:tcPr>
+                  <a:tcPr marL="45720" marR="45720" marT="18288" marB="18288">
                     <a:solidFill>
                       <a:srgbClr val="F0F7F2"/>
                     </a:solidFill>
@@ -5383,7 +5383,7 @@
                       </a:r>
                     </a:p>
                   </a:txBody>
-                  <a:tcPr>
+                  <a:tcPr marL="45720" marR="45720" marT="18288" marB="18288">
                     <a:solidFill>
                       <a:srgbClr val="F0F7F2"/>
                     </a:solidFill>
@@ -5407,7 +5407,7 @@
                       </a:r>
                     </a:p>
                   </a:txBody>
-                  <a:tcPr>
+                  <a:tcPr marL="45720" marR="45720" marT="18288" marB="18288">
                     <a:solidFill>
                       <a:srgbClr val="F0F7F2"/>
                     </a:solidFill>
@@ -5435,7 +5435,7 @@
           <a:noFill/>
         </p:spPr>
         <p:txBody>
-          <a:bodyPr wrap="square">
+          <a:bodyPr wrap="square" lIns="45720" rIns="45720" tIns="27432" bIns="27432">
             <a:spAutoFit/>
           </a:bodyPr>
           <a:lstStyle/>
@@ -5471,7 +5471,7 @@
           <a:noFill/>
         </p:spPr>
         <p:txBody>
-          <a:bodyPr wrap="square">
+          <a:bodyPr wrap="square" lIns="45720" rIns="45720" tIns="27432" bIns="27432">
             <a:spAutoFit/>
           </a:bodyPr>
           <a:lstStyle/>
@@ -5638,7 +5638,7 @@
           <a:noFill/>
         </p:spPr>
         <p:txBody>
-          <a:bodyPr wrap="square">
+          <a:bodyPr wrap="square" lIns="45720" rIns="45720" tIns="27432" bIns="27432">
             <a:spAutoFit/>
           </a:bodyPr>
           <a:lstStyle/>
@@ -5700,7 +5700,7 @@
           <a:noFill/>
         </p:spPr>
         <p:txBody>
-          <a:bodyPr wrap="square">
+          <a:bodyPr wrap="square" lIns="45720" rIns="45720" tIns="27432" bIns="27432">
             <a:spAutoFit/>
           </a:bodyPr>
           <a:lstStyle/>
@@ -5803,7 +5803,7 @@
                       </a:r>
                     </a:p>
                   </a:txBody>
-                  <a:tcPr>
+                  <a:tcPr marL="45720" marR="45720" marT="18288" marB="18288">
                     <a:solidFill>
                       <a:srgbClr val="3D6B5E"/>
                     </a:solidFill>
@@ -5827,7 +5827,7 @@
                       </a:r>
                     </a:p>
                   </a:txBody>
-                  <a:tcPr>
+                  <a:tcPr marL="45720" marR="45720" marT="18288" marB="18288">
                     <a:solidFill>
                       <a:srgbClr val="3D6B5E"/>
                     </a:solidFill>
@@ -5853,7 +5853,7 @@
                       </a:r>
                     </a:p>
                   </a:txBody>
-                  <a:tcPr>
+                  <a:tcPr marL="45720" marR="45720" marT="18288" marB="18288">
                     <a:solidFill>
                       <a:srgbClr val="F0F7F2"/>
                     </a:solidFill>
@@ -5877,7 +5877,7 @@
                       </a:r>
                     </a:p>
                   </a:txBody>
-                  <a:tcPr>
+                  <a:tcPr marL="45720" marR="45720" marT="18288" marB="18288">
                     <a:solidFill>
                       <a:srgbClr val="F0F7F2"/>
                     </a:solidFill>
@@ -5903,7 +5903,7 @@
                       </a:r>
                     </a:p>
                   </a:txBody>
-                  <a:tcPr>
+                  <a:tcPr marL="45720" marR="45720" marT="18288" marB="18288">
                     <a:solidFill>
                       <a:srgbClr val="FFF8F0"/>
                     </a:solidFill>
@@ -5927,7 +5927,7 @@
                       </a:r>
                     </a:p>
                   </a:txBody>
-                  <a:tcPr>
+                  <a:tcPr marL="45720" marR="45720" marT="18288" marB="18288">
                     <a:solidFill>
                       <a:srgbClr val="FFF8F0"/>
                     </a:solidFill>
@@ -5953,7 +5953,7 @@
                       </a:r>
                     </a:p>
                   </a:txBody>
-                  <a:tcPr>
+                  <a:tcPr marL="45720" marR="45720" marT="18288" marB="18288">
                     <a:solidFill>
                       <a:srgbClr val="F0F7F2"/>
                     </a:solidFill>
@@ -5977,7 +5977,7 @@
                       </a:r>
                     </a:p>
                   </a:txBody>
-                  <a:tcPr>
+                  <a:tcPr marL="45720" marR="45720" marT="18288" marB="18288">
                     <a:solidFill>
                       <a:srgbClr val="F0F7F2"/>
                     </a:solidFill>
@@ -6003,7 +6003,7 @@
                       </a:r>
                     </a:p>
                   </a:txBody>
-                  <a:tcPr>
+                  <a:tcPr marL="45720" marR="45720" marT="18288" marB="18288">
                     <a:solidFill>
                       <a:srgbClr val="FFF8F0"/>
                     </a:solidFill>
@@ -6027,7 +6027,7 @@
                       </a:r>
                     </a:p>
                   </a:txBody>
-                  <a:tcPr>
+                  <a:tcPr marL="45720" marR="45720" marT="18288" marB="18288">
                     <a:solidFill>
                       <a:srgbClr val="FFF8F0"/>
                     </a:solidFill>
@@ -6053,7 +6053,7 @@
                       </a:r>
                     </a:p>
                   </a:txBody>
-                  <a:tcPr>
+                  <a:tcPr marL="45720" marR="45720" marT="18288" marB="18288">
                     <a:solidFill>
                       <a:srgbClr val="F0F7F2"/>
                     </a:solidFill>
@@ -6077,7 +6077,7 @@
                       </a:r>
                     </a:p>
                   </a:txBody>
-                  <a:tcPr>
+                  <a:tcPr marL="45720" marR="45720" marT="18288" marB="18288">
                     <a:solidFill>
                       <a:srgbClr val="F0F7F2"/>
                     </a:solidFill>
@@ -6131,7 +6131,7 @@
           <a:noFill/>
         </p:spPr>
         <p:txBody>
-          <a:bodyPr wrap="square">
+          <a:bodyPr wrap="square" lIns="45720" rIns="45720" tIns="27432" bIns="27432">
             <a:spAutoFit/>
           </a:bodyPr>
           <a:lstStyle/>
@@ -6210,7 +6210,7 @@
           <a:noFill/>
         </p:spPr>
         <p:txBody>
-          <a:bodyPr wrap="square">
+          <a:bodyPr wrap="square" lIns="45720" rIns="45720" tIns="27432" bIns="27432">
             <a:spAutoFit/>
           </a:bodyPr>
           <a:lstStyle/>
@@ -6334,7 +6334,7 @@
           <a:noFill/>
         </p:spPr>
         <p:txBody>
-          <a:bodyPr wrap="square">
+          <a:bodyPr wrap="square" lIns="45720" rIns="45720" tIns="27432" bIns="27432">
             <a:spAutoFit/>
           </a:bodyPr>
           <a:lstStyle/>
@@ -6370,7 +6370,7 @@
           <a:noFill/>
         </p:spPr>
         <p:txBody>
-          <a:bodyPr wrap="square">
+          <a:bodyPr wrap="square" lIns="45720" rIns="45720" tIns="27432" bIns="27432">
             <a:spAutoFit/>
           </a:bodyPr>
           <a:lstStyle/>
@@ -6461,7 +6461,7 @@
           <a:noFill/>
         </p:spPr>
         <p:txBody>
-          <a:bodyPr wrap="square">
+          <a:bodyPr wrap="square" lIns="45720" rIns="45720" tIns="27432" bIns="27432">
             <a:spAutoFit/>
           </a:bodyPr>
           <a:lstStyle/>
@@ -6540,7 +6540,7 @@
           <a:noFill/>
         </p:spPr>
         <p:txBody>
-          <a:bodyPr wrap="square">
+          <a:bodyPr wrap="square" lIns="45720" rIns="45720" tIns="27432" bIns="27432">
             <a:spAutoFit/>
           </a:bodyPr>
           <a:lstStyle/>
@@ -6601,7 +6601,7 @@
                       </a:r>
                     </a:p>
                   </a:txBody>
-                  <a:tcPr>
+                  <a:tcPr marL="45720" marR="45720" marT="18288" marB="18288">
                     <a:solidFill>
                       <a:srgbClr val="3D6B5E"/>
                     </a:solidFill>
@@ -6625,7 +6625,7 @@
                       </a:r>
                     </a:p>
                   </a:txBody>
-                  <a:tcPr>
+                  <a:tcPr marL="45720" marR="45720" marT="18288" marB="18288">
                     <a:solidFill>
                       <a:srgbClr val="3D6B5E"/>
                     </a:solidFill>
@@ -6649,7 +6649,7 @@
                       </a:r>
                     </a:p>
                   </a:txBody>
-                  <a:tcPr>
+                  <a:tcPr marL="45720" marR="45720" marT="18288" marB="18288">
                     <a:solidFill>
                       <a:srgbClr val="3D6B5E"/>
                     </a:solidFill>
@@ -6675,7 +6675,7 @@
                       </a:r>
                     </a:p>
                   </a:txBody>
-                  <a:tcPr>
+                  <a:tcPr marL="45720" marR="45720" marT="18288" marB="18288">
                     <a:solidFill>
                       <a:srgbClr val="F0F7F2"/>
                     </a:solidFill>
@@ -6699,7 +6699,7 @@
                       </a:r>
                     </a:p>
                   </a:txBody>
-                  <a:tcPr>
+                  <a:tcPr marL="45720" marR="45720" marT="18288" marB="18288">
                     <a:solidFill>
                       <a:srgbClr val="F0F7F2"/>
                     </a:solidFill>
@@ -6723,7 +6723,7 @@
                       </a:r>
                     </a:p>
                   </a:txBody>
-                  <a:tcPr>
+                  <a:tcPr marL="45720" marR="45720" marT="18288" marB="18288">
                     <a:solidFill>
                       <a:srgbClr val="F0F7F2"/>
                     </a:solidFill>
@@ -6749,7 +6749,7 @@
                       </a:r>
                     </a:p>
                   </a:txBody>
-                  <a:tcPr>
+                  <a:tcPr marL="45720" marR="45720" marT="18288" marB="18288">
                     <a:solidFill>
                       <a:srgbClr val="FFF8F0"/>
                     </a:solidFill>
@@ -6773,7 +6773,7 @@
                       </a:r>
                     </a:p>
                   </a:txBody>
-                  <a:tcPr>
+                  <a:tcPr marL="45720" marR="45720" marT="18288" marB="18288">
                     <a:solidFill>
                       <a:srgbClr val="FFF8F0"/>
                     </a:solidFill>
@@ -6797,7 +6797,7 @@
                       </a:r>
                     </a:p>
                   </a:txBody>
-                  <a:tcPr>
+                  <a:tcPr marL="45720" marR="45720" marT="18288" marB="18288">
                     <a:solidFill>
                       <a:srgbClr val="FFF8F0"/>
                     </a:solidFill>
@@ -6823,7 +6823,7 @@
                       </a:r>
                     </a:p>
                   </a:txBody>
-                  <a:tcPr>
+                  <a:tcPr marL="45720" marR="45720" marT="18288" marB="18288">
                     <a:solidFill>
                       <a:srgbClr val="F0F7F2"/>
                     </a:solidFill>
@@ -6847,7 +6847,7 @@
                       </a:r>
                     </a:p>
                   </a:txBody>
-                  <a:tcPr>
+                  <a:tcPr marL="45720" marR="45720" marT="18288" marB="18288">
                     <a:solidFill>
                       <a:srgbClr val="F0F7F2"/>
                     </a:solidFill>
@@ -6871,7 +6871,7 @@
                       </a:r>
                     </a:p>
                   </a:txBody>
-                  <a:tcPr>
+                  <a:tcPr marL="45720" marR="45720" marT="18288" marB="18288">
                     <a:solidFill>
                       <a:srgbClr val="F0F7F2"/>
                     </a:solidFill>
@@ -6899,7 +6899,7 @@
           <a:noFill/>
         </p:spPr>
         <p:txBody>
-          <a:bodyPr wrap="square">
+          <a:bodyPr wrap="square" lIns="45720" rIns="45720" tIns="27432" bIns="27432">
             <a:spAutoFit/>
           </a:bodyPr>
           <a:lstStyle/>
@@ -6959,7 +6959,7 @@
                       </a:r>
                     </a:p>
                   </a:txBody>
-                  <a:tcPr>
+                  <a:tcPr marL="45720" marR="45720" marT="18288" marB="18288">
                     <a:solidFill>
                       <a:srgbClr val="3D6B5E"/>
                     </a:solidFill>
@@ -6983,7 +6983,7 @@
                       </a:r>
                     </a:p>
                   </a:txBody>
-                  <a:tcPr>
+                  <a:tcPr marL="45720" marR="45720" marT="18288" marB="18288">
                     <a:solidFill>
                       <a:srgbClr val="3D6B5E"/>
                     </a:solidFill>
@@ -7009,7 +7009,7 @@
                       </a:r>
                     </a:p>
                   </a:txBody>
-                  <a:tcPr>
+                  <a:tcPr marL="45720" marR="45720" marT="18288" marB="18288">
                     <a:solidFill>
                       <a:srgbClr val="F0F7F2"/>
                     </a:solidFill>
@@ -7033,7 +7033,7 @@
                       </a:r>
                     </a:p>
                   </a:txBody>
-                  <a:tcPr>
+                  <a:tcPr marL="45720" marR="45720" marT="18288" marB="18288">
                     <a:solidFill>
                       <a:srgbClr val="F0F7F2"/>
                     </a:solidFill>
@@ -7059,7 +7059,7 @@
                       </a:r>
                     </a:p>
                   </a:txBody>
-                  <a:tcPr>
+                  <a:tcPr marL="45720" marR="45720" marT="18288" marB="18288">
                     <a:solidFill>
                       <a:srgbClr val="FFF8F0"/>
                     </a:solidFill>
@@ -7083,7 +7083,7 @@
                       </a:r>
                     </a:p>
                   </a:txBody>
-                  <a:tcPr>
+                  <a:tcPr marL="45720" marR="45720" marT="18288" marB="18288">
                     <a:solidFill>
                       <a:srgbClr val="FFF8F0"/>
                     </a:solidFill>
@@ -7109,7 +7109,7 @@
                       </a:r>
                     </a:p>
                   </a:txBody>
-                  <a:tcPr>
+                  <a:tcPr marL="45720" marR="45720" marT="18288" marB="18288">
                     <a:solidFill>
                       <a:srgbClr val="F0F7F2"/>
                     </a:solidFill>
@@ -7133,7 +7133,7 @@
                       </a:r>
                     </a:p>
                   </a:txBody>
-                  <a:tcPr>
+                  <a:tcPr marL="45720" marR="45720" marT="18288" marB="18288">
                     <a:solidFill>
                       <a:srgbClr val="F0F7F2"/>
                     </a:solidFill>
@@ -7159,7 +7159,7 @@
                       </a:r>
                     </a:p>
                   </a:txBody>
-                  <a:tcPr>
+                  <a:tcPr marL="45720" marR="45720" marT="18288" marB="18288">
                     <a:solidFill>
                       <a:srgbClr val="FFF8F0"/>
                     </a:solidFill>
@@ -7183,7 +7183,7 @@
                       </a:r>
                     </a:p>
                   </a:txBody>
-                  <a:tcPr>
+                  <a:tcPr marL="45720" marR="45720" marT="18288" marB="18288">
                     <a:solidFill>
                       <a:srgbClr val="FFF8F0"/>
                     </a:solidFill>
@@ -7299,7 +7299,7 @@
           <a:noFill/>
         </p:spPr>
         <p:txBody>
-          <a:bodyPr wrap="square">
+          <a:bodyPr wrap="square" lIns="45720" rIns="45720" tIns="27432" bIns="27432">
             <a:spAutoFit/>
           </a:bodyPr>
           <a:lstStyle/>

--- a/output/education/2026-03-27_medical-fee-revision-2026/medical-fee-revision-2026_slides_allstaff.pptx
+++ b/output/education/2026-03-27_medical-fee-revision-2026/medical-fee-revision-2026_slides_allstaff.pptx
@@ -3146,7 +3146,7 @@
         </p:nvSpPr>
         <p:spPr>
           <a:xfrm>
-            <a:off x="457200" y="1097280"/>
+            <a:off x="457200" y="914400"/>
             <a:ext cx="8229600" cy="1097280"/>
           </a:xfrm>
           <a:prstGeom prst="rect">
@@ -3161,7 +3161,7 @@
           <a:lstStyle/>
           <a:p>
             <a:pPr algn="ctr">
-              <a:defRPr sz="4800" b="1">
+              <a:defRPr sz="6400" b="1">
                 <a:solidFill>
                   <a:srgbClr val="E8A84C"/>
                 </a:solidFill>
@@ -3169,7 +3169,7 @@
               </a:defRPr>
             </a:pPr>
             <a:r>
-              <a:t>本体 +3.09%</a:t>
+              <a:t>+3.09%</a:t>
             </a:r>
           </a:p>
         </p:txBody>
@@ -3182,7 +3182,7 @@
         </p:nvSpPr>
         <p:spPr>
           <a:xfrm>
-            <a:off x="457200" y="2286000"/>
+            <a:off x="457200" y="2103120"/>
             <a:ext cx="8229600" cy="457200"/>
           </a:xfrm>
           <a:prstGeom prst="rect">
@@ -3205,7 +3205,7 @@
               </a:defRPr>
             </a:pPr>
             <a:r>
-              <a:t>30年ぶりの大改定 — あなたの生活に直結します</a:t>
+              <a:t>30年ぶりの大改定 — あなたの給与に直結します</a:t>
             </a:r>
           </a:p>
         </p:txBody>
@@ -3218,8 +3218,8 @@
         </p:nvSpPr>
         <p:spPr>
           <a:xfrm>
-            <a:off x="3200400" y="2834640"/>
-            <a:ext cx="2743200" cy="54864"/>
+            <a:off x="2743200" y="2743200"/>
+            <a:ext cx="3657600" cy="54864"/>
           </a:xfrm>
           <a:prstGeom prst="rect">
             <a:avLst/>
@@ -3253,292 +3253,16 @@
           </a:p>
         </p:txBody>
       </p:sp>
-      <p:graphicFrame>
-        <p:nvGraphicFramePr>
-          <p:cNvPr id="6" name="Table 5"/>
-          <p:cNvGraphicFramePr>
-            <a:graphicFrameLocks noGrp="1"/>
-          </p:cNvGraphicFramePr>
-          <p:nvPr/>
-        </p:nvGraphicFramePr>
-        <p:xfrm>
-          <a:off x="2560320" y="3108960"/>
-          <a:ext cx="4023360" cy="1371600"/>
-        </p:xfrm>
-        <a:graphic>
-          <a:graphicData uri="http://schemas.openxmlformats.org/drawingml/2006/table">
-            <a:tbl>
-              <a:tblPr firstRow="1" bandRow="1">
-                <a:tableStyleId>{5C22544A-7EE6-4342-B048-85BDC9FD1C3A}</a:tableStyleId>
-              </a:tblPr>
-              <a:tblGrid>
-                <a:gridCol w="2011680"/>
-                <a:gridCol w="2011680"/>
-              </a:tblGrid>
-              <a:tr h="274320">
-                <a:tc>
-                  <a:txBody>
-                    <a:bodyPr/>
-                    <a:lstStyle/>
-                    <a:p>
-                      <a:pPr>
-                        <a:defRPr sz="1000" b="1">
-                          <a:solidFill>
-                            <a:srgbClr val="FFF8F0"/>
-                          </a:solidFill>
-                          <a:latin typeface="Calibri"/>
-                        </a:defRPr>
-                      </a:pPr>
-                      <a:r>
-                        <a:t>内訳</a:t>
-                      </a:r>
-                    </a:p>
-                  </a:txBody>
-                  <a:tcPr marL="45720" marR="45720" marT="18288" marB="18288">
-                    <a:solidFill>
-                      <a:srgbClr val="3D6B5E"/>
-                    </a:solidFill>
-                  </a:tcPr>
-                </a:tc>
-                <a:tc>
-                  <a:txBody>
-                    <a:bodyPr/>
-                    <a:lstStyle/>
-                    <a:p>
-                      <a:pPr>
-                        <a:defRPr sz="1000" b="1">
-                          <a:solidFill>
-                            <a:srgbClr val="FFF8F0"/>
-                          </a:solidFill>
-                          <a:latin typeface="Calibri"/>
-                        </a:defRPr>
-                      </a:pPr>
-                      <a:r>
-                        <a:t>割合</a:t>
-                      </a:r>
-                    </a:p>
-                  </a:txBody>
-                  <a:tcPr marL="45720" marR="45720" marT="18288" marB="18288">
-                    <a:solidFill>
-                      <a:srgbClr val="3D6B5E"/>
-                    </a:solidFill>
-                  </a:tcPr>
-                </a:tc>
-              </a:tr>
-              <a:tr h="274320">
-                <a:tc>
-                  <a:txBody>
-                    <a:bodyPr/>
-                    <a:lstStyle/>
-                    <a:p>
-                      <a:pPr>
-                        <a:defRPr sz="1000">
-                          <a:solidFill>
-                            <a:srgbClr val="2D2D2D"/>
-                          </a:solidFill>
-                          <a:latin typeface="Calibri"/>
-                        </a:defRPr>
-                      </a:pPr>
-                      <a:r>
-                        <a:t>賃上げ</a:t>
-                      </a:r>
-                    </a:p>
-                  </a:txBody>
-                  <a:tcPr marL="45720" marR="45720" marT="18288" marB="18288">
-                    <a:solidFill>
-                      <a:srgbClr val="F0F7F2"/>
-                    </a:solidFill>
-                  </a:tcPr>
-                </a:tc>
-                <a:tc>
-                  <a:txBody>
-                    <a:bodyPr/>
-                    <a:lstStyle/>
-                    <a:p>
-                      <a:pPr>
-                        <a:defRPr sz="1000">
-                          <a:solidFill>
-                            <a:srgbClr val="2D2D2D"/>
-                          </a:solidFill>
-                          <a:latin typeface="Calibri"/>
-                        </a:defRPr>
-                      </a:pPr>
-                      <a:r>
-                        <a:t>+1.70%</a:t>
-                      </a:r>
-                    </a:p>
-                  </a:txBody>
-                  <a:tcPr marL="45720" marR="45720" marT="18288" marB="18288">
-                    <a:solidFill>
-                      <a:srgbClr val="F0F7F2"/>
-                    </a:solidFill>
-                  </a:tcPr>
-                </a:tc>
-              </a:tr>
-              <a:tr h="274320">
-                <a:tc>
-                  <a:txBody>
-                    <a:bodyPr/>
-                    <a:lstStyle/>
-                    <a:p>
-                      <a:pPr>
-                        <a:defRPr sz="1000">
-                          <a:solidFill>
-                            <a:srgbClr val="2D2D2D"/>
-                          </a:solidFill>
-                          <a:latin typeface="Calibri"/>
-                        </a:defRPr>
-                      </a:pPr>
-                      <a:r>
-                        <a:t>物価高騰対応</a:t>
-                      </a:r>
-                    </a:p>
-                  </a:txBody>
-                  <a:tcPr marL="45720" marR="45720" marT="18288" marB="18288">
-                    <a:solidFill>
-                      <a:srgbClr val="FFF8F0"/>
-                    </a:solidFill>
-                  </a:tcPr>
-                </a:tc>
-                <a:tc>
-                  <a:txBody>
-                    <a:bodyPr/>
-                    <a:lstStyle/>
-                    <a:p>
-                      <a:pPr>
-                        <a:defRPr sz="1000">
-                          <a:solidFill>
-                            <a:srgbClr val="2D2D2D"/>
-                          </a:solidFill>
-                          <a:latin typeface="Calibri"/>
-                        </a:defRPr>
-                      </a:pPr>
-                      <a:r>
-                        <a:t>+0.76%</a:t>
-                      </a:r>
-                    </a:p>
-                  </a:txBody>
-                  <a:tcPr marL="45720" marR="45720" marT="18288" marB="18288">
-                    <a:solidFill>
-                      <a:srgbClr val="FFF8F0"/>
-                    </a:solidFill>
-                  </a:tcPr>
-                </a:tc>
-              </a:tr>
-              <a:tr h="274320">
-                <a:tc>
-                  <a:txBody>
-                    <a:bodyPr/>
-                    <a:lstStyle/>
-                    <a:p>
-                      <a:pPr>
-                        <a:defRPr sz="1000">
-                          <a:solidFill>
-                            <a:srgbClr val="2D2D2D"/>
-                          </a:solidFill>
-                          <a:latin typeface="Calibri"/>
-                        </a:defRPr>
-                      </a:pPr>
-                      <a:r>
-                        <a:t>食費・光熱水費</a:t>
-                      </a:r>
-                    </a:p>
-                  </a:txBody>
-                  <a:tcPr marL="45720" marR="45720" marT="18288" marB="18288">
-                    <a:solidFill>
-                      <a:srgbClr val="F0F7F2"/>
-                    </a:solidFill>
-                  </a:tcPr>
-                </a:tc>
-                <a:tc>
-                  <a:txBody>
-                    <a:bodyPr/>
-                    <a:lstStyle/>
-                    <a:p>
-                      <a:pPr>
-                        <a:defRPr sz="1000">
-                          <a:solidFill>
-                            <a:srgbClr val="2D2D2D"/>
-                          </a:solidFill>
-                          <a:latin typeface="Calibri"/>
-                        </a:defRPr>
-                      </a:pPr>
-                      <a:r>
-                        <a:t>+0.09%</a:t>
-                      </a:r>
-                    </a:p>
-                  </a:txBody>
-                  <a:tcPr marL="45720" marR="45720" marT="18288" marB="18288">
-                    <a:solidFill>
-                      <a:srgbClr val="F0F7F2"/>
-                    </a:solidFill>
-                  </a:tcPr>
-                </a:tc>
-              </a:tr>
-              <a:tr h="274320">
-                <a:tc>
-                  <a:txBody>
-                    <a:bodyPr/>
-                    <a:lstStyle/>
-                    <a:p>
-                      <a:pPr>
-                        <a:defRPr sz="1000">
-                          <a:solidFill>
-                            <a:srgbClr val="2D2D2D"/>
-                          </a:solidFill>
-                          <a:latin typeface="Calibri"/>
-                        </a:defRPr>
-                      </a:pPr>
-                      <a:r>
-                        <a:t>経営改善</a:t>
-                      </a:r>
-                    </a:p>
-                  </a:txBody>
-                  <a:tcPr marL="45720" marR="45720" marT="18288" marB="18288">
-                    <a:solidFill>
-                      <a:srgbClr val="FFF8F0"/>
-                    </a:solidFill>
-                  </a:tcPr>
-                </a:tc>
-                <a:tc>
-                  <a:txBody>
-                    <a:bodyPr/>
-                    <a:lstStyle/>
-                    <a:p>
-                      <a:pPr>
-                        <a:defRPr sz="1000">
-                          <a:solidFill>
-                            <a:srgbClr val="2D2D2D"/>
-                          </a:solidFill>
-                          <a:latin typeface="Calibri"/>
-                        </a:defRPr>
-                      </a:pPr>
-                      <a:r>
-                        <a:t>+0.44%</a:t>
-                      </a:r>
-                    </a:p>
-                  </a:txBody>
-                  <a:tcPr marL="45720" marR="45720" marT="18288" marB="18288">
-                    <a:solidFill>
-                      <a:srgbClr val="FFF8F0"/>
-                    </a:solidFill>
-                  </a:tcPr>
-                </a:tc>
-              </a:tr>
-            </a:tbl>
-          </a:graphicData>
-        </a:graphic>
-      </p:graphicFrame>
-      <p:sp>
-        <p:nvSpPr>
-          <p:cNvPr id="7" name="Rectangle 6"/>
+      <p:sp>
+        <p:nvSpPr>
+          <p:cNvPr id="6" name="Rectangle 5"/>
           <p:cNvSpPr/>
           <p:nvPr/>
         </p:nvSpPr>
         <p:spPr>
           <a:xfrm>
-            <a:off x="457200" y="4297680"/>
-            <a:ext cx="54864" cy="548640"/>
+            <a:off x="457200" y="3108960"/>
+            <a:ext cx="54864" cy="731520"/>
           </a:xfrm>
           <a:prstGeom prst="rect">
             <a:avLst/>
@@ -3574,14 +3298,14 @@
       </p:sp>
       <p:sp>
         <p:nvSpPr>
-          <p:cNvPr id="8" name="Rectangle 7"/>
+          <p:cNvPr id="7" name="Rectangle 6"/>
           <p:cNvSpPr/>
           <p:nvPr/>
         </p:nvSpPr>
         <p:spPr>
           <a:xfrm>
-            <a:off x="566928" y="4297680"/>
-            <a:ext cx="8119872" cy="548640"/>
+            <a:off x="566928" y="3108960"/>
+            <a:ext cx="8119872" cy="731520"/>
           </a:xfrm>
           <a:prstGeom prst="rect">
             <a:avLst/>
@@ -3619,14 +3343,14 @@
       </p:sp>
       <p:sp>
         <p:nvSpPr>
-          <p:cNvPr id="9" name="TextBox 8"/>
+          <p:cNvPr id="8" name="TextBox 7"/>
           <p:cNvSpPr txBox="1"/>
           <p:nvPr/>
         </p:nvSpPr>
         <p:spPr>
           <a:xfrm>
-            <a:off x="685800" y="4370832"/>
-            <a:ext cx="7863840" cy="402335"/>
+            <a:off x="685800" y="3182112"/>
+            <a:ext cx="7863840" cy="585216"/>
           </a:xfrm>
           <a:prstGeom prst="rect">
             <a:avLst/>
@@ -3640,7 +3364,7 @@
           <a:lstStyle/>
           <a:p>
             <a:pPr algn="l">
-              <a:defRPr sz="1200" b="0">
+              <a:defRPr sz="1300" b="0">
                 <a:solidFill>
                   <a:srgbClr val="2D2D2D"/>
                 </a:solidFill>
@@ -3648,7 +3372,11 @@
               </a:defRPr>
             </a:pPr>
             <a:r>
-              <a:t>今回の改定は、皆さんの給与・処遇に直接つながる改定です。</a:t>
+              <a:t>改定の半分以上は「賃上げ」と「物価対策」。</a:t>
+            </a:r>
+            <a:br/>
+            <a:r>
+              <a:t>皆さんの処遇改善に直接つながる改定です。</a:t>
             </a:r>
           </a:p>
         </p:txBody>
@@ -3688,7 +3416,7 @@
         <p:spPr>
           <a:xfrm>
             <a:off x="457200" y="274320"/>
-            <a:ext cx="8229600" cy="457200"/>
+            <a:ext cx="8229600" cy="548640"/>
           </a:xfrm>
           <a:prstGeom prst="rect">
             <a:avLst/>
@@ -3710,7 +3438,7 @@
               </a:defRPr>
             </a:pPr>
             <a:r>
-              <a:t>今日知ってほしいこと</a:t>
+              <a:t>10分で3つだけ覚えてください</a:t>
             </a:r>
           </a:p>
         </p:txBody>
@@ -3723,7 +3451,7 @@
         </p:nvSpPr>
         <p:spPr>
           <a:xfrm>
-            <a:off x="457200" y="777240"/>
+            <a:off x="457200" y="822960"/>
             <a:ext cx="1828800" cy="54864"/>
           </a:xfrm>
           <a:prstGeom prst="rect">
@@ -3760,50 +3488,14 @@
       </p:sp>
       <p:sp>
         <p:nvSpPr>
-          <p:cNvPr id="4" name="TextBox 3"/>
-          <p:cNvSpPr txBox="1"/>
-          <p:nvPr/>
-        </p:nvSpPr>
-        <p:spPr>
-          <a:xfrm>
-            <a:off x="457200" y="1005840"/>
-            <a:ext cx="8229600" cy="365760"/>
-          </a:xfrm>
-          <a:prstGeom prst="rect">
-            <a:avLst/>
-          </a:prstGeom>
-          <a:noFill/>
-        </p:spPr>
-        <p:txBody>
-          <a:bodyPr wrap="square" lIns="45720" rIns="45720" tIns="27432" bIns="27432">
-            <a:spAutoFit/>
-          </a:bodyPr>
-          <a:lstStyle/>
-          <a:p>
-            <a:pPr algn="l">
-              <a:defRPr sz="1400" b="0">
-                <a:solidFill>
-                  <a:srgbClr val="8A9E8C"/>
-                </a:solidFill>
-                <a:latin typeface="Calibri"/>
-              </a:defRPr>
-            </a:pPr>
-            <a:r>
-              <a:t>この10分の後、あなたは:</a:t>
-            </a:r>
-          </a:p>
-        </p:txBody>
-      </p:sp>
-      <p:sp>
-        <p:nvSpPr>
-          <p:cNvPr id="5" name="Rectangle 4"/>
+          <p:cNvPr id="4" name="Rectangle 3"/>
           <p:cNvSpPr/>
           <p:nvPr/>
         </p:nvSpPr>
         <p:spPr>
           <a:xfrm>
-            <a:off x="731520" y="1554480"/>
-            <a:ext cx="7680960" cy="822960"/>
+            <a:off x="731520" y="1371600"/>
+            <a:ext cx="7680960" cy="914400"/>
           </a:xfrm>
           <a:prstGeom prst="rect">
             <a:avLst/>
@@ -3841,14 +3533,14 @@
       </p:sp>
       <p:sp>
         <p:nvSpPr>
-          <p:cNvPr id="6" name="TextBox 5"/>
+          <p:cNvPr id="5" name="TextBox 4"/>
           <p:cNvSpPr txBox="1"/>
           <p:nvPr/>
         </p:nvSpPr>
         <p:spPr>
           <a:xfrm>
-            <a:off x="914400" y="1645920"/>
-            <a:ext cx="365760" cy="548640"/>
+            <a:off x="914400" y="1463040"/>
+            <a:ext cx="1645920" cy="640080"/>
           </a:xfrm>
           <a:prstGeom prst="rect">
             <a:avLst/>
@@ -3862,7 +3554,7 @@
           <a:lstStyle/>
           <a:p>
             <a:pPr algn="l">
-              <a:defRPr sz="2800" b="1">
+              <a:defRPr sz="2200" b="1">
                 <a:solidFill>
                   <a:srgbClr val="E8A84C"/>
                 </a:solidFill>
@@ -3870,21 +3562,21 @@
               </a:defRPr>
             </a:pPr>
             <a:r>
-              <a:t>1</a:t>
-            </a:r>
-          </a:p>
-        </p:txBody>
-      </p:sp>
-      <p:sp>
-        <p:nvSpPr>
-          <p:cNvPr id="7" name="TextBox 6"/>
+              <a:t>わかる</a:t>
+            </a:r>
+          </a:p>
+        </p:txBody>
+      </p:sp>
+      <p:sp>
+        <p:nvSpPr>
+          <p:cNvPr id="6" name="TextBox 5"/>
           <p:cNvSpPr txBox="1"/>
           <p:nvPr/>
         </p:nvSpPr>
         <p:spPr>
           <a:xfrm>
-            <a:off x="1371600" y="1691640"/>
-            <a:ext cx="6858000" cy="548640"/>
+            <a:off x="2560320" y="1508760"/>
+            <a:ext cx="5669280" cy="640080"/>
           </a:xfrm>
           <a:prstGeom prst="rect">
             <a:avLst/>
@@ -3898,7 +3590,7 @@
           <a:lstStyle/>
           <a:p>
             <a:pPr algn="l">
-              <a:defRPr sz="1400" b="0">
+              <a:defRPr sz="1500" b="0">
                 <a:solidFill>
                   <a:srgbClr val="2D2D2D"/>
                 </a:solidFill>
@@ -3906,21 +3598,21 @@
               </a:defRPr>
             </a:pPr>
             <a:r>
-              <a:t>わかる — 今回の改定が自分の給与・業務にどう影響するか</a:t>
-            </a:r>
-          </a:p>
-        </p:txBody>
-      </p:sp>
-      <p:sp>
-        <p:nvSpPr>
-          <p:cNvPr id="8" name="Rectangle 7"/>
+              <a:t>改定が自分の給与にどう影響するか</a:t>
+            </a:r>
+          </a:p>
+        </p:txBody>
+      </p:sp>
+      <p:sp>
+        <p:nvSpPr>
+          <p:cNvPr id="7" name="Rectangle 6"/>
           <p:cNvSpPr/>
           <p:nvPr/>
         </p:nvSpPr>
         <p:spPr>
           <a:xfrm>
-            <a:off x="731520" y="2560320"/>
-            <a:ext cx="7680960" cy="822960"/>
+            <a:off x="731520" y="2468880"/>
+            <a:ext cx="7680960" cy="914400"/>
           </a:xfrm>
           <a:prstGeom prst="rect">
             <a:avLst/>
@@ -3958,14 +3650,14 @@
       </p:sp>
       <p:sp>
         <p:nvSpPr>
-          <p:cNvPr id="9" name="TextBox 8"/>
+          <p:cNvPr id="8" name="TextBox 7"/>
           <p:cNvSpPr txBox="1"/>
           <p:nvPr/>
         </p:nvSpPr>
         <p:spPr>
           <a:xfrm>
-            <a:off x="914400" y="2651760"/>
-            <a:ext cx="365760" cy="548640"/>
+            <a:off x="914400" y="2560320"/>
+            <a:ext cx="1645920" cy="640080"/>
           </a:xfrm>
           <a:prstGeom prst="rect">
             <a:avLst/>
@@ -3979,7 +3671,7 @@
           <a:lstStyle/>
           <a:p>
             <a:pPr algn="l">
-              <a:defRPr sz="2800" b="1">
+              <a:defRPr sz="2200" b="1">
                 <a:solidFill>
                   <a:srgbClr val="E8A84C"/>
                 </a:solidFill>
@@ -3987,21 +3679,21 @@
               </a:defRPr>
             </a:pPr>
             <a:r>
-              <a:t>2</a:t>
-            </a:r>
-          </a:p>
-        </p:txBody>
-      </p:sp>
-      <p:sp>
-        <p:nvSpPr>
-          <p:cNvPr id="10" name="TextBox 9"/>
+              <a:t>できる</a:t>
+            </a:r>
+          </a:p>
+        </p:txBody>
+      </p:sp>
+      <p:sp>
+        <p:nvSpPr>
+          <p:cNvPr id="9" name="TextBox 8"/>
           <p:cNvSpPr txBox="1"/>
           <p:nvPr/>
         </p:nvSpPr>
         <p:spPr>
           <a:xfrm>
-            <a:off x="1371600" y="2697480"/>
-            <a:ext cx="6858000" cy="548640"/>
+            <a:off x="2560320" y="2606040"/>
+            <a:ext cx="5669280" cy="640080"/>
           </a:xfrm>
           <a:prstGeom prst="rect">
             <a:avLst/>
@@ -4015,7 +3707,7 @@
           <a:lstStyle/>
           <a:p>
             <a:pPr algn="l">
-              <a:defRPr sz="1400" b="0">
+              <a:defRPr sz="1500" b="0">
                 <a:solidFill>
                   <a:srgbClr val="2D2D2D"/>
                 </a:solidFill>
@@ -4023,21 +3715,21 @@
               </a:defRPr>
             </a:pPr>
             <a:r>
-              <a:t>できる — BCP策定への自分の役割を説明できる</a:t>
-            </a:r>
-          </a:p>
-        </p:txBody>
-      </p:sp>
-      <p:sp>
-        <p:nvSpPr>
-          <p:cNvPr id="11" name="Rectangle 10"/>
+              <a:t>マイナ保険証の案内をスムーズにできる</a:t>
+            </a:r>
+          </a:p>
+        </p:txBody>
+      </p:sp>
+      <p:sp>
+        <p:nvSpPr>
+          <p:cNvPr id="10" name="Rectangle 9"/>
           <p:cNvSpPr/>
           <p:nvPr/>
         </p:nvSpPr>
         <p:spPr>
           <a:xfrm>
             <a:off x="731520" y="3566160"/>
-            <a:ext cx="7680960" cy="822960"/>
+            <a:ext cx="7680960" cy="914400"/>
           </a:xfrm>
           <a:prstGeom prst="rect">
             <a:avLst/>
@@ -4075,14 +3767,14 @@
       </p:sp>
       <p:sp>
         <p:nvSpPr>
-          <p:cNvPr id="12" name="TextBox 11"/>
+          <p:cNvPr id="11" name="TextBox 10"/>
           <p:cNvSpPr txBox="1"/>
           <p:nvPr/>
         </p:nvSpPr>
         <p:spPr>
           <a:xfrm>
             <a:off x="914400" y="3657600"/>
-            <a:ext cx="365760" cy="548640"/>
+            <a:ext cx="1645920" cy="640080"/>
           </a:xfrm>
           <a:prstGeom prst="rect">
             <a:avLst/>
@@ -4096,7 +3788,7 @@
           <a:lstStyle/>
           <a:p>
             <a:pPr algn="l">
-              <a:defRPr sz="2800" b="1">
+              <a:defRPr sz="2200" b="1">
                 <a:solidFill>
                   <a:srgbClr val="E8A84C"/>
                 </a:solidFill>
@@ -4104,21 +3796,21 @@
               </a:defRPr>
             </a:pPr>
             <a:r>
-              <a:t>3</a:t>
-            </a:r>
-          </a:p>
-        </p:txBody>
-      </p:sp>
-      <p:sp>
-        <p:nvSpPr>
-          <p:cNvPr id="13" name="TextBox 12"/>
+              <a:t>知る</a:t>
+            </a:r>
+          </a:p>
+        </p:txBody>
+      </p:sp>
+      <p:sp>
+        <p:nvSpPr>
+          <p:cNvPr id="12" name="TextBox 11"/>
           <p:cNvSpPr txBox="1"/>
           <p:nvPr/>
         </p:nvSpPr>
         <p:spPr>
           <a:xfrm>
-            <a:off x="1371600" y="3703320"/>
-            <a:ext cx="6858000" cy="548640"/>
+            <a:off x="2560320" y="3703320"/>
+            <a:ext cx="5669280" cy="640080"/>
           </a:xfrm>
           <a:prstGeom prst="rect">
             <a:avLst/>
@@ -4132,7 +3824,7 @@
           <a:lstStyle/>
           <a:p>
             <a:pPr algn="l">
-              <a:defRPr sz="1400" b="0">
+              <a:defRPr sz="1500" b="0">
                 <a:solidFill>
                   <a:srgbClr val="2D2D2D"/>
                 </a:solidFill>
@@ -4140,7 +3832,7 @@
               </a:defRPr>
             </a:pPr>
             <a:r>
-              <a:t>判断できる — マイナ保険証の案内など、優先すべきことを選べる</a:t>
+              <a:t>BCPとは何か、自分の役割は何か</a:t>
             </a:r>
           </a:p>
         </p:txBody>
@@ -4154,6 +3846,541 @@
 </file>
 
 <file path=ppt/slides/slide3.xml><?xml version="1.0" encoding="utf-8"?>
+<p:sld xmlns:a="http://schemas.openxmlformats.org/drawingml/2006/main" xmlns:p="http://schemas.openxmlformats.org/presentationml/2006/main" xmlns:r="http://schemas.openxmlformats.org/officeDocument/2006/relationships">
+  <p:cSld>
+    <p:bg>
+      <p:bgPr>
+        <a:solidFill>
+          <a:srgbClr val="3D6B5E"/>
+        </a:solidFill>
+        <a:effectLst/>
+      </p:bgPr>
+    </p:bg>
+    <p:spTree>
+      <p:nvGrpSpPr>
+        <p:cNvPr id="1" name=""/>
+        <p:cNvGrpSpPr/>
+        <p:nvPr/>
+      </p:nvGrpSpPr>
+      <p:grpSpPr/>
+      <p:sp>
+        <p:nvSpPr>
+          <p:cNvPr id="2" name="TextBox 1"/>
+          <p:cNvSpPr txBox="1"/>
+          <p:nvPr/>
+        </p:nvSpPr>
+        <p:spPr>
+          <a:xfrm>
+            <a:off x="457200" y="274320"/>
+            <a:ext cx="8229600" cy="457200"/>
+          </a:xfrm>
+          <a:prstGeom prst="rect">
+            <a:avLst/>
+          </a:prstGeom>
+          <a:noFill/>
+        </p:spPr>
+        <p:txBody>
+          <a:bodyPr wrap="square" lIns="45720" rIns="45720" tIns="27432" bIns="27432">
+            <a:spAutoFit/>
+          </a:bodyPr>
+          <a:lstStyle/>
+          <a:p>
+            <a:pPr algn="l">
+              <a:defRPr sz="2200" b="1">
+                <a:solidFill>
+                  <a:srgbClr val="FFF8F0"/>
+                </a:solidFill>
+                <a:latin typeface="Calibri"/>
+              </a:defRPr>
+            </a:pPr>
+            <a:r>
+              <a:t>あなたの給与に直結する変更</a:t>
+            </a:r>
+          </a:p>
+        </p:txBody>
+      </p:sp>
+      <p:sp>
+        <p:nvSpPr>
+          <p:cNvPr id="3" name="Rectangle 2"/>
+          <p:cNvSpPr/>
+          <p:nvPr/>
+        </p:nvSpPr>
+        <p:spPr>
+          <a:xfrm>
+            <a:off x="457200" y="777240"/>
+            <a:ext cx="1828800" cy="54864"/>
+          </a:xfrm>
+          <a:prstGeom prst="rect">
+            <a:avLst/>
+          </a:prstGeom>
+          <a:solidFill>
+            <a:srgbClr val="E8A84C"/>
+          </a:solidFill>
+          <a:ln>
+            <a:noFill/>
+          </a:ln>
+        </p:spPr>
+        <p:style>
+          <a:lnRef idx="1">
+            <a:schemeClr val="accent1"/>
+          </a:lnRef>
+          <a:fillRef idx="3">
+            <a:schemeClr val="accent1"/>
+          </a:fillRef>
+          <a:effectRef idx="2">
+            <a:schemeClr val="accent1"/>
+          </a:effectRef>
+          <a:fontRef idx="minor">
+            <a:schemeClr val="lt1"/>
+          </a:fontRef>
+        </p:style>
+        <p:txBody>
+          <a:bodyPr rtlCol="0" anchor="ctr"/>
+          <a:lstStyle/>
+          <a:p>
+            <a:pPr algn="ctr"/>
+          </a:p>
+        </p:txBody>
+      </p:sp>
+      <p:sp>
+        <p:nvSpPr>
+          <p:cNvPr id="4" name="TextBox 3"/>
+          <p:cNvSpPr txBox="1"/>
+          <p:nvPr/>
+        </p:nvSpPr>
+        <p:spPr>
+          <a:xfrm>
+            <a:off x="457200" y="1188720"/>
+            <a:ext cx="8229600" cy="365760"/>
+          </a:xfrm>
+          <a:prstGeom prst="rect">
+            <a:avLst/>
+          </a:prstGeom>
+          <a:noFill/>
+        </p:spPr>
+        <p:txBody>
+          <a:bodyPr wrap="square" lIns="45720" rIns="45720" tIns="27432" bIns="27432">
+            <a:spAutoFit/>
+          </a:bodyPr>
+          <a:lstStyle/>
+          <a:p>
+            <a:pPr algn="ctr">
+              <a:defRPr sz="1400" b="0">
+                <a:solidFill>
+                  <a:srgbClr val="8A9E8C"/>
+                </a:solidFill>
+                <a:latin typeface="Calibri"/>
+              </a:defRPr>
+            </a:pPr>
+            <a:r>
+              <a:t>ベースアップ評価料</a:t>
+            </a:r>
+          </a:p>
+        </p:txBody>
+      </p:sp>
+      <p:sp>
+        <p:nvSpPr>
+          <p:cNvPr id="5" name="Rectangle 4"/>
+          <p:cNvSpPr/>
+          <p:nvPr/>
+        </p:nvSpPr>
+        <p:spPr>
+          <a:xfrm>
+            <a:off x="914400" y="1645920"/>
+            <a:ext cx="2743200" cy="1371600"/>
+          </a:xfrm>
+          <a:prstGeom prst="rect">
+            <a:avLst/>
+          </a:prstGeom>
+          <a:solidFill>
+            <a:srgbClr val="3D6B5E"/>
+          </a:solidFill>
+          <a:ln>
+            <a:noFill/>
+          </a:ln>
+        </p:spPr>
+        <p:style>
+          <a:lnRef idx="1">
+            <a:schemeClr val="accent1"/>
+          </a:lnRef>
+          <a:fillRef idx="3">
+            <a:schemeClr val="accent1"/>
+          </a:fillRef>
+          <a:effectRef idx="2">
+            <a:schemeClr val="accent1"/>
+          </a:effectRef>
+          <a:fontRef idx="minor">
+            <a:schemeClr val="lt1"/>
+          </a:fontRef>
+        </p:style>
+        <p:txBody>
+          <a:bodyPr rtlCol="0" anchor="ctr"/>
+          <a:lstStyle/>
+          <a:p>
+            <a:pPr algn="ctr"/>
+          </a:p>
+        </p:txBody>
+      </p:sp>
+      <p:sp>
+        <p:nvSpPr>
+          <p:cNvPr id="6" name="TextBox 5"/>
+          <p:cNvSpPr txBox="1"/>
+          <p:nvPr/>
+        </p:nvSpPr>
+        <p:spPr>
+          <a:xfrm>
+            <a:off x="914400" y="1737360"/>
+            <a:ext cx="2743200" cy="731520"/>
+          </a:xfrm>
+          <a:prstGeom prst="rect">
+            <a:avLst/>
+          </a:prstGeom>
+          <a:noFill/>
+        </p:spPr>
+        <p:txBody>
+          <a:bodyPr wrap="square" lIns="45720" rIns="45720" tIns="27432" bIns="27432">
+            <a:spAutoFit/>
+          </a:bodyPr>
+          <a:lstStyle/>
+          <a:p>
+            <a:pPr algn="ctr">
+              <a:defRPr sz="4000" b="1">
+                <a:solidFill>
+                  <a:srgbClr val="8A9E8C"/>
+                </a:solidFill>
+                <a:latin typeface="Calibri"/>
+              </a:defRPr>
+            </a:pPr>
+            <a:r>
+              <a:t>6点</a:t>
+            </a:r>
+          </a:p>
+        </p:txBody>
+      </p:sp>
+      <p:sp>
+        <p:nvSpPr>
+          <p:cNvPr id="7" name="TextBox 6"/>
+          <p:cNvSpPr txBox="1"/>
+          <p:nvPr/>
+        </p:nvSpPr>
+        <p:spPr>
+          <a:xfrm>
+            <a:off x="914400" y="2468880"/>
+            <a:ext cx="2743200" cy="365760"/>
+          </a:xfrm>
+          <a:prstGeom prst="rect">
+            <a:avLst/>
+          </a:prstGeom>
+          <a:noFill/>
+        </p:spPr>
+        <p:txBody>
+          <a:bodyPr wrap="square" lIns="45720" rIns="45720" tIns="27432" bIns="27432">
+            <a:spAutoFit/>
+          </a:bodyPr>
+          <a:lstStyle/>
+          <a:p>
+            <a:pPr algn="ctr">
+              <a:defRPr sz="1000" b="0">
+                <a:solidFill>
+                  <a:srgbClr val="8A9E8C"/>
+                </a:solidFill>
+                <a:latin typeface="Calibri"/>
+              </a:defRPr>
+            </a:pPr>
+            <a:r>
+              <a:t>旧（医療従事者のみ）</a:t>
+            </a:r>
+          </a:p>
+        </p:txBody>
+      </p:sp>
+      <p:sp>
+        <p:nvSpPr>
+          <p:cNvPr id="8" name="TextBox 7"/>
+          <p:cNvSpPr txBox="1"/>
+          <p:nvPr/>
+        </p:nvSpPr>
+        <p:spPr>
+          <a:xfrm>
+            <a:off x="3840480" y="1828800"/>
+            <a:ext cx="914400" cy="731520"/>
+          </a:xfrm>
+          <a:prstGeom prst="rect">
+            <a:avLst/>
+          </a:prstGeom>
+          <a:noFill/>
+        </p:spPr>
+        <p:txBody>
+          <a:bodyPr wrap="square" lIns="45720" rIns="45720" tIns="27432" bIns="27432">
+            <a:spAutoFit/>
+          </a:bodyPr>
+          <a:lstStyle/>
+          <a:p>
+            <a:pPr algn="ctr">
+              <a:defRPr sz="3600" b="1">
+                <a:solidFill>
+                  <a:srgbClr val="E8A84C"/>
+                </a:solidFill>
+                <a:latin typeface="Calibri"/>
+              </a:defRPr>
+            </a:pPr>
+            <a:r>
+              <a:t>→</a:t>
+            </a:r>
+          </a:p>
+        </p:txBody>
+      </p:sp>
+      <p:sp>
+        <p:nvSpPr>
+          <p:cNvPr id="9" name="Rectangle 8"/>
+          <p:cNvSpPr/>
+          <p:nvPr/>
+        </p:nvSpPr>
+        <p:spPr>
+          <a:xfrm>
+            <a:off x="5029200" y="1645920"/>
+            <a:ext cx="3200400" cy="1371600"/>
+          </a:xfrm>
+          <a:prstGeom prst="rect">
+            <a:avLst/>
+          </a:prstGeom>
+          <a:solidFill>
+            <a:srgbClr val="E8A84C"/>
+          </a:solidFill>
+          <a:ln>
+            <a:noFill/>
+          </a:ln>
+        </p:spPr>
+        <p:style>
+          <a:lnRef idx="1">
+            <a:schemeClr val="accent1"/>
+          </a:lnRef>
+          <a:fillRef idx="3">
+            <a:schemeClr val="accent1"/>
+          </a:fillRef>
+          <a:effectRef idx="2">
+            <a:schemeClr val="accent1"/>
+          </a:effectRef>
+          <a:fontRef idx="minor">
+            <a:schemeClr val="lt1"/>
+          </a:fontRef>
+        </p:style>
+        <p:txBody>
+          <a:bodyPr rtlCol="0" anchor="ctr"/>
+          <a:lstStyle/>
+          <a:p>
+            <a:pPr algn="ctr"/>
+          </a:p>
+        </p:txBody>
+      </p:sp>
+      <p:sp>
+        <p:nvSpPr>
+          <p:cNvPr id="10" name="TextBox 9"/>
+          <p:cNvSpPr txBox="1"/>
+          <p:nvPr/>
+        </p:nvSpPr>
+        <p:spPr>
+          <a:xfrm>
+            <a:off x="5029200" y="1737360"/>
+            <a:ext cx="3200400" cy="731520"/>
+          </a:xfrm>
+          <a:prstGeom prst="rect">
+            <a:avLst/>
+          </a:prstGeom>
+          <a:noFill/>
+        </p:spPr>
+        <p:txBody>
+          <a:bodyPr wrap="square" lIns="45720" rIns="45720" tIns="27432" bIns="27432">
+            <a:spAutoFit/>
+          </a:bodyPr>
+          <a:lstStyle/>
+          <a:p>
+            <a:pPr algn="ctr">
+              <a:defRPr sz="4800" b="1">
+                <a:solidFill>
+                  <a:srgbClr val="3D6B5E"/>
+                </a:solidFill>
+                <a:latin typeface="Calibri"/>
+              </a:defRPr>
+            </a:pPr>
+            <a:r>
+              <a:t>17点</a:t>
+            </a:r>
+          </a:p>
+        </p:txBody>
+      </p:sp>
+      <p:sp>
+        <p:nvSpPr>
+          <p:cNvPr id="11" name="TextBox 10"/>
+          <p:cNvSpPr txBox="1"/>
+          <p:nvPr/>
+        </p:nvSpPr>
+        <p:spPr>
+          <a:xfrm>
+            <a:off x="5029200" y="2468880"/>
+            <a:ext cx="3200400" cy="365760"/>
+          </a:xfrm>
+          <a:prstGeom prst="rect">
+            <a:avLst/>
+          </a:prstGeom>
+          <a:noFill/>
+        </p:spPr>
+        <p:txBody>
+          <a:bodyPr wrap="square" lIns="45720" rIns="45720" tIns="27432" bIns="27432">
+            <a:spAutoFit/>
+          </a:bodyPr>
+          <a:lstStyle/>
+          <a:p>
+            <a:pPr algn="ctr">
+              <a:defRPr sz="1100" b="0">
+                <a:solidFill>
+                  <a:srgbClr val="3D6B5E"/>
+                </a:solidFill>
+                <a:latin typeface="Calibri"/>
+              </a:defRPr>
+            </a:pPr>
+            <a:r>
+              <a:t>新（全職員対象！）</a:t>
+            </a:r>
+          </a:p>
+        </p:txBody>
+      </p:sp>
+      <p:sp>
+        <p:nvSpPr>
+          <p:cNvPr id="12" name="Rectangle 11"/>
+          <p:cNvSpPr/>
+          <p:nvPr/>
+        </p:nvSpPr>
+        <p:spPr>
+          <a:xfrm>
+            <a:off x="457200" y="3383280"/>
+            <a:ext cx="54864" cy="731520"/>
+          </a:xfrm>
+          <a:prstGeom prst="rect">
+            <a:avLst/>
+          </a:prstGeom>
+          <a:solidFill>
+            <a:srgbClr val="E8A84C"/>
+          </a:solidFill>
+          <a:ln>
+            <a:noFill/>
+          </a:ln>
+        </p:spPr>
+        <p:style>
+          <a:lnRef idx="1">
+            <a:schemeClr val="accent1"/>
+          </a:lnRef>
+          <a:fillRef idx="3">
+            <a:schemeClr val="accent1"/>
+          </a:fillRef>
+          <a:effectRef idx="2">
+            <a:schemeClr val="accent1"/>
+          </a:effectRef>
+          <a:fontRef idx="minor">
+            <a:schemeClr val="lt1"/>
+          </a:fontRef>
+        </p:style>
+        <p:txBody>
+          <a:bodyPr rtlCol="0" anchor="ctr"/>
+          <a:lstStyle/>
+          <a:p>
+            <a:pPr algn="ctr"/>
+          </a:p>
+        </p:txBody>
+      </p:sp>
+      <p:sp>
+        <p:nvSpPr>
+          <p:cNvPr id="13" name="Rectangle 12"/>
+          <p:cNvSpPr/>
+          <p:nvPr/>
+        </p:nvSpPr>
+        <p:spPr>
+          <a:xfrm>
+            <a:off x="566928" y="3383280"/>
+            <a:ext cx="8119872" cy="731520"/>
+          </a:xfrm>
+          <a:prstGeom prst="rect">
+            <a:avLst/>
+          </a:prstGeom>
+          <a:solidFill>
+            <a:srgbClr val="FFFFFF"/>
+          </a:solidFill>
+          <a:ln w="12700">
+            <a:solidFill>
+              <a:srgbClr val="7DB89E"/>
+            </a:solidFill>
+          </a:ln>
+        </p:spPr>
+        <p:style>
+          <a:lnRef idx="1">
+            <a:schemeClr val="accent1"/>
+          </a:lnRef>
+          <a:fillRef idx="3">
+            <a:schemeClr val="accent1"/>
+          </a:fillRef>
+          <a:effectRef idx="2">
+            <a:schemeClr val="accent1"/>
+          </a:effectRef>
+          <a:fontRef idx="minor">
+            <a:schemeClr val="lt1"/>
+          </a:fontRef>
+        </p:style>
+        <p:txBody>
+          <a:bodyPr rtlCol="0" anchor="ctr"/>
+          <a:lstStyle/>
+          <a:p>
+            <a:pPr algn="ctr"/>
+          </a:p>
+        </p:txBody>
+      </p:sp>
+      <p:sp>
+        <p:nvSpPr>
+          <p:cNvPr id="14" name="TextBox 13"/>
+          <p:cNvSpPr txBox="1"/>
+          <p:nvPr/>
+        </p:nvSpPr>
+        <p:spPr>
+          <a:xfrm>
+            <a:off x="685800" y="3456432"/>
+            <a:ext cx="7863840" cy="585216"/>
+          </a:xfrm>
+          <a:prstGeom prst="rect">
+            <a:avLst/>
+          </a:prstGeom>
+          <a:noFill/>
+        </p:spPr>
+        <p:txBody>
+          <a:bodyPr wrap="square" lIns="45720" rIns="45720" tIns="27432" bIns="27432">
+            <a:spAutoFit/>
+          </a:bodyPr>
+          <a:lstStyle/>
+          <a:p>
+            <a:pPr algn="l">
+              <a:defRPr sz="1300" b="0">
+                <a:solidFill>
+                  <a:srgbClr val="2D2D2D"/>
+                </a:solidFill>
+                <a:latin typeface="Georgia"/>
+              </a:defRPr>
+            </a:pPr>
+            <a:r>
+              <a:t>事務職員・受付・介護職員も対象に。</a:t>
+            </a:r>
+            <a:br/>
+            <a:r>
+              <a:t>病院全体の収入増 → 皆さんの処遇改善の原資になります。</a:t>
+            </a:r>
+          </a:p>
+        </p:txBody>
+      </p:sp>
+    </p:spTree>
+  </p:cSld>
+  <p:clrMapOvr>
+    <a:masterClrMapping/>
+  </p:clrMapOvr>
+</p:sld>
+</file>
+
+<file path=ppt/slides/slide4.xml><?xml version="1.0" encoding="utf-8"?>
 <p:sld xmlns:a="http://schemas.openxmlformats.org/drawingml/2006/main" xmlns:p="http://schemas.openxmlformats.org/presentationml/2006/main" xmlns:r="http://schemas.openxmlformats.org/officeDocument/2006/relationships">
   <p:cSld>
     <p:bg>
@@ -4179,7 +4406,7 @@
         </p:nvSpPr>
         <p:spPr>
           <a:xfrm>
-            <a:off x="457200" y="182880"/>
+            <a:off x="457200" y="274320"/>
             <a:ext cx="8229600" cy="457200"/>
           </a:xfrm>
           <a:prstGeom prst="rect">
@@ -4202,7 +4429,7 @@
               </a:defRPr>
             </a:pPr>
             <a:r>
-              <a:t>あなたの給与に関わる3つの変更</a:t>
+              <a:t>窓口の声かけが収入に直結</a:t>
             </a:r>
           </a:p>
         </p:txBody>
@@ -4215,8 +4442,8 @@
         </p:nvSpPr>
         <p:spPr>
           <a:xfrm>
-            <a:off x="457200" y="640080"/>
-            <a:ext cx="2286000" cy="54864"/>
+            <a:off x="457200" y="777240"/>
+            <a:ext cx="1828800" cy="54864"/>
           </a:xfrm>
           <a:prstGeom prst="rect">
             <a:avLst/>
@@ -4258,8 +4485,8 @@
         </p:nvSpPr>
         <p:spPr>
           <a:xfrm>
-            <a:off x="457200" y="822960"/>
-            <a:ext cx="4114800" cy="274320"/>
+            <a:off x="457200" y="1097280"/>
+            <a:ext cx="8229600" cy="365760"/>
           </a:xfrm>
           <a:prstGeom prst="rect">
             <a:avLst/>
@@ -4273,265 +4500,64 @@
           <a:lstStyle/>
           <a:p>
             <a:pPr algn="l">
-              <a:defRPr sz="1500" b="1">
-                <a:solidFill>
-                  <a:srgbClr val="E8A84C"/>
+              <a:defRPr sz="1400" b="0">
+                <a:solidFill>
+                  <a:srgbClr val="8A9E8C"/>
                 </a:solidFill>
                 <a:latin typeface="Calibri"/>
               </a:defRPr>
             </a:pPr>
             <a:r>
-              <a:t>1  ベースアップ評価料の大幅拡充</a:t>
-            </a:r>
-          </a:p>
-        </p:txBody>
-      </p:sp>
-      <p:graphicFrame>
-        <p:nvGraphicFramePr>
-          <p:cNvPr id="5" name="Table 4"/>
-          <p:cNvGraphicFramePr>
-            <a:graphicFrameLocks noGrp="1"/>
-          </p:cNvGraphicFramePr>
-          <p:nvPr/>
-        </p:nvGraphicFramePr>
-        <p:xfrm>
-          <a:off x="457200" y="1143000"/>
-          <a:ext cx="4114800" cy="905256"/>
-        </p:xfrm>
-        <a:graphic>
-          <a:graphicData uri="http://schemas.openxmlformats.org/drawingml/2006/table">
-            <a:tbl>
-              <a:tblPr firstRow="1" bandRow="1">
-                <a:tableStyleId>{5C22544A-7EE6-4342-B048-85BDC9FD1C3A}</a:tableStyleId>
-              </a:tblPr>
-              <a:tblGrid>
-                <a:gridCol w="1371600"/>
-                <a:gridCol w="1371600"/>
-                <a:gridCol w="1371600"/>
-              </a:tblGrid>
-              <a:tr h="301752">
-                <a:tc>
-                  <a:txBody>
-                    <a:bodyPr/>
-                    <a:lstStyle/>
-                    <a:p>
-                      <a:pPr>
-                        <a:defRPr sz="1000" b="1">
-                          <a:solidFill>
-                            <a:srgbClr val="FFF8F0"/>
-                          </a:solidFill>
-                          <a:latin typeface="Calibri"/>
-                        </a:defRPr>
-                      </a:pPr>
-                    </a:p>
-                  </a:txBody>
-                  <a:tcPr marL="45720" marR="45720" marT="18288" marB="18288">
-                    <a:solidFill>
-                      <a:srgbClr val="3D6B5E"/>
-                    </a:solidFill>
-                  </a:tcPr>
-                </a:tc>
-                <a:tc>
-                  <a:txBody>
-                    <a:bodyPr/>
-                    <a:lstStyle/>
-                    <a:p>
-                      <a:pPr>
-                        <a:defRPr sz="1000" b="1">
-                          <a:solidFill>
-                            <a:srgbClr val="FFF8F0"/>
-                          </a:solidFill>
-                          <a:latin typeface="Calibri"/>
-                        </a:defRPr>
-                      </a:pPr>
-                      <a:r>
-                        <a:t>旧</a:t>
-                      </a:r>
-                    </a:p>
-                  </a:txBody>
-                  <a:tcPr marL="45720" marR="45720" marT="18288" marB="18288">
-                    <a:solidFill>
-                      <a:srgbClr val="3D6B5E"/>
-                    </a:solidFill>
-                  </a:tcPr>
-                </a:tc>
-                <a:tc>
-                  <a:txBody>
-                    <a:bodyPr/>
-                    <a:lstStyle/>
-                    <a:p>
-                      <a:pPr>
-                        <a:defRPr sz="1000" b="1">
-                          <a:solidFill>
-                            <a:srgbClr val="FFF8F0"/>
-                          </a:solidFill>
-                          <a:latin typeface="Calibri"/>
-                        </a:defRPr>
-                      </a:pPr>
-                      <a:r>
-                        <a:t>新</a:t>
-                      </a:r>
-                    </a:p>
-                  </a:txBody>
-                  <a:tcPr marL="45720" marR="45720" marT="18288" marB="18288">
-                    <a:solidFill>
-                      <a:srgbClr val="3D6B5E"/>
-                    </a:solidFill>
-                  </a:tcPr>
-                </a:tc>
-              </a:tr>
-              <a:tr h="301752">
-                <a:tc>
-                  <a:txBody>
-                    <a:bodyPr/>
-                    <a:lstStyle/>
-                    <a:p>
-                      <a:pPr>
-                        <a:defRPr sz="1000">
-                          <a:solidFill>
-                            <a:srgbClr val="2D2D2D"/>
-                          </a:solidFill>
-                          <a:latin typeface="Calibri"/>
-                        </a:defRPr>
-                      </a:pPr>
-                      <a:r>
-                        <a:t>初診時加算</a:t>
-                      </a:r>
-                    </a:p>
-                  </a:txBody>
-                  <a:tcPr marL="45720" marR="45720" marT="18288" marB="18288">
-                    <a:solidFill>
-                      <a:srgbClr val="F0F7F2"/>
-                    </a:solidFill>
-                  </a:tcPr>
-                </a:tc>
-                <a:tc>
-                  <a:txBody>
-                    <a:bodyPr/>
-                    <a:lstStyle/>
-                    <a:p>
-                      <a:pPr>
-                        <a:defRPr sz="1000">
-                          <a:solidFill>
-                            <a:srgbClr val="2D2D2D"/>
-                          </a:solidFill>
-                          <a:latin typeface="Calibri"/>
-                        </a:defRPr>
-                      </a:pPr>
-                      <a:r>
-                        <a:t>6点</a:t>
-                      </a:r>
-                    </a:p>
-                  </a:txBody>
-                  <a:tcPr marL="45720" marR="45720" marT="18288" marB="18288">
-                    <a:solidFill>
-                      <a:srgbClr val="F0F7F2"/>
-                    </a:solidFill>
-                  </a:tcPr>
-                </a:tc>
-                <a:tc>
-                  <a:txBody>
-                    <a:bodyPr/>
-                    <a:lstStyle/>
-                    <a:p>
-                      <a:pPr>
-                        <a:defRPr sz="1000">
-                          <a:solidFill>
-                            <a:srgbClr val="2D2D2D"/>
-                          </a:solidFill>
-                          <a:latin typeface="Calibri"/>
-                        </a:defRPr>
-                      </a:pPr>
-                      <a:r>
-                        <a:t>17点（+11点）</a:t>
-                      </a:r>
-                    </a:p>
-                  </a:txBody>
-                  <a:tcPr marL="45720" marR="45720" marT="18288" marB="18288">
-                    <a:solidFill>
-                      <a:srgbClr val="F0F7F2"/>
-                    </a:solidFill>
-                  </a:tcPr>
-                </a:tc>
-              </a:tr>
-              <a:tr h="301752">
-                <a:tc>
-                  <a:txBody>
-                    <a:bodyPr/>
-                    <a:lstStyle/>
-                    <a:p>
-                      <a:pPr>
-                        <a:defRPr sz="1000">
-                          <a:solidFill>
-                            <a:srgbClr val="2D2D2D"/>
-                          </a:solidFill>
-                          <a:latin typeface="Calibri"/>
-                        </a:defRPr>
-                      </a:pPr>
-                      <a:r>
-                        <a:t>対象職員</a:t>
-                      </a:r>
-                    </a:p>
-                  </a:txBody>
-                  <a:tcPr marL="45720" marR="45720" marT="18288" marB="18288">
-                    <a:solidFill>
-                      <a:srgbClr val="FFF8F0"/>
-                    </a:solidFill>
-                  </a:tcPr>
-                </a:tc>
-                <a:tc>
-                  <a:txBody>
-                    <a:bodyPr/>
-                    <a:lstStyle/>
-                    <a:p>
-                      <a:pPr>
-                        <a:defRPr sz="1000">
-                          <a:solidFill>
-                            <a:srgbClr val="2D2D2D"/>
-                          </a:solidFill>
-                          <a:latin typeface="Calibri"/>
-                        </a:defRPr>
-                      </a:pPr>
-                      <a:r>
-                        <a:t>主に医療従事者</a:t>
-                      </a:r>
-                    </a:p>
-                  </a:txBody>
-                  <a:tcPr marL="45720" marR="45720" marT="18288" marB="18288">
-                    <a:solidFill>
-                      <a:srgbClr val="FFF8F0"/>
-                    </a:solidFill>
-                  </a:tcPr>
-                </a:tc>
-                <a:tc>
-                  <a:txBody>
-                    <a:bodyPr/>
-                    <a:lstStyle/>
-                    <a:p>
-                      <a:pPr>
-                        <a:defRPr sz="1000">
-                          <a:solidFill>
-                            <a:srgbClr val="2D2D2D"/>
-                          </a:solidFill>
-                          <a:latin typeface="Calibri"/>
-                        </a:defRPr>
-                      </a:pPr>
-                      <a:r>
-                        <a:t>事務職員含む全職員</a:t>
-                      </a:r>
-                    </a:p>
-                  </a:txBody>
-                  <a:tcPr marL="45720" marR="45720" marT="18288" marB="18288">
-                    <a:solidFill>
-                      <a:srgbClr val="FFF8F0"/>
-                    </a:solidFill>
-                  </a:tcPr>
-                </a:tc>
-              </a:tr>
-            </a:tbl>
-          </a:graphicData>
-        </a:graphic>
-      </p:graphicFrame>
+              <a:t>マイナ保険証の利用率で加算が変わる</a:t>
+            </a:r>
+          </a:p>
+        </p:txBody>
+      </p:sp>
+      <p:sp>
+        <p:nvSpPr>
+          <p:cNvPr id="5" name="Rectangle 4"/>
+          <p:cNvSpPr/>
+          <p:nvPr/>
+        </p:nvSpPr>
+        <p:spPr>
+          <a:xfrm>
+            <a:off x="457200" y="1645920"/>
+            <a:ext cx="8229600" cy="640080"/>
+          </a:xfrm>
+          <a:prstGeom prst="rect">
+            <a:avLst/>
+          </a:prstGeom>
+          <a:solidFill>
+            <a:srgbClr val="E8A84C"/>
+          </a:solidFill>
+          <a:ln w="12700">
+            <a:solidFill>
+              <a:srgbClr val="7DB89E"/>
+            </a:solidFill>
+          </a:ln>
+        </p:spPr>
+        <p:style>
+          <a:lnRef idx="1">
+            <a:schemeClr val="accent1"/>
+          </a:lnRef>
+          <a:fillRef idx="3">
+            <a:schemeClr val="accent1"/>
+          </a:fillRef>
+          <a:effectRef idx="2">
+            <a:schemeClr val="accent1"/>
+          </a:effectRef>
+          <a:fontRef idx="minor">
+            <a:schemeClr val="lt1"/>
+          </a:fontRef>
+        </p:style>
+        <p:txBody>
+          <a:bodyPr rtlCol="0" anchor="ctr"/>
+          <a:lstStyle/>
+          <a:p>
+            <a:pPr algn="ctr"/>
+          </a:p>
+        </p:txBody>
+      </p:sp>
       <p:sp>
         <p:nvSpPr>
           <p:cNvPr id="6" name="TextBox 5"/>
@@ -4540,8 +4566,8 @@
         </p:nvSpPr>
         <p:spPr>
           <a:xfrm>
-            <a:off x="4754880" y="822960"/>
-            <a:ext cx="4114800" cy="274320"/>
+            <a:off x="640080" y="1691640"/>
+            <a:ext cx="1097280" cy="457200"/>
           </a:xfrm>
           <a:prstGeom prst="rect">
             <a:avLst/>
@@ -4555,255 +4581,29 @@
           <a:lstStyle/>
           <a:p>
             <a:pPr algn="l">
-              <a:defRPr sz="1500" b="1">
-                <a:solidFill>
-                  <a:srgbClr val="E8A84C"/>
+              <a:defRPr sz="2200" b="1">
+                <a:solidFill>
+                  <a:srgbClr val="3D6B5E"/>
                 </a:solidFill>
                 <a:latin typeface="Calibri"/>
               </a:defRPr>
             </a:pPr>
             <a:r>
-              <a:t>2  物価対応料の新設</a:t>
-            </a:r>
-          </a:p>
-        </p:txBody>
-      </p:sp>
-      <p:graphicFrame>
-        <p:nvGraphicFramePr>
-          <p:cNvPr id="7" name="Table 6"/>
-          <p:cNvGraphicFramePr>
-            <a:graphicFrameLocks noGrp="1"/>
-          </p:cNvGraphicFramePr>
-          <p:nvPr/>
-        </p:nvGraphicFramePr>
-        <p:xfrm>
-          <a:off x="4754880" y="1143000"/>
-          <a:ext cx="3657600" cy="1207008"/>
-        </p:xfrm>
-        <a:graphic>
-          <a:graphicData uri="http://schemas.openxmlformats.org/drawingml/2006/table">
-            <a:tbl>
-              <a:tblPr firstRow="1" bandRow="1">
-                <a:tableStyleId>{5C22544A-7EE6-4342-B048-85BDC9FD1C3A}</a:tableStyleId>
-              </a:tblPr>
-              <a:tblGrid>
-                <a:gridCol w="1828800"/>
-                <a:gridCol w="1828800"/>
-              </a:tblGrid>
-              <a:tr h="301752">
-                <a:tc>
-                  <a:txBody>
-                    <a:bodyPr/>
-                    <a:lstStyle/>
-                    <a:p>
-                      <a:pPr>
-                        <a:defRPr sz="1000" b="1">
-                          <a:solidFill>
-                            <a:srgbClr val="FFF8F0"/>
-                          </a:solidFill>
-                          <a:latin typeface="Calibri"/>
-                        </a:defRPr>
-                      </a:pPr>
-                      <a:r>
-                        <a:t>場面</a:t>
-                      </a:r>
-                    </a:p>
-                  </a:txBody>
-                  <a:tcPr marL="45720" marR="45720" marT="18288" marB="18288">
-                    <a:solidFill>
-                      <a:srgbClr val="3D6B5E"/>
-                    </a:solidFill>
-                  </a:tcPr>
-                </a:tc>
-                <a:tc>
-                  <a:txBody>
-                    <a:bodyPr/>
-                    <a:lstStyle/>
-                    <a:p>
-                      <a:pPr>
-                        <a:defRPr sz="1000" b="1">
-                          <a:solidFill>
-                            <a:srgbClr val="FFF8F0"/>
-                          </a:solidFill>
-                          <a:latin typeface="Calibri"/>
-                        </a:defRPr>
-                      </a:pPr>
-                      <a:r>
-                        <a:t>点数</a:t>
-                      </a:r>
-                    </a:p>
-                  </a:txBody>
-                  <a:tcPr marL="45720" marR="45720" marT="18288" marB="18288">
-                    <a:solidFill>
-                      <a:srgbClr val="3D6B5E"/>
-                    </a:solidFill>
-                  </a:tcPr>
-                </a:tc>
-              </a:tr>
-              <a:tr h="301752">
-                <a:tc>
-                  <a:txBody>
-                    <a:bodyPr/>
-                    <a:lstStyle/>
-                    <a:p>
-                      <a:pPr>
-                        <a:defRPr sz="1000">
-                          <a:solidFill>
-                            <a:srgbClr val="2D2D2D"/>
-                          </a:solidFill>
-                          <a:latin typeface="Calibri"/>
-                        </a:defRPr>
-                      </a:pPr>
-                      <a:r>
-                        <a:t>初診時</a:t>
-                      </a:r>
-                    </a:p>
-                  </a:txBody>
-                  <a:tcPr marL="45720" marR="45720" marT="18288" marB="18288">
-                    <a:solidFill>
-                      <a:srgbClr val="F0F7F2"/>
-                    </a:solidFill>
-                  </a:tcPr>
-                </a:tc>
-                <a:tc>
-                  <a:txBody>
-                    <a:bodyPr/>
-                    <a:lstStyle/>
-                    <a:p>
-                      <a:pPr>
-                        <a:defRPr sz="1000">
-                          <a:solidFill>
-                            <a:srgbClr val="2D2D2D"/>
-                          </a:solidFill>
-                          <a:latin typeface="Calibri"/>
-                        </a:defRPr>
-                      </a:pPr>
-                      <a:r>
-                        <a:t>2点</a:t>
-                      </a:r>
-                    </a:p>
-                  </a:txBody>
-                  <a:tcPr marL="45720" marR="45720" marT="18288" marB="18288">
-                    <a:solidFill>
-                      <a:srgbClr val="F0F7F2"/>
-                    </a:solidFill>
-                  </a:tcPr>
-                </a:tc>
-              </a:tr>
-              <a:tr h="301752">
-                <a:tc>
-                  <a:txBody>
-                    <a:bodyPr/>
-                    <a:lstStyle/>
-                    <a:p>
-                      <a:pPr>
-                        <a:defRPr sz="1000">
-                          <a:solidFill>
-                            <a:srgbClr val="2D2D2D"/>
-                          </a:solidFill>
-                          <a:latin typeface="Calibri"/>
-                        </a:defRPr>
-                      </a:pPr>
-                      <a:r>
-                        <a:t>再診時</a:t>
-                      </a:r>
-                    </a:p>
-                  </a:txBody>
-                  <a:tcPr marL="45720" marR="45720" marT="18288" marB="18288">
-                    <a:solidFill>
-                      <a:srgbClr val="FFF8F0"/>
-                    </a:solidFill>
-                  </a:tcPr>
-                </a:tc>
-                <a:tc>
-                  <a:txBody>
-                    <a:bodyPr/>
-                    <a:lstStyle/>
-                    <a:p>
-                      <a:pPr>
-                        <a:defRPr sz="1000">
-                          <a:solidFill>
-                            <a:srgbClr val="2D2D2D"/>
-                          </a:solidFill>
-                          <a:latin typeface="Calibri"/>
-                        </a:defRPr>
-                      </a:pPr>
-                      <a:r>
-                        <a:t>2点</a:t>
-                      </a:r>
-                    </a:p>
-                  </a:txBody>
-                  <a:tcPr marL="45720" marR="45720" marT="18288" marB="18288">
-                    <a:solidFill>
-                      <a:srgbClr val="FFF8F0"/>
-                    </a:solidFill>
-                  </a:tcPr>
-                </a:tc>
-              </a:tr>
-              <a:tr h="301752">
-                <a:tc>
-                  <a:txBody>
-                    <a:bodyPr/>
-                    <a:lstStyle/>
-                    <a:p>
-                      <a:pPr>
-                        <a:defRPr sz="1000">
-                          <a:solidFill>
-                            <a:srgbClr val="2D2D2D"/>
-                          </a:solidFill>
-                          <a:latin typeface="Calibri"/>
-                        </a:defRPr>
-                      </a:pPr>
-                      <a:r>
-                        <a:t>訪問診療時</a:t>
-                      </a:r>
-                    </a:p>
-                  </a:txBody>
-                  <a:tcPr marL="45720" marR="45720" marT="18288" marB="18288">
-                    <a:solidFill>
-                      <a:srgbClr val="F0F7F2"/>
-                    </a:solidFill>
-                  </a:tcPr>
-                </a:tc>
-                <a:tc>
-                  <a:txBody>
-                    <a:bodyPr/>
-                    <a:lstStyle/>
-                    <a:p>
-                      <a:pPr>
-                        <a:defRPr sz="1000">
-                          <a:solidFill>
-                            <a:srgbClr val="2D2D2D"/>
-                          </a:solidFill>
-                          <a:latin typeface="Calibri"/>
-                        </a:defRPr>
-                      </a:pPr>
-                      <a:r>
-                        <a:t>3点</a:t>
-                      </a:r>
-                    </a:p>
-                  </a:txBody>
-                  <a:tcPr marL="45720" marR="45720" marT="18288" marB="18288">
-                    <a:solidFill>
-                      <a:srgbClr val="F0F7F2"/>
-                    </a:solidFill>
-                  </a:tcPr>
-                </a:tc>
-              </a:tr>
-            </a:tbl>
-          </a:graphicData>
-        </a:graphic>
-      </p:graphicFrame>
-      <p:sp>
-        <p:nvSpPr>
-          <p:cNvPr id="8" name="TextBox 7"/>
+              <a:t>15点</a:t>
+            </a:r>
+          </a:p>
+        </p:txBody>
+      </p:sp>
+      <p:sp>
+        <p:nvSpPr>
+          <p:cNvPr id="7" name="TextBox 6"/>
           <p:cNvSpPr txBox="1"/>
           <p:nvPr/>
         </p:nvSpPr>
         <p:spPr>
           <a:xfrm>
-            <a:off x="457200" y="2743200"/>
-            <a:ext cx="8229600" cy="274320"/>
+            <a:off x="1828800" y="1691640"/>
+            <a:ext cx="2743200" cy="457200"/>
           </a:xfrm>
           <a:prstGeom prst="rect">
             <a:avLst/>
@@ -4817,15 +4617,51 @@
           <a:lstStyle/>
           <a:p>
             <a:pPr algn="l">
-              <a:defRPr sz="1500" b="1">
-                <a:solidFill>
-                  <a:srgbClr val="E8A84C"/>
+              <a:defRPr sz="1400" b="0">
+                <a:solidFill>
+                  <a:srgbClr val="3D6B5E"/>
                 </a:solidFill>
                 <a:latin typeface="Calibri"/>
               </a:defRPr>
             </a:pPr>
             <a:r>
-              <a:t>3  再診料の引き上げ: 75点→76点（+1点）</a:t>
+              <a:t>利用率30%以上</a:t>
+            </a:r>
+          </a:p>
+        </p:txBody>
+      </p:sp>
+      <p:sp>
+        <p:nvSpPr>
+          <p:cNvPr id="8" name="TextBox 7"/>
+          <p:cNvSpPr txBox="1"/>
+          <p:nvPr/>
+        </p:nvSpPr>
+        <p:spPr>
+          <a:xfrm>
+            <a:off x="4572000" y="1737360"/>
+            <a:ext cx="3657600" cy="365760"/>
+          </a:xfrm>
+          <a:prstGeom prst="rect">
+            <a:avLst/>
+          </a:prstGeom>
+          <a:noFill/>
+        </p:spPr>
+        <p:txBody>
+          <a:bodyPr wrap="square" lIns="45720" rIns="45720" tIns="27432" bIns="27432">
+            <a:spAutoFit/>
+          </a:bodyPr>
+          <a:lstStyle/>
+          <a:p>
+            <a:pPr algn="l">
+              <a:defRPr sz="1100" b="0">
+                <a:solidFill>
+                  <a:srgbClr val="8A9E8C"/>
+                </a:solidFill>
+                <a:latin typeface="Calibri"/>
+              </a:defRPr>
+            </a:pPr>
+            <a:r>
+              <a:t>目指すべきライン</a:t>
             </a:r>
           </a:p>
         </p:txBody>
@@ -4838,8 +4674,314 @@
         </p:nvSpPr>
         <p:spPr>
           <a:xfrm>
-            <a:off x="457200" y="3200400"/>
-            <a:ext cx="54864" cy="548640"/>
+            <a:off x="457200" y="2468880"/>
+            <a:ext cx="6858000" cy="640080"/>
+          </a:xfrm>
+          <a:prstGeom prst="rect">
+            <a:avLst/>
+          </a:prstGeom>
+          <a:solidFill>
+            <a:srgbClr val="F0F7F2"/>
+          </a:solidFill>
+          <a:ln w="12700">
+            <a:solidFill>
+              <a:srgbClr val="8A9E8C"/>
+            </a:solidFill>
+          </a:ln>
+        </p:spPr>
+        <p:style>
+          <a:lnRef idx="1">
+            <a:schemeClr val="accent1"/>
+          </a:lnRef>
+          <a:fillRef idx="3">
+            <a:schemeClr val="accent1"/>
+          </a:fillRef>
+          <a:effectRef idx="2">
+            <a:schemeClr val="accent1"/>
+          </a:effectRef>
+          <a:fontRef idx="minor">
+            <a:schemeClr val="lt1"/>
+          </a:fontRef>
+        </p:style>
+        <p:txBody>
+          <a:bodyPr rtlCol="0" anchor="ctr"/>
+          <a:lstStyle/>
+          <a:p>
+            <a:pPr algn="ctr"/>
+          </a:p>
+        </p:txBody>
+      </p:sp>
+      <p:sp>
+        <p:nvSpPr>
+          <p:cNvPr id="10" name="TextBox 9"/>
+          <p:cNvSpPr txBox="1"/>
+          <p:nvPr/>
+        </p:nvSpPr>
+        <p:spPr>
+          <a:xfrm>
+            <a:off x="640080" y="2514600"/>
+            <a:ext cx="1097280" cy="457200"/>
+          </a:xfrm>
+          <a:prstGeom prst="rect">
+            <a:avLst/>
+          </a:prstGeom>
+          <a:noFill/>
+        </p:spPr>
+        <p:txBody>
+          <a:bodyPr wrap="square" lIns="45720" rIns="45720" tIns="27432" bIns="27432">
+            <a:spAutoFit/>
+          </a:bodyPr>
+          <a:lstStyle/>
+          <a:p>
+            <a:pPr algn="l">
+              <a:defRPr sz="2200" b="1">
+                <a:solidFill>
+                  <a:srgbClr val="2D2D2D"/>
+                </a:solidFill>
+                <a:latin typeface="Calibri"/>
+              </a:defRPr>
+            </a:pPr>
+            <a:r>
+              <a:t>9点</a:t>
+            </a:r>
+          </a:p>
+        </p:txBody>
+      </p:sp>
+      <p:sp>
+        <p:nvSpPr>
+          <p:cNvPr id="11" name="TextBox 10"/>
+          <p:cNvSpPr txBox="1"/>
+          <p:nvPr/>
+        </p:nvSpPr>
+        <p:spPr>
+          <a:xfrm>
+            <a:off x="1828800" y="2514600"/>
+            <a:ext cx="2743200" cy="457200"/>
+          </a:xfrm>
+          <a:prstGeom prst="rect">
+            <a:avLst/>
+          </a:prstGeom>
+          <a:noFill/>
+        </p:spPr>
+        <p:txBody>
+          <a:bodyPr wrap="square" lIns="45720" rIns="45720" tIns="27432" bIns="27432">
+            <a:spAutoFit/>
+          </a:bodyPr>
+          <a:lstStyle/>
+          <a:p>
+            <a:pPr algn="l">
+              <a:defRPr sz="1400" b="0">
+                <a:solidFill>
+                  <a:srgbClr val="2D2D2D"/>
+                </a:solidFill>
+                <a:latin typeface="Calibri"/>
+              </a:defRPr>
+            </a:pPr>
+            <a:r>
+              <a:t>電子処方箋あり</a:t>
+            </a:r>
+          </a:p>
+        </p:txBody>
+      </p:sp>
+      <p:sp>
+        <p:nvSpPr>
+          <p:cNvPr id="12" name="TextBox 11"/>
+          <p:cNvSpPr txBox="1"/>
+          <p:nvPr/>
+        </p:nvSpPr>
+        <p:spPr>
+          <a:xfrm>
+            <a:off x="4572000" y="2560320"/>
+            <a:ext cx="3657600" cy="365760"/>
+          </a:xfrm>
+          <a:prstGeom prst="rect">
+            <a:avLst/>
+          </a:prstGeom>
+          <a:noFill/>
+        </p:spPr>
+        <p:txBody>
+          <a:bodyPr wrap="square" lIns="45720" rIns="45720" tIns="27432" bIns="27432">
+            <a:spAutoFit/>
+          </a:bodyPr>
+          <a:lstStyle/>
+          <a:p>
+            <a:pPr algn="l">
+              <a:defRPr sz="1100" b="0">
+                <a:solidFill>
+                  <a:srgbClr val="8A9E8C"/>
+                </a:solidFill>
+                <a:latin typeface="Calibri"/>
+              </a:defRPr>
+            </a:pPr>
+            <a:r>
+              <a:t>体制が整っていれば</a:t>
+            </a:r>
+          </a:p>
+        </p:txBody>
+      </p:sp>
+      <p:sp>
+        <p:nvSpPr>
+          <p:cNvPr id="13" name="Rectangle 12"/>
+          <p:cNvSpPr/>
+          <p:nvPr/>
+        </p:nvSpPr>
+        <p:spPr>
+          <a:xfrm>
+            <a:off x="457200" y="3291840"/>
+            <a:ext cx="5486400" cy="640080"/>
+          </a:xfrm>
+          <a:prstGeom prst="rect">
+            <a:avLst/>
+          </a:prstGeom>
+          <a:solidFill>
+            <a:srgbClr val="F0F7F2"/>
+          </a:solidFill>
+          <a:ln w="12700">
+            <a:solidFill>
+              <a:srgbClr val="8A9E8C"/>
+            </a:solidFill>
+          </a:ln>
+        </p:spPr>
+        <p:style>
+          <a:lnRef idx="1">
+            <a:schemeClr val="accent1"/>
+          </a:lnRef>
+          <a:fillRef idx="3">
+            <a:schemeClr val="accent1"/>
+          </a:fillRef>
+          <a:effectRef idx="2">
+            <a:schemeClr val="accent1"/>
+          </a:effectRef>
+          <a:fontRef idx="minor">
+            <a:schemeClr val="lt1"/>
+          </a:fontRef>
+        </p:style>
+        <p:txBody>
+          <a:bodyPr rtlCol="0" anchor="ctr"/>
+          <a:lstStyle/>
+          <a:p>
+            <a:pPr algn="ctr"/>
+          </a:p>
+        </p:txBody>
+      </p:sp>
+      <p:sp>
+        <p:nvSpPr>
+          <p:cNvPr id="14" name="TextBox 13"/>
+          <p:cNvSpPr txBox="1"/>
+          <p:nvPr/>
+        </p:nvSpPr>
+        <p:spPr>
+          <a:xfrm>
+            <a:off x="640080" y="3337560"/>
+            <a:ext cx="1097280" cy="457200"/>
+          </a:xfrm>
+          <a:prstGeom prst="rect">
+            <a:avLst/>
+          </a:prstGeom>
+          <a:noFill/>
+        </p:spPr>
+        <p:txBody>
+          <a:bodyPr wrap="square" lIns="45720" rIns="45720" tIns="27432" bIns="27432">
+            <a:spAutoFit/>
+          </a:bodyPr>
+          <a:lstStyle/>
+          <a:p>
+            <a:pPr algn="l">
+              <a:defRPr sz="2200" b="1">
+                <a:solidFill>
+                  <a:srgbClr val="2D2D2D"/>
+                </a:solidFill>
+                <a:latin typeface="Calibri"/>
+              </a:defRPr>
+            </a:pPr>
+            <a:r>
+              <a:t>4点</a:t>
+            </a:r>
+          </a:p>
+        </p:txBody>
+      </p:sp>
+      <p:sp>
+        <p:nvSpPr>
+          <p:cNvPr id="15" name="TextBox 14"/>
+          <p:cNvSpPr txBox="1"/>
+          <p:nvPr/>
+        </p:nvSpPr>
+        <p:spPr>
+          <a:xfrm>
+            <a:off x="1828800" y="3337560"/>
+            <a:ext cx="2743200" cy="457200"/>
+          </a:xfrm>
+          <a:prstGeom prst="rect">
+            <a:avLst/>
+          </a:prstGeom>
+          <a:noFill/>
+        </p:spPr>
+        <p:txBody>
+          <a:bodyPr wrap="square" lIns="45720" rIns="45720" tIns="27432" bIns="27432">
+            <a:spAutoFit/>
+          </a:bodyPr>
+          <a:lstStyle/>
+          <a:p>
+            <a:pPr algn="l">
+              <a:defRPr sz="1400" b="0">
+                <a:solidFill>
+                  <a:srgbClr val="2D2D2D"/>
+                </a:solidFill>
+                <a:latin typeface="Calibri"/>
+              </a:defRPr>
+            </a:pPr>
+            <a:r>
+              <a:t>基本体制のみ</a:t>
+            </a:r>
+          </a:p>
+        </p:txBody>
+      </p:sp>
+      <p:sp>
+        <p:nvSpPr>
+          <p:cNvPr id="16" name="TextBox 15"/>
+          <p:cNvSpPr txBox="1"/>
+          <p:nvPr/>
+        </p:nvSpPr>
+        <p:spPr>
+          <a:xfrm>
+            <a:off x="4572000" y="3383280"/>
+            <a:ext cx="3657600" cy="365760"/>
+          </a:xfrm>
+          <a:prstGeom prst="rect">
+            <a:avLst/>
+          </a:prstGeom>
+          <a:noFill/>
+        </p:spPr>
+        <p:txBody>
+          <a:bodyPr wrap="square" lIns="45720" rIns="45720" tIns="27432" bIns="27432">
+            <a:spAutoFit/>
+          </a:bodyPr>
+          <a:lstStyle/>
+          <a:p>
+            <a:pPr algn="l">
+              <a:defRPr sz="1100" b="0">
+                <a:solidFill>
+                  <a:srgbClr val="8A9E8C"/>
+                </a:solidFill>
+                <a:latin typeface="Calibri"/>
+              </a:defRPr>
+            </a:pPr>
+            <a:r>
+              <a:t>最低ライン</a:t>
+            </a:r>
+          </a:p>
+        </p:txBody>
+      </p:sp>
+      <p:sp>
+        <p:nvSpPr>
+          <p:cNvPr id="17" name="Rectangle 16"/>
+          <p:cNvSpPr/>
+          <p:nvPr/>
+        </p:nvSpPr>
+        <p:spPr>
+          <a:xfrm>
+            <a:off x="457200" y="4389120"/>
+            <a:ext cx="54864" cy="640080"/>
           </a:xfrm>
           <a:prstGeom prst="rect">
             <a:avLst/>
@@ -4875,14 +5017,14 @@
       </p:sp>
       <p:sp>
         <p:nvSpPr>
-          <p:cNvPr id="10" name="Rectangle 9"/>
+          <p:cNvPr id="18" name="Rectangle 17"/>
           <p:cNvSpPr/>
           <p:nvPr/>
         </p:nvSpPr>
         <p:spPr>
           <a:xfrm>
-            <a:off x="566928" y="3200400"/>
-            <a:ext cx="8119872" cy="548640"/>
+            <a:off x="566928" y="4389120"/>
+            <a:ext cx="8119872" cy="640080"/>
           </a:xfrm>
           <a:prstGeom prst="rect">
             <a:avLst/>
@@ -4920,14 +5062,14 @@
       </p:sp>
       <p:sp>
         <p:nvSpPr>
-          <p:cNvPr id="11" name="TextBox 10"/>
+          <p:cNvPr id="19" name="TextBox 18"/>
           <p:cNvSpPr txBox="1"/>
           <p:nvPr/>
         </p:nvSpPr>
         <p:spPr>
           <a:xfrm>
-            <a:off x="685800" y="3273552"/>
-            <a:ext cx="7863840" cy="402335"/>
+            <a:off x="685800" y="4462272"/>
+            <a:ext cx="7863840" cy="493775"/>
           </a:xfrm>
           <a:prstGeom prst="rect">
             <a:avLst/>
@@ -4941,7 +5083,7 @@
           <a:lstStyle/>
           <a:p>
             <a:pPr algn="l">
-              <a:defRPr sz="1100" b="0">
+              <a:defRPr sz="1200" b="0">
                 <a:solidFill>
                   <a:srgbClr val="2D2D2D"/>
                 </a:solidFill>
@@ -4949,7 +5091,11 @@
               </a:defRPr>
             </a:pPr>
             <a:r>
-              <a:t>小さな変化に見えますが、全患者の再診に影響するため病院全体では大きな収入増。</a:t>
+              <a:t>受付の皆さんへ: 「マイナ保険証はお持ちですか？」の一言が、</a:t>
+            </a:r>
+            <a:br/>
+            <a:r>
+              <a:t>病院の収入を年間数百万円変える可能性があります。</a:t>
             </a:r>
           </a:p>
         </p:txBody>
@@ -4962,7 +5108,7 @@
 </p:sld>
 </file>
 
-<file path=ppt/slides/slide4.xml><?xml version="1.0" encoding="utf-8"?>
+<file path=ppt/slides/slide5.xml><?xml version="1.0" encoding="utf-8"?>
 <p:sld xmlns:a="http://schemas.openxmlformats.org/drawingml/2006/main" xmlns:p="http://schemas.openxmlformats.org/presentationml/2006/main" xmlns:r="http://schemas.openxmlformats.org/officeDocument/2006/relationships">
   <p:cSld>
     <p:bg>
@@ -4988,7 +5134,7 @@
         </p:nvSpPr>
         <p:spPr>
           <a:xfrm>
-            <a:off x="457200" y="182880"/>
+            <a:off x="457200" y="274320"/>
             <a:ext cx="8229600" cy="457200"/>
           </a:xfrm>
           <a:prstGeom prst="rect">
@@ -5003,7 +5149,7 @@
           <a:lstStyle/>
           <a:p>
             <a:pPr algn="l">
-              <a:defRPr sz="2200" b="1">
+              <a:defRPr sz="2400" b="1">
                 <a:solidFill>
                   <a:srgbClr val="FFF8F0"/>
                 </a:solidFill>
@@ -5011,7 +5157,7 @@
               </a:defRPr>
             </a:pPr>
             <a:r>
-              <a:t>業務で変わること — DXとBCP</a:t>
+              <a:t>BCP = 事業継続計画</a:t>
             </a:r>
           </a:p>
         </p:txBody>
@@ -5024,8 +5170,8 @@
         </p:nvSpPr>
         <p:spPr>
           <a:xfrm>
-            <a:off x="457200" y="640080"/>
-            <a:ext cx="2743200" cy="54864"/>
+            <a:off x="457200" y="777240"/>
+            <a:ext cx="1828800" cy="54864"/>
           </a:xfrm>
           <a:prstGeom prst="rect">
             <a:avLst/>
@@ -5067,8 +5213,8 @@
         </p:nvSpPr>
         <p:spPr>
           <a:xfrm>
-            <a:off x="457200" y="822960"/>
-            <a:ext cx="4572000" cy="274320"/>
+            <a:off x="457200" y="1188720"/>
+            <a:ext cx="8229600" cy="457200"/>
           </a:xfrm>
           <a:prstGeom prst="rect">
             <a:avLst/>
@@ -5082,7 +5228,7 @@
           <a:lstStyle/>
           <a:p>
             <a:pPr algn="l">
-              <a:defRPr sz="1400" b="1">
+              <a:defRPr sz="1600" b="0">
                 <a:solidFill>
                   <a:srgbClr val="E8A84C"/>
                 </a:solidFill>
@@ -5090,459 +5236,21 @@
               </a:defRPr>
             </a:pPr>
             <a:r>
-              <a:t>マイナ保険証の利用率が病院の収入に直結</a:t>
-            </a:r>
-          </a:p>
-        </p:txBody>
-      </p:sp>
-      <p:graphicFrame>
-        <p:nvGraphicFramePr>
-          <p:cNvPr id="5" name="Table 4"/>
-          <p:cNvGraphicFramePr>
-            <a:graphicFrameLocks noGrp="1"/>
-          </p:cNvGraphicFramePr>
-          <p:nvPr/>
-        </p:nvGraphicFramePr>
-        <p:xfrm>
-          <a:off x="274320" y="1097280"/>
-          <a:ext cx="4572000" cy="1280160"/>
-        </p:xfrm>
-        <a:graphic>
-          <a:graphicData uri="http://schemas.openxmlformats.org/drawingml/2006/table">
-            <a:tbl>
-              <a:tblPr firstRow="1" bandRow="1">
-                <a:tableStyleId>{5C22544A-7EE6-4342-B048-85BDC9FD1C3A}</a:tableStyleId>
-              </a:tblPr>
-              <a:tblGrid>
-                <a:gridCol w="731520"/>
-                <a:gridCol w="731520"/>
-                <a:gridCol w="3108960"/>
-              </a:tblGrid>
-              <a:tr h="320040">
-                <a:tc>
-                  <a:txBody>
-                    <a:bodyPr/>
-                    <a:lstStyle/>
-                    <a:p>
-                      <a:pPr>
-                        <a:defRPr sz="900" b="1">
-                          <a:solidFill>
-                            <a:srgbClr val="FFF8F0"/>
-                          </a:solidFill>
-                          <a:latin typeface="Calibri"/>
-                        </a:defRPr>
-                      </a:pPr>
-                      <a:r>
-                        <a:t>区分</a:t>
-                      </a:r>
-                    </a:p>
-                  </a:txBody>
-                  <a:tcPr marL="45720" marR="45720" marT="18288" marB="18288">
-                    <a:solidFill>
-                      <a:srgbClr val="3D6B5E"/>
-                    </a:solidFill>
-                  </a:tcPr>
-                </a:tc>
-                <a:tc>
-                  <a:txBody>
-                    <a:bodyPr/>
-                    <a:lstStyle/>
-                    <a:p>
-                      <a:pPr>
-                        <a:defRPr sz="900" b="1">
-                          <a:solidFill>
-                            <a:srgbClr val="FFF8F0"/>
-                          </a:solidFill>
-                          <a:latin typeface="Calibri"/>
-                        </a:defRPr>
-                      </a:pPr>
-                      <a:r>
-                        <a:t>点数</a:t>
-                      </a:r>
-                    </a:p>
-                  </a:txBody>
-                  <a:tcPr marL="45720" marR="45720" marT="18288" marB="18288">
-                    <a:solidFill>
-                      <a:srgbClr val="3D6B5E"/>
-                    </a:solidFill>
-                  </a:tcPr>
-                </a:tc>
-                <a:tc>
-                  <a:txBody>
-                    <a:bodyPr/>
-                    <a:lstStyle/>
-                    <a:p>
-                      <a:pPr>
-                        <a:defRPr sz="900" b="1">
-                          <a:solidFill>
-                            <a:srgbClr val="FFF8F0"/>
-                          </a:solidFill>
-                          <a:latin typeface="Calibri"/>
-                        </a:defRPr>
-                      </a:pPr>
-                      <a:r>
-                        <a:t>主な要件</a:t>
-                      </a:r>
-                    </a:p>
-                  </a:txBody>
-                  <a:tcPr marL="45720" marR="45720" marT="18288" marB="18288">
-                    <a:solidFill>
-                      <a:srgbClr val="3D6B5E"/>
-                    </a:solidFill>
-                  </a:tcPr>
-                </a:tc>
-              </a:tr>
-              <a:tr h="320040">
-                <a:tc>
-                  <a:txBody>
-                    <a:bodyPr/>
-                    <a:lstStyle/>
-                    <a:p>
-                      <a:pPr>
-                        <a:defRPr sz="900">
-                          <a:solidFill>
-                            <a:srgbClr val="2D2D2D"/>
-                          </a:solidFill>
-                          <a:latin typeface="Calibri"/>
-                        </a:defRPr>
-                      </a:pPr>
-                      <a:r>
-                        <a:t>区分1</a:t>
-                      </a:r>
-                    </a:p>
-                  </a:txBody>
-                  <a:tcPr marL="45720" marR="45720" marT="18288" marB="18288">
-                    <a:solidFill>
-                      <a:srgbClr val="F0F7F2"/>
-                    </a:solidFill>
-                  </a:tcPr>
-                </a:tc>
-                <a:tc>
-                  <a:txBody>
-                    <a:bodyPr/>
-                    <a:lstStyle/>
-                    <a:p>
-                      <a:pPr>
-                        <a:defRPr sz="900">
-                          <a:solidFill>
-                            <a:srgbClr val="2D2D2D"/>
-                          </a:solidFill>
-                          <a:latin typeface="Calibri"/>
-                        </a:defRPr>
-                      </a:pPr>
-                      <a:r>
-                        <a:t>15点</a:t>
-                      </a:r>
-                    </a:p>
-                  </a:txBody>
-                  <a:tcPr marL="45720" marR="45720" marT="18288" marB="18288">
-                    <a:solidFill>
-                      <a:srgbClr val="F0F7F2"/>
-                    </a:solidFill>
-                  </a:tcPr>
-                </a:tc>
-                <a:tc>
-                  <a:txBody>
-                    <a:bodyPr/>
-                    <a:lstStyle/>
-                    <a:p>
-                      <a:pPr>
-                        <a:defRPr sz="900">
-                          <a:solidFill>
-                            <a:srgbClr val="2D2D2D"/>
-                          </a:solidFill>
-                          <a:latin typeface="Calibri"/>
-                        </a:defRPr>
-                      </a:pPr>
-                      <a:r>
-                        <a:t>マイナ利用率30%以上+電子処方箋</a:t>
-                      </a:r>
-                    </a:p>
-                  </a:txBody>
-                  <a:tcPr marL="45720" marR="45720" marT="18288" marB="18288">
-                    <a:solidFill>
-                      <a:srgbClr val="F0F7F2"/>
-                    </a:solidFill>
-                  </a:tcPr>
-                </a:tc>
-              </a:tr>
-              <a:tr h="320040">
-                <a:tc>
-                  <a:txBody>
-                    <a:bodyPr/>
-                    <a:lstStyle/>
-                    <a:p>
-                      <a:pPr>
-                        <a:defRPr sz="900">
-                          <a:solidFill>
-                            <a:srgbClr val="2D2D2D"/>
-                          </a:solidFill>
-                          <a:latin typeface="Calibri"/>
-                        </a:defRPr>
-                      </a:pPr>
-                      <a:r>
-                        <a:t>区分2</a:t>
-                      </a:r>
-                    </a:p>
-                  </a:txBody>
-                  <a:tcPr marL="45720" marR="45720" marT="18288" marB="18288">
-                    <a:solidFill>
-                      <a:srgbClr val="FFF8F0"/>
-                    </a:solidFill>
-                  </a:tcPr>
-                </a:tc>
-                <a:tc>
-                  <a:txBody>
-                    <a:bodyPr/>
-                    <a:lstStyle/>
-                    <a:p>
-                      <a:pPr>
-                        <a:defRPr sz="900">
-                          <a:solidFill>
-                            <a:srgbClr val="2D2D2D"/>
-                          </a:solidFill>
-                          <a:latin typeface="Calibri"/>
-                        </a:defRPr>
-                      </a:pPr>
-                      <a:r>
-                        <a:t>9点</a:t>
-                      </a:r>
-                    </a:p>
-                  </a:txBody>
-                  <a:tcPr marL="45720" marR="45720" marT="18288" marB="18288">
-                    <a:solidFill>
-                      <a:srgbClr val="FFF8F0"/>
-                    </a:solidFill>
-                  </a:tcPr>
-                </a:tc>
-                <a:tc>
-                  <a:txBody>
-                    <a:bodyPr/>
-                    <a:lstStyle/>
-                    <a:p>
-                      <a:pPr>
-                        <a:defRPr sz="900">
-                          <a:solidFill>
-                            <a:srgbClr val="2D2D2D"/>
-                          </a:solidFill>
-                          <a:latin typeface="Calibri"/>
-                        </a:defRPr>
-                      </a:pPr>
-                      <a:r>
-                        <a:t>電子処方箋体制あり</a:t>
-                      </a:r>
-                    </a:p>
-                  </a:txBody>
-                  <a:tcPr marL="45720" marR="45720" marT="18288" marB="18288">
-                    <a:solidFill>
-                      <a:srgbClr val="FFF8F0"/>
-                    </a:solidFill>
-                  </a:tcPr>
-                </a:tc>
-              </a:tr>
-              <a:tr h="320040">
-                <a:tc>
-                  <a:txBody>
-                    <a:bodyPr/>
-                    <a:lstStyle/>
-                    <a:p>
-                      <a:pPr>
-                        <a:defRPr sz="900">
-                          <a:solidFill>
-                            <a:srgbClr val="2D2D2D"/>
-                          </a:solidFill>
-                          <a:latin typeface="Calibri"/>
-                        </a:defRPr>
-                      </a:pPr>
-                      <a:r>
-                        <a:t>区分3</a:t>
-                      </a:r>
-                    </a:p>
-                  </a:txBody>
-                  <a:tcPr marL="45720" marR="45720" marT="18288" marB="18288">
-                    <a:solidFill>
-                      <a:srgbClr val="F0F7F2"/>
-                    </a:solidFill>
-                  </a:tcPr>
-                </a:tc>
-                <a:tc>
-                  <a:txBody>
-                    <a:bodyPr/>
-                    <a:lstStyle/>
-                    <a:p>
-                      <a:pPr>
-                        <a:defRPr sz="900">
-                          <a:solidFill>
-                            <a:srgbClr val="2D2D2D"/>
-                          </a:solidFill>
-                          <a:latin typeface="Calibri"/>
-                        </a:defRPr>
-                      </a:pPr>
-                      <a:r>
-                        <a:t>4点</a:t>
-                      </a:r>
-                    </a:p>
-                  </a:txBody>
-                  <a:tcPr marL="45720" marR="45720" marT="18288" marB="18288">
-                    <a:solidFill>
-                      <a:srgbClr val="F0F7F2"/>
-                    </a:solidFill>
-                  </a:tcPr>
-                </a:tc>
-                <a:tc>
-                  <a:txBody>
-                    <a:bodyPr/>
-                    <a:lstStyle/>
-                    <a:p>
-                      <a:pPr>
-                        <a:defRPr sz="900">
-                          <a:solidFill>
-                            <a:srgbClr val="2D2D2D"/>
-                          </a:solidFill>
-                          <a:latin typeface="Calibri"/>
-                        </a:defRPr>
-                      </a:pPr>
-                      <a:r>
-                        <a:t>マイナ保険証基本体制のみ</a:t>
-                      </a:r>
-                    </a:p>
-                  </a:txBody>
-                  <a:tcPr marL="45720" marR="45720" marT="18288" marB="18288">
-                    <a:solidFill>
-                      <a:srgbClr val="F0F7F2"/>
-                    </a:solidFill>
-                  </a:tcPr>
-                </a:tc>
-              </a:tr>
-            </a:tbl>
-          </a:graphicData>
-        </a:graphic>
-      </p:graphicFrame>
-      <p:sp>
-        <p:nvSpPr>
-          <p:cNvPr id="6" name="TextBox 5"/>
-          <p:cNvSpPr txBox="1"/>
-          <p:nvPr/>
-        </p:nvSpPr>
-        <p:spPr>
-          <a:xfrm>
-            <a:off x="5029200" y="822960"/>
-            <a:ext cx="3840480" cy="274320"/>
-          </a:xfrm>
-          <a:prstGeom prst="rect">
-            <a:avLst/>
-          </a:prstGeom>
-          <a:noFill/>
-        </p:spPr>
-        <p:txBody>
-          <a:bodyPr wrap="square" lIns="45720" rIns="45720" tIns="27432" bIns="27432">
-            <a:spAutoFit/>
-          </a:bodyPr>
-          <a:lstStyle/>
-          <a:p>
-            <a:pPr algn="l">
-              <a:defRPr sz="1400" b="1">
-                <a:solidFill>
-                  <a:srgbClr val="E8A84C"/>
-                </a:solidFill>
-                <a:latin typeface="Calibri"/>
-              </a:defRPr>
-            </a:pPr>
-            <a:r>
-              <a:t>BCP（事業継続計画）の策定が義務化</a:t>
-            </a:r>
-          </a:p>
-        </p:txBody>
-      </p:sp>
-      <p:sp>
-        <p:nvSpPr>
-          <p:cNvPr id="7" name="TextBox 6"/>
-          <p:cNvSpPr txBox="1"/>
-          <p:nvPr/>
-        </p:nvSpPr>
-        <p:spPr>
-          <a:xfrm>
-            <a:off x="5029200" y="1188720"/>
-            <a:ext cx="3840480" cy="2286000"/>
-          </a:xfrm>
-          <a:prstGeom prst="rect">
-            <a:avLst/>
-          </a:prstGeom>
-          <a:noFill/>
-        </p:spPr>
-        <p:txBody>
-          <a:bodyPr wrap="square" lIns="45720" rIns="45720" tIns="27432" bIns="27432">
-            <a:spAutoFit/>
-          </a:bodyPr>
-          <a:lstStyle/>
-          <a:p>
-            <a:pPr>
-              <a:defRPr sz="1200">
-                <a:solidFill>
-                  <a:srgbClr val="FFF8F0"/>
-                </a:solidFill>
-                <a:latin typeface="Calibri"/>
-              </a:defRPr>
-              <a:buChar char="●"/>
-            </a:pPr>
-            <a:r>
-              <a:t>災害やサイバー攻撃でも診療を続ける計画</a:t>
-            </a:r>
-          </a:p>
-          <a:p>
-            <a:pPr>
-              <a:defRPr sz="1200">
-                <a:solidFill>
-                  <a:srgbClr val="FFF8F0"/>
-                </a:solidFill>
-                <a:latin typeface="Calibri"/>
-              </a:defRPr>
-              <a:buChar char="●"/>
-            </a:pPr>
-            <a:r>
-              <a:t>機能強化加算・在支診/在支病の施設基準に追加</a:t>
-            </a:r>
-          </a:p>
-          <a:p>
-            <a:pPr>
-              <a:defRPr sz="1200">
-                <a:solidFill>
-                  <a:srgbClr val="FFF8F0"/>
-                </a:solidFill>
-                <a:latin typeface="Calibri"/>
-              </a:defRPr>
-              <a:buChar char="●"/>
-            </a:pPr>
-            <a:r>
-              <a:t>経過措置: 2027年5月末まで</a:t>
-            </a:r>
-          </a:p>
-          <a:p>
-            <a:pPr>
-              <a:defRPr sz="1200">
-                <a:solidFill>
-                  <a:srgbClr val="FFF8F0"/>
-                </a:solidFill>
-                <a:latin typeface="Calibri"/>
-              </a:defRPr>
-              <a:buChar char="●"/>
-            </a:pPr>
-            <a:r>
-              <a:t>「災害時にあなたは何をするか」を決める</a:t>
-            </a:r>
-          </a:p>
-        </p:txBody>
-      </p:sp>
-      <p:sp>
-        <p:nvSpPr>
-          <p:cNvPr id="8" name="Rectangle 7"/>
+              <a:t>「災害やサイバー攻撃が起きても診療を続ける計画」</a:t>
+            </a:r>
+          </a:p>
+        </p:txBody>
+      </p:sp>
+      <p:sp>
+        <p:nvSpPr>
+          <p:cNvPr id="5" name="Rectangle 4"/>
           <p:cNvSpPr/>
           <p:nvPr/>
         </p:nvSpPr>
         <p:spPr>
           <a:xfrm>
-            <a:off x="457200" y="3474720"/>
-            <a:ext cx="54864" cy="548640"/>
+            <a:off x="2286000" y="1828800"/>
+            <a:ext cx="4572000" cy="1371600"/>
           </a:xfrm>
           <a:prstGeom prst="rect">
             <a:avLst/>
@@ -5578,59 +5286,14 @@
       </p:sp>
       <p:sp>
         <p:nvSpPr>
-          <p:cNvPr id="9" name="Rectangle 8"/>
-          <p:cNvSpPr/>
-          <p:nvPr/>
-        </p:nvSpPr>
-        <p:spPr>
-          <a:xfrm>
-            <a:off x="566928" y="3474720"/>
-            <a:ext cx="8119872" cy="548640"/>
-          </a:xfrm>
-          <a:prstGeom prst="rect">
-            <a:avLst/>
-          </a:prstGeom>
-          <a:solidFill>
-            <a:srgbClr val="FFFFFF"/>
-          </a:solidFill>
-          <a:ln w="12700">
-            <a:solidFill>
-              <a:srgbClr val="7DB89E"/>
-            </a:solidFill>
-          </a:ln>
-        </p:spPr>
-        <p:style>
-          <a:lnRef idx="1">
-            <a:schemeClr val="accent1"/>
-          </a:lnRef>
-          <a:fillRef idx="3">
-            <a:schemeClr val="accent1"/>
-          </a:fillRef>
-          <a:effectRef idx="2">
-            <a:schemeClr val="accent1"/>
-          </a:effectRef>
-          <a:fontRef idx="minor">
-            <a:schemeClr val="lt1"/>
-          </a:fontRef>
-        </p:style>
-        <p:txBody>
-          <a:bodyPr rtlCol="0" anchor="ctr"/>
-          <a:lstStyle/>
-          <a:p>
-            <a:pPr algn="ctr"/>
-          </a:p>
-        </p:txBody>
-      </p:sp>
-      <p:sp>
-        <p:nvSpPr>
-          <p:cNvPr id="10" name="TextBox 9"/>
+          <p:cNvPr id="6" name="TextBox 5"/>
           <p:cNvSpPr txBox="1"/>
           <p:nvPr/>
         </p:nvSpPr>
         <p:spPr>
           <a:xfrm>
-            <a:off x="685800" y="3547872"/>
-            <a:ext cx="7863840" cy="402335"/>
+            <a:off x="2286000" y="1874519"/>
+            <a:ext cx="4572000" cy="274320"/>
           </a:xfrm>
           <a:prstGeom prst="rect">
             <a:avLst/>
@@ -5643,16 +5306,189 @@
           </a:bodyPr>
           <a:lstStyle/>
           <a:p>
+            <a:pPr algn="ctr">
+              <a:defRPr sz="1100" b="0">
+                <a:solidFill>
+                  <a:srgbClr val="3D6B5E"/>
+                </a:solidFill>
+                <a:latin typeface="Calibri"/>
+              </a:defRPr>
+            </a:pPr>
+            <a:r>
+              <a:t>策定期限</a:t>
+            </a:r>
+          </a:p>
+        </p:txBody>
+      </p:sp>
+      <p:sp>
+        <p:nvSpPr>
+          <p:cNvPr id="7" name="TextBox 6"/>
+          <p:cNvSpPr txBox="1"/>
+          <p:nvPr/>
+        </p:nvSpPr>
+        <p:spPr>
+          <a:xfrm>
+            <a:off x="2286000" y="2148840"/>
+            <a:ext cx="4572000" cy="731520"/>
+          </a:xfrm>
+          <a:prstGeom prst="rect">
+            <a:avLst/>
+          </a:prstGeom>
+          <a:noFill/>
+        </p:spPr>
+        <p:txBody>
+          <a:bodyPr wrap="square" lIns="45720" rIns="45720" tIns="27432" bIns="27432">
+            <a:spAutoFit/>
+          </a:bodyPr>
+          <a:lstStyle/>
+          <a:p>
+            <a:pPr algn="ctr">
+              <a:defRPr sz="3600" b="1">
+                <a:solidFill>
+                  <a:srgbClr val="3D6B5E"/>
+                </a:solidFill>
+                <a:latin typeface="Calibri"/>
+              </a:defRPr>
+            </a:pPr>
+            <a:r>
+              <a:t>2027年5月末</a:t>
+            </a:r>
+          </a:p>
+        </p:txBody>
+      </p:sp>
+      <p:sp>
+        <p:nvSpPr>
+          <p:cNvPr id="8" name="TextBox 7"/>
+          <p:cNvSpPr txBox="1"/>
+          <p:nvPr/>
+        </p:nvSpPr>
+        <p:spPr>
+          <a:xfrm>
+            <a:off x="2286000" y="2834640"/>
+            <a:ext cx="4572000" cy="274320"/>
+          </a:xfrm>
+          <a:prstGeom prst="rect">
+            <a:avLst/>
+          </a:prstGeom>
+          <a:noFill/>
+        </p:spPr>
+        <p:txBody>
+          <a:bodyPr wrap="square" lIns="45720" rIns="45720" tIns="27432" bIns="27432">
+            <a:spAutoFit/>
+          </a:bodyPr>
+          <a:lstStyle/>
+          <a:p>
+            <a:pPr algn="ctr">
+              <a:defRPr sz="1100" b="0">
+                <a:solidFill>
+                  <a:srgbClr val="3D6B5E"/>
+                </a:solidFill>
+                <a:latin typeface="Calibri"/>
+              </a:defRPr>
+            </a:pPr>
+            <a:r>
+              <a:t>未策定の場合、施設基準を満たせなくなる可能性</a:t>
+            </a:r>
+          </a:p>
+        </p:txBody>
+      </p:sp>
+      <p:sp>
+        <p:nvSpPr>
+          <p:cNvPr id="9" name="TextBox 8"/>
+          <p:cNvSpPr txBox="1"/>
+          <p:nvPr/>
+        </p:nvSpPr>
+        <p:spPr>
+          <a:xfrm>
+            <a:off x="457200" y="3474720"/>
+            <a:ext cx="8229600" cy="274320"/>
+          </a:xfrm>
+          <a:prstGeom prst="rect">
+            <a:avLst/>
+          </a:prstGeom>
+          <a:noFill/>
+        </p:spPr>
+        <p:txBody>
+          <a:bodyPr wrap="square" lIns="45720" rIns="45720" tIns="27432" bIns="27432">
+            <a:spAutoFit/>
+          </a:bodyPr>
+          <a:lstStyle/>
+          <a:p>
             <a:pPr algn="l">
-              <a:defRPr sz="1200" b="0">
-                <a:solidFill>
-                  <a:srgbClr val="2D2D2D"/>
-                </a:solidFill>
-                <a:latin typeface="Georgia"/>
+              <a:defRPr sz="1400" b="1">
+                <a:solidFill>
+                  <a:srgbClr val="FFF8F0"/>
+                </a:solidFill>
+                <a:latin typeface="Calibri"/>
               </a:defRPr>
             </a:pPr>
             <a:r>
-              <a:t>窓口スタッフの皆さんへ: マイナ保険証利用の声かけが病院の収入に直結します。</a:t>
+              <a:t>あなたに関係すること:</a:t>
+            </a:r>
+          </a:p>
+        </p:txBody>
+      </p:sp>
+      <p:sp>
+        <p:nvSpPr>
+          <p:cNvPr id="10" name="TextBox 9"/>
+          <p:cNvSpPr txBox="1"/>
+          <p:nvPr/>
+        </p:nvSpPr>
+        <p:spPr>
+          <a:xfrm>
+            <a:off x="640080" y="3840480"/>
+            <a:ext cx="7772400" cy="1097280"/>
+          </a:xfrm>
+          <a:prstGeom prst="rect">
+            <a:avLst/>
+          </a:prstGeom>
+          <a:noFill/>
+        </p:spPr>
+        <p:txBody>
+          <a:bodyPr wrap="square" lIns="45720" rIns="45720" tIns="27432" bIns="27432">
+            <a:spAutoFit/>
+          </a:bodyPr>
+          <a:lstStyle/>
+          <a:p>
+            <a:pPr>
+              <a:defRPr sz="1300">
+                <a:solidFill>
+                  <a:srgbClr val="FFF8F0"/>
+                </a:solidFill>
+                <a:latin typeface="Calibri"/>
+              </a:defRPr>
+              <a:buChar char="●"/>
+            </a:pPr>
+            <a:r>
+              <a:t>「災害時にあなたの部署は何をするか」を決める</a:t>
+            </a:r>
+          </a:p>
+          <a:p>
+            <a:pPr>
+              <a:defRPr sz="1300">
+                <a:solidFill>
+                  <a:srgbClr val="FFF8F0"/>
+                </a:solidFill>
+                <a:latin typeface="Calibri"/>
+              </a:defRPr>
+              <a:buChar char="●"/>
+            </a:pPr>
+            <a:r>
+              <a:t>「システムが止まったらどうするか」の手順を決める</a:t>
+            </a:r>
+          </a:p>
+          <a:p>
+            <a:pPr>
+              <a:defRPr sz="1300">
+                <a:solidFill>
+                  <a:srgbClr val="FFF8F0"/>
+                </a:solidFill>
+                <a:latin typeface="Calibri"/>
+              </a:defRPr>
+              <a:buChar char="●"/>
+            </a:pPr>
+            <a:r>
+              <a:t>年1回以上の訓練に参加する</a:t>
             </a:r>
           </a:p>
         </p:txBody>
@@ -5665,7 +5501,7 @@
 </p:sld>
 </file>
 
-<file path=ppt/slides/slide5.xml><?xml version="1.0" encoding="utf-8"?>
+<file path=ppt/slides/slide6.xml><?xml version="1.0" encoding="utf-8"?>
 <p:sld xmlns:a="http://schemas.openxmlformats.org/drawingml/2006/main" xmlns:p="http://schemas.openxmlformats.org/presentationml/2006/main" xmlns:r="http://schemas.openxmlformats.org/officeDocument/2006/relationships">
   <p:cSld>
     <p:bg>
@@ -5691,7 +5527,7 @@
         </p:nvSpPr>
         <p:spPr>
           <a:xfrm>
-            <a:off x="457200" y="182880"/>
+            <a:off x="457200" y="274320"/>
             <a:ext cx="8229600" cy="457200"/>
           </a:xfrm>
           <a:prstGeom prst="rect">
@@ -5706,7 +5542,7 @@
           <a:lstStyle/>
           <a:p>
             <a:pPr algn="l">
-              <a:defRPr sz="2200" b="1">
+              <a:defRPr sz="2400" b="1">
                 <a:solidFill>
                   <a:srgbClr val="2D2D2D"/>
                 </a:solidFill>
@@ -5714,7 +5550,7 @@
               </a:defRPr>
             </a:pPr>
             <a:r>
-              <a:t>部署別 — 明日からできること</a:t>
+              <a:t>隣の人と話してみましょう</a:t>
             </a:r>
           </a:p>
         </p:txBody>
@@ -5727,8 +5563,8 @@
         </p:nvSpPr>
         <p:spPr>
           <a:xfrm>
-            <a:off x="457200" y="640080"/>
-            <a:ext cx="2286000" cy="54864"/>
+            <a:off x="457200" y="777240"/>
+            <a:ext cx="1828800" cy="54864"/>
           </a:xfrm>
           <a:prstGeom prst="rect">
             <a:avLst/>
@@ -5762,332 +5598,235 @@
           </a:p>
         </p:txBody>
       </p:sp>
-      <p:graphicFrame>
-        <p:nvGraphicFramePr>
-          <p:cNvPr id="4" name="Table 3"/>
-          <p:cNvGraphicFramePr>
-            <a:graphicFrameLocks noGrp="1"/>
-          </p:cNvGraphicFramePr>
-          <p:nvPr/>
-        </p:nvGraphicFramePr>
-        <p:xfrm>
-          <a:off x="274320" y="822960"/>
-          <a:ext cx="8595360" cy="2194560"/>
-        </p:xfrm>
-        <a:graphic>
-          <a:graphicData uri="http://schemas.openxmlformats.org/drawingml/2006/table">
-            <a:tbl>
-              <a:tblPr firstRow="1" bandRow="1">
-                <a:tableStyleId>{5C22544A-7EE6-4342-B048-85BDC9FD1C3A}</a:tableStyleId>
-              </a:tblPr>
-              <a:tblGrid>
-                <a:gridCol w="2560320"/>
-                <a:gridCol w="6035040"/>
-              </a:tblGrid>
-              <a:tr h="365760">
-                <a:tc>
-                  <a:txBody>
-                    <a:bodyPr/>
-                    <a:lstStyle/>
-                    <a:p>
-                      <a:pPr>
-                        <a:defRPr sz="1100" b="1">
-                          <a:solidFill>
-                            <a:srgbClr val="FFF8F0"/>
-                          </a:solidFill>
-                          <a:latin typeface="Calibri"/>
-                        </a:defRPr>
-                      </a:pPr>
-                      <a:r>
-                        <a:t>部署</a:t>
-                      </a:r>
-                    </a:p>
-                  </a:txBody>
-                  <a:tcPr marL="45720" marR="45720" marT="18288" marB="18288">
-                    <a:solidFill>
-                      <a:srgbClr val="3D6B5E"/>
-                    </a:solidFill>
-                  </a:tcPr>
-                </a:tc>
-                <a:tc>
-                  <a:txBody>
-                    <a:bodyPr/>
-                    <a:lstStyle/>
-                    <a:p>
-                      <a:pPr>
-                        <a:defRPr sz="1100" b="1">
-                          <a:solidFill>
-                            <a:srgbClr val="FFF8F0"/>
-                          </a:solidFill>
-                          <a:latin typeface="Calibri"/>
-                        </a:defRPr>
-                      </a:pPr>
-                      <a:r>
-                        <a:t>明日からのアクション</a:t>
-                      </a:r>
-                    </a:p>
-                  </a:txBody>
-                  <a:tcPr marL="45720" marR="45720" marT="18288" marB="18288">
-                    <a:solidFill>
-                      <a:srgbClr val="3D6B5E"/>
-                    </a:solidFill>
-                  </a:tcPr>
-                </a:tc>
-              </a:tr>
-              <a:tr h="365760">
-                <a:tc>
-                  <a:txBody>
-                    <a:bodyPr/>
-                    <a:lstStyle/>
-                    <a:p>
-                      <a:pPr>
-                        <a:defRPr sz="1100">
-                          <a:solidFill>
-                            <a:srgbClr val="2D2D2D"/>
-                          </a:solidFill>
-                          <a:latin typeface="Calibri"/>
-                        </a:defRPr>
-                      </a:pPr>
-                      <a:r>
-                        <a:t>受付・医事課</a:t>
-                      </a:r>
-                    </a:p>
-                  </a:txBody>
-                  <a:tcPr marL="45720" marR="45720" marT="18288" marB="18288">
-                    <a:solidFill>
-                      <a:srgbClr val="F0F7F2"/>
-                    </a:solidFill>
-                  </a:tcPr>
-                </a:tc>
-                <a:tc>
-                  <a:txBody>
-                    <a:bodyPr/>
-                    <a:lstStyle/>
-                    <a:p>
-                      <a:pPr>
-                        <a:defRPr sz="1100">
-                          <a:solidFill>
-                            <a:srgbClr val="2D2D2D"/>
-                          </a:solidFill>
-                          <a:latin typeface="Calibri"/>
-                        </a:defRPr>
-                      </a:pPr>
-                      <a:r>
-                        <a:t>マイナ保険証利用の積極的な声かけ、利用率の把握</a:t>
-                      </a:r>
-                    </a:p>
-                  </a:txBody>
-                  <a:tcPr marL="45720" marR="45720" marT="18288" marB="18288">
-                    <a:solidFill>
-                      <a:srgbClr val="F0F7F2"/>
-                    </a:solidFill>
-                  </a:tcPr>
-                </a:tc>
-              </a:tr>
-              <a:tr h="365760">
-                <a:tc>
-                  <a:txBody>
-                    <a:bodyPr/>
-                    <a:lstStyle/>
-                    <a:p>
-                      <a:pPr>
-                        <a:defRPr sz="1100">
-                          <a:solidFill>
-                            <a:srgbClr val="2D2D2D"/>
-                          </a:solidFill>
-                          <a:latin typeface="Calibri"/>
-                        </a:defRPr>
-                      </a:pPr>
-                      <a:r>
-                        <a:t>看護部</a:t>
-                      </a:r>
-                    </a:p>
-                  </a:txBody>
-                  <a:tcPr marL="45720" marR="45720" marT="18288" marB="18288">
-                    <a:solidFill>
-                      <a:srgbClr val="FFF8F0"/>
-                    </a:solidFill>
-                  </a:tcPr>
-                </a:tc>
-                <a:tc>
-                  <a:txBody>
-                    <a:bodyPr/>
-                    <a:lstStyle/>
-                    <a:p>
-                      <a:pPr>
-                        <a:defRPr sz="1100">
-                          <a:solidFill>
-                            <a:srgbClr val="2D2D2D"/>
-                          </a:solidFill>
-                          <a:latin typeface="Calibri"/>
-                        </a:defRPr>
-                      </a:pPr>
-                      <a:r>
-                        <a:t>BCP策定への参加、院内トリアージ体制の確認</a:t>
-                      </a:r>
-                    </a:p>
-                  </a:txBody>
-                  <a:tcPr marL="45720" marR="45720" marT="18288" marB="18288">
-                    <a:solidFill>
-                      <a:srgbClr val="FFF8F0"/>
-                    </a:solidFill>
-                  </a:tcPr>
-                </a:tc>
-              </a:tr>
-              <a:tr h="365760">
-                <a:tc>
-                  <a:txBody>
-                    <a:bodyPr/>
-                    <a:lstStyle/>
-                    <a:p>
-                      <a:pPr>
-                        <a:defRPr sz="1100">
-                          <a:solidFill>
-                            <a:srgbClr val="2D2D2D"/>
-                          </a:solidFill>
-                          <a:latin typeface="Calibri"/>
-                        </a:defRPr>
-                      </a:pPr>
-                      <a:r>
-                        <a:t>リハビリ・コメディカル</a:t>
-                      </a:r>
-                    </a:p>
-                  </a:txBody>
-                  <a:tcPr marL="45720" marR="45720" marT="18288" marB="18288">
-                    <a:solidFill>
-                      <a:srgbClr val="F0F7F2"/>
-                    </a:solidFill>
-                  </a:tcPr>
-                </a:tc>
-                <a:tc>
-                  <a:txBody>
-                    <a:bodyPr/>
-                    <a:lstStyle/>
-                    <a:p>
-                      <a:pPr>
-                        <a:defRPr sz="1100">
-                          <a:solidFill>
-                            <a:srgbClr val="2D2D2D"/>
-                          </a:solidFill>
-                          <a:latin typeface="Calibri"/>
-                        </a:defRPr>
-                      </a:pPr>
-                      <a:r>
-                        <a:t>地域包括ケア病棟の加算変更の把握、多職種連携の記録</a:t>
-                      </a:r>
-                    </a:p>
-                  </a:txBody>
-                  <a:tcPr marL="45720" marR="45720" marT="18288" marB="18288">
-                    <a:solidFill>
-                      <a:srgbClr val="F0F7F2"/>
-                    </a:solidFill>
-                  </a:tcPr>
-                </a:tc>
-              </a:tr>
-              <a:tr h="365760">
-                <a:tc>
-                  <a:txBody>
-                    <a:bodyPr/>
-                    <a:lstStyle/>
-                    <a:p>
-                      <a:pPr>
-                        <a:defRPr sz="1100">
-                          <a:solidFill>
-                            <a:srgbClr val="2D2D2D"/>
-                          </a:solidFill>
-                          <a:latin typeface="Calibri"/>
-                        </a:defRPr>
-                      </a:pPr>
-                      <a:r>
-                        <a:t>事務・総務</a:t>
-                      </a:r>
-                    </a:p>
-                  </a:txBody>
-                  <a:tcPr marL="45720" marR="45720" marT="18288" marB="18288">
-                    <a:solidFill>
-                      <a:srgbClr val="FFF8F0"/>
-                    </a:solidFill>
-                  </a:tcPr>
-                </a:tc>
-                <a:tc>
-                  <a:txBody>
-                    <a:bodyPr/>
-                    <a:lstStyle/>
-                    <a:p>
-                      <a:pPr>
-                        <a:defRPr sz="1100">
-                          <a:solidFill>
-                            <a:srgbClr val="2D2D2D"/>
-                          </a:solidFill>
-                          <a:latin typeface="Calibri"/>
-                        </a:defRPr>
-                      </a:pPr>
-                      <a:r>
-                        <a:t>BCP策定の全体調整、届出書類の準備、レセプトシステム更新</a:t>
-                      </a:r>
-                    </a:p>
-                  </a:txBody>
-                  <a:tcPr marL="45720" marR="45720" marT="18288" marB="18288">
-                    <a:solidFill>
-                      <a:srgbClr val="FFF8F0"/>
-                    </a:solidFill>
-                  </a:tcPr>
-                </a:tc>
-              </a:tr>
-              <a:tr h="365760">
-                <a:tc>
-                  <a:txBody>
-                    <a:bodyPr/>
-                    <a:lstStyle/>
-                    <a:p>
-                      <a:pPr>
-                        <a:defRPr sz="1100">
-                          <a:solidFill>
-                            <a:srgbClr val="2D2D2D"/>
-                          </a:solidFill>
-                          <a:latin typeface="Calibri"/>
-                        </a:defRPr>
-                      </a:pPr>
-                      <a:r>
-                        <a:t>医師</a:t>
-                      </a:r>
-                    </a:p>
-                  </a:txBody>
-                  <a:tcPr marL="45720" marR="45720" marT="18288" marB="18288">
-                    <a:solidFill>
-                      <a:srgbClr val="F0F7F2"/>
-                    </a:solidFill>
-                  </a:tcPr>
-                </a:tc>
-                <a:tc>
-                  <a:txBody>
-                    <a:bodyPr/>
-                    <a:lstStyle/>
-                    <a:p>
-                      <a:pPr>
-                        <a:defRPr sz="1100">
-                          <a:solidFill>
-                            <a:srgbClr val="2D2D2D"/>
-                          </a:solidFill>
-                          <a:latin typeface="Calibri"/>
-                        </a:defRPr>
-                      </a:pPr>
-                      <a:r>
-                        <a:t>生活習慣病管理での眼科・歯科連携、電子処方箋の発行推進</a:t>
-                      </a:r>
-                    </a:p>
-                  </a:txBody>
-                  <a:tcPr marL="45720" marR="45720" marT="18288" marB="18288">
-                    <a:solidFill>
-                      <a:srgbClr val="F0F7F2"/>
-                    </a:solidFill>
-                  </a:tcPr>
-                </a:tc>
-              </a:tr>
-            </a:tbl>
-          </a:graphicData>
-        </a:graphic>
-      </p:graphicFrame>
+      <p:sp>
+        <p:nvSpPr>
+          <p:cNvPr id="4" name="TextBox 3"/>
+          <p:cNvSpPr txBox="1"/>
+          <p:nvPr/>
+        </p:nvSpPr>
+        <p:spPr>
+          <a:xfrm>
+            <a:off x="3200400" y="1097280"/>
+            <a:ext cx="2743200" cy="457200"/>
+          </a:xfrm>
+          <a:prstGeom prst="rect">
+            <a:avLst/>
+          </a:prstGeom>
+          <a:noFill/>
+        </p:spPr>
+        <p:txBody>
+          <a:bodyPr wrap="square" lIns="45720" rIns="45720" tIns="27432" bIns="27432">
+            <a:spAutoFit/>
+          </a:bodyPr>
+          <a:lstStyle/>
+          <a:p>
+            <a:pPr algn="ctr">
+              <a:defRPr sz="2800" b="1">
+                <a:solidFill>
+                  <a:srgbClr val="E8A84C"/>
+                </a:solidFill>
+                <a:latin typeface="Calibri"/>
+              </a:defRPr>
+            </a:pPr>
+            <a:r>
+              <a:t>2分間</a:t>
+            </a:r>
+          </a:p>
+        </p:txBody>
+      </p:sp>
+      <p:sp>
+        <p:nvSpPr>
+          <p:cNvPr id="5" name="Rectangle 4"/>
+          <p:cNvSpPr/>
+          <p:nvPr/>
+        </p:nvSpPr>
+        <p:spPr>
+          <a:xfrm>
+            <a:off x="914400" y="1828800"/>
+            <a:ext cx="54864" cy="914400"/>
+          </a:xfrm>
+          <a:prstGeom prst="rect">
+            <a:avLst/>
+          </a:prstGeom>
+          <a:solidFill>
+            <a:srgbClr val="E8A84C"/>
+          </a:solidFill>
+          <a:ln>
+            <a:noFill/>
+          </a:ln>
+        </p:spPr>
+        <p:style>
+          <a:lnRef idx="1">
+            <a:schemeClr val="accent1"/>
+          </a:lnRef>
+          <a:fillRef idx="3">
+            <a:schemeClr val="accent1"/>
+          </a:fillRef>
+          <a:effectRef idx="2">
+            <a:schemeClr val="accent1"/>
+          </a:effectRef>
+          <a:fontRef idx="minor">
+            <a:schemeClr val="lt1"/>
+          </a:fontRef>
+        </p:style>
+        <p:txBody>
+          <a:bodyPr rtlCol="0" anchor="ctr"/>
+          <a:lstStyle/>
+          <a:p>
+            <a:pPr algn="ctr"/>
+          </a:p>
+        </p:txBody>
+      </p:sp>
+      <p:sp>
+        <p:nvSpPr>
+          <p:cNvPr id="6" name="Rectangle 5"/>
+          <p:cNvSpPr/>
+          <p:nvPr/>
+        </p:nvSpPr>
+        <p:spPr>
+          <a:xfrm>
+            <a:off x="1024128" y="1828800"/>
+            <a:ext cx="7205472" cy="914400"/>
+          </a:xfrm>
+          <a:prstGeom prst="rect">
+            <a:avLst/>
+          </a:prstGeom>
+          <a:solidFill>
+            <a:srgbClr val="FFFFFF"/>
+          </a:solidFill>
+          <a:ln w="12700">
+            <a:solidFill>
+              <a:srgbClr val="7DB89E"/>
+            </a:solidFill>
+          </a:ln>
+        </p:spPr>
+        <p:style>
+          <a:lnRef idx="1">
+            <a:schemeClr val="accent1"/>
+          </a:lnRef>
+          <a:fillRef idx="3">
+            <a:schemeClr val="accent1"/>
+          </a:fillRef>
+          <a:effectRef idx="2">
+            <a:schemeClr val="accent1"/>
+          </a:effectRef>
+          <a:fontRef idx="minor">
+            <a:schemeClr val="lt1"/>
+          </a:fontRef>
+        </p:style>
+        <p:txBody>
+          <a:bodyPr rtlCol="0" anchor="ctr"/>
+          <a:lstStyle/>
+          <a:p>
+            <a:pPr algn="ctr"/>
+          </a:p>
+        </p:txBody>
+      </p:sp>
+      <p:sp>
+        <p:nvSpPr>
+          <p:cNvPr id="7" name="TextBox 6"/>
+          <p:cNvSpPr txBox="1"/>
+          <p:nvPr/>
+        </p:nvSpPr>
+        <p:spPr>
+          <a:xfrm>
+            <a:off x="1143000" y="1901952"/>
+            <a:ext cx="6949440" cy="768096"/>
+          </a:xfrm>
+          <a:prstGeom prst="rect">
+            <a:avLst/>
+          </a:prstGeom>
+          <a:noFill/>
+        </p:spPr>
+        <p:txBody>
+          <a:bodyPr wrap="square" lIns="45720" rIns="45720" tIns="27432" bIns="27432">
+            <a:spAutoFit/>
+          </a:bodyPr>
+          <a:lstStyle/>
+          <a:p>
+            <a:pPr algn="l">
+              <a:defRPr sz="1600" b="0">
+                <a:solidFill>
+                  <a:srgbClr val="2D2D2D"/>
+                </a:solidFill>
+                <a:latin typeface="Georgia"/>
+              </a:defRPr>
+            </a:pPr>
+            <a:r>
+              <a:t>今日聞いた改定内容の中で、</a:t>
+            </a:r>
+            <a:br/>
+            <a:r>
+              <a:t>あなたの日常業務に一番影響がありそうなのは何ですか？</a:t>
+            </a:r>
+          </a:p>
+        </p:txBody>
+      </p:sp>
+      <p:sp>
+        <p:nvSpPr>
+          <p:cNvPr id="8" name="TextBox 7"/>
+          <p:cNvSpPr txBox="1"/>
+          <p:nvPr/>
+        </p:nvSpPr>
+        <p:spPr>
+          <a:xfrm>
+            <a:off x="1371600" y="3017520"/>
+            <a:ext cx="6400800" cy="1371600"/>
+          </a:xfrm>
+          <a:prstGeom prst="rect">
+            <a:avLst/>
+          </a:prstGeom>
+          <a:noFill/>
+        </p:spPr>
+        <p:txBody>
+          <a:bodyPr wrap="square" lIns="45720" rIns="45720" tIns="27432" bIns="27432">
+            <a:spAutoFit/>
+          </a:bodyPr>
+          <a:lstStyle/>
+          <a:p>
+            <a:pPr>
+              <a:defRPr sz="1300">
+                <a:solidFill>
+                  <a:srgbClr val="2D2D2D"/>
+                </a:solidFill>
+                <a:latin typeface="Calibri"/>
+              </a:defRPr>
+              <a:buChar char="●"/>
+            </a:pPr>
+            <a:r>
+              <a:t>「マイナ保険証の声かけを増やさないと…」</a:t>
+            </a:r>
+          </a:p>
+          <a:p>
+            <a:pPr>
+              <a:defRPr sz="1300">
+                <a:solidFill>
+                  <a:srgbClr val="2D2D2D"/>
+                </a:solidFill>
+                <a:latin typeface="Calibri"/>
+              </a:defRPr>
+              <a:buChar char="●"/>
+            </a:pPr>
+            <a:r>
+              <a:t>「BCPって、うちの部署ではどうなるんだろう？」</a:t>
+            </a:r>
+          </a:p>
+          <a:p>
+            <a:pPr>
+              <a:defRPr sz="1300">
+                <a:solidFill>
+                  <a:srgbClr val="2D2D2D"/>
+                </a:solidFill>
+                <a:latin typeface="Calibri"/>
+              </a:defRPr>
+              <a:buChar char="●"/>
+            </a:pPr>
+            <a:r>
+              <a:t>「ベースアップ評価料、給与にいつ反映される？」</a:t>
+            </a:r>
+          </a:p>
+        </p:txBody>
+      </p:sp>
     </p:spTree>
   </p:cSld>
   <p:clrMapOvr>
@@ -6096,7 +5835,7 @@
 </p:sld>
 </file>
 
-<file path=ppt/slides/slide6.xml><?xml version="1.0" encoding="utf-8"?>
+<file path=ppt/slides/slide7.xml><?xml version="1.0" encoding="utf-8"?>
 <p:sld xmlns:a="http://schemas.openxmlformats.org/drawingml/2006/main" xmlns:p="http://schemas.openxmlformats.org/presentationml/2006/main" xmlns:r="http://schemas.openxmlformats.org/officeDocument/2006/relationships">
   <p:cSld>
     <p:bg>
@@ -6122,7 +5861,7 @@
         </p:nvSpPr>
         <p:spPr>
           <a:xfrm>
-            <a:off x="457200" y="274320"/>
+            <a:off x="457200" y="182880"/>
             <a:ext cx="8229600" cy="457200"/>
           </a:xfrm>
           <a:prstGeom prst="rect">
@@ -6145,7 +5884,7 @@
               </a:defRPr>
             </a:pPr>
             <a:r>
-              <a:t>グループ対話</a:t>
+              <a:t>3つだけ覚えてください</a:t>
             </a:r>
           </a:p>
         </p:txBody>
@@ -6158,7 +5897,7 @@
         </p:nvSpPr>
         <p:spPr>
           <a:xfrm>
-            <a:off x="457200" y="777240"/>
+            <a:off x="457200" y="685800"/>
             <a:ext cx="1828800" cy="54864"/>
           </a:xfrm>
           <a:prstGeom prst="rect">
@@ -6195,50 +5934,14 @@
       </p:sp>
       <p:sp>
         <p:nvSpPr>
-          <p:cNvPr id="4" name="TextBox 3"/>
-          <p:cNvSpPr txBox="1"/>
-          <p:nvPr/>
-        </p:nvSpPr>
-        <p:spPr>
-          <a:xfrm>
-            <a:off x="457200" y="1097280"/>
-            <a:ext cx="8229600" cy="457200"/>
-          </a:xfrm>
-          <a:prstGeom prst="rect">
-            <a:avLst/>
-          </a:prstGeom>
-          <a:noFill/>
-        </p:spPr>
-        <p:txBody>
-          <a:bodyPr wrap="square" lIns="45720" rIns="45720" tIns="27432" bIns="27432">
-            <a:spAutoFit/>
-          </a:bodyPr>
-          <a:lstStyle/>
-          <a:p>
-            <a:pPr algn="ctr">
-              <a:defRPr sz="1800" b="0">
-                <a:solidFill>
-                  <a:srgbClr val="8A9E8C"/>
-                </a:solidFill>
-                <a:latin typeface="Calibri"/>
-              </a:defRPr>
-            </a:pPr>
-            <a:r>
-              <a:t>隣の人と話してみましょう（2分）</a:t>
-            </a:r>
-          </a:p>
-        </p:txBody>
-      </p:sp>
-      <p:sp>
-        <p:nvSpPr>
-          <p:cNvPr id="5" name="Rectangle 4"/>
+          <p:cNvPr id="4" name="Rectangle 3"/>
           <p:cNvSpPr/>
           <p:nvPr/>
         </p:nvSpPr>
         <p:spPr>
           <a:xfrm>
-            <a:off x="914400" y="1828800"/>
-            <a:ext cx="54864" cy="914400"/>
+            <a:off x="731520" y="1005840"/>
+            <a:ext cx="914400" cy="914400"/>
           </a:xfrm>
           <a:prstGeom prst="rect">
             <a:avLst/>
@@ -6274,14 +5977,479 @@
       </p:sp>
       <p:sp>
         <p:nvSpPr>
-          <p:cNvPr id="6" name="Rectangle 5"/>
+          <p:cNvPr id="5" name="TextBox 4"/>
+          <p:cNvSpPr txBox="1"/>
+          <p:nvPr/>
+        </p:nvSpPr>
+        <p:spPr>
+          <a:xfrm>
+            <a:off x="731520" y="1097280"/>
+            <a:ext cx="914400" cy="731520"/>
+          </a:xfrm>
+          <a:prstGeom prst="rect">
+            <a:avLst/>
+          </a:prstGeom>
+          <a:noFill/>
+        </p:spPr>
+        <p:txBody>
+          <a:bodyPr wrap="square" lIns="45720" rIns="45720" tIns="27432" bIns="27432">
+            <a:spAutoFit/>
+          </a:bodyPr>
+          <a:lstStyle/>
+          <a:p>
+            <a:pPr algn="ctr">
+              <a:defRPr sz="2800" b="1">
+                <a:solidFill>
+                  <a:srgbClr val="3D6B5E"/>
+                </a:solidFill>
+                <a:latin typeface="Calibri"/>
+              </a:defRPr>
+            </a:pPr>
+            <a:r>
+              <a:t>1</a:t>
+            </a:r>
+          </a:p>
+        </p:txBody>
+      </p:sp>
+      <p:sp>
+        <p:nvSpPr>
+          <p:cNvPr id="6" name="TextBox 5"/>
+          <p:cNvSpPr txBox="1"/>
+          <p:nvPr/>
+        </p:nvSpPr>
+        <p:spPr>
+          <a:xfrm>
+            <a:off x="1828800" y="1051560"/>
+            <a:ext cx="3657600" cy="365760"/>
+          </a:xfrm>
+          <a:prstGeom prst="rect">
+            <a:avLst/>
+          </a:prstGeom>
+          <a:noFill/>
+        </p:spPr>
+        <p:txBody>
+          <a:bodyPr wrap="square" lIns="45720" rIns="45720" tIns="27432" bIns="27432">
+            <a:spAutoFit/>
+          </a:bodyPr>
+          <a:lstStyle/>
+          <a:p>
+            <a:pPr algn="l">
+              <a:defRPr sz="1600" b="1">
+                <a:solidFill>
+                  <a:srgbClr val="FFF8F0"/>
+                </a:solidFill>
+                <a:latin typeface="Calibri"/>
+              </a:defRPr>
+            </a:pPr>
+            <a:r>
+              <a:t>賃上げ原資が大幅増</a:t>
+            </a:r>
+          </a:p>
+        </p:txBody>
+      </p:sp>
+      <p:sp>
+        <p:nvSpPr>
+          <p:cNvPr id="7" name="TextBox 6"/>
+          <p:cNvSpPr txBox="1"/>
+          <p:nvPr/>
+        </p:nvSpPr>
+        <p:spPr>
+          <a:xfrm>
+            <a:off x="1828800" y="1417320"/>
+            <a:ext cx="6858000" cy="457200"/>
+          </a:xfrm>
+          <a:prstGeom prst="rect">
+            <a:avLst/>
+          </a:prstGeom>
+          <a:noFill/>
+        </p:spPr>
+        <p:txBody>
+          <a:bodyPr wrap="square" lIns="45720" rIns="45720" tIns="27432" bIns="27432">
+            <a:spAutoFit/>
+          </a:bodyPr>
+          <a:lstStyle/>
+          <a:p>
+            <a:pPr algn="l">
+              <a:defRPr sz="1200" b="0">
+                <a:solidFill>
+                  <a:srgbClr val="FFF8F0"/>
+                </a:solidFill>
+                <a:latin typeface="Calibri"/>
+              </a:defRPr>
+            </a:pPr>
+            <a:r>
+              <a:t>ベースアップ評価料17点</a:t>
+            </a:r>
+            <a:br/>
+            <a:r>
+              <a:t>全職員が対象に</a:t>
+            </a:r>
+          </a:p>
+        </p:txBody>
+      </p:sp>
+      <p:sp>
+        <p:nvSpPr>
+          <p:cNvPr id="8" name="Rectangle 7"/>
           <p:cNvSpPr/>
           <p:nvPr/>
         </p:nvSpPr>
         <p:spPr>
           <a:xfrm>
-            <a:off x="1024128" y="1828800"/>
-            <a:ext cx="7205472" cy="914400"/>
+            <a:off x="731520" y="2194560"/>
+            <a:ext cx="914400" cy="914400"/>
+          </a:xfrm>
+          <a:prstGeom prst="rect">
+            <a:avLst/>
+          </a:prstGeom>
+          <a:solidFill>
+            <a:srgbClr val="E8A84C"/>
+          </a:solidFill>
+          <a:ln>
+            <a:noFill/>
+          </a:ln>
+        </p:spPr>
+        <p:style>
+          <a:lnRef idx="1">
+            <a:schemeClr val="accent1"/>
+          </a:lnRef>
+          <a:fillRef idx="3">
+            <a:schemeClr val="accent1"/>
+          </a:fillRef>
+          <a:effectRef idx="2">
+            <a:schemeClr val="accent1"/>
+          </a:effectRef>
+          <a:fontRef idx="minor">
+            <a:schemeClr val="lt1"/>
+          </a:fontRef>
+        </p:style>
+        <p:txBody>
+          <a:bodyPr rtlCol="0" anchor="ctr"/>
+          <a:lstStyle/>
+          <a:p>
+            <a:pPr algn="ctr"/>
+          </a:p>
+        </p:txBody>
+      </p:sp>
+      <p:sp>
+        <p:nvSpPr>
+          <p:cNvPr id="9" name="TextBox 8"/>
+          <p:cNvSpPr txBox="1"/>
+          <p:nvPr/>
+        </p:nvSpPr>
+        <p:spPr>
+          <a:xfrm>
+            <a:off x="731520" y="2286000"/>
+            <a:ext cx="914400" cy="731520"/>
+          </a:xfrm>
+          <a:prstGeom prst="rect">
+            <a:avLst/>
+          </a:prstGeom>
+          <a:noFill/>
+        </p:spPr>
+        <p:txBody>
+          <a:bodyPr wrap="square" lIns="45720" rIns="45720" tIns="27432" bIns="27432">
+            <a:spAutoFit/>
+          </a:bodyPr>
+          <a:lstStyle/>
+          <a:p>
+            <a:pPr algn="ctr">
+              <a:defRPr sz="2800" b="1">
+                <a:solidFill>
+                  <a:srgbClr val="3D6B5E"/>
+                </a:solidFill>
+                <a:latin typeface="Calibri"/>
+              </a:defRPr>
+            </a:pPr>
+            <a:r>
+              <a:t>2</a:t>
+            </a:r>
+          </a:p>
+        </p:txBody>
+      </p:sp>
+      <p:sp>
+        <p:nvSpPr>
+          <p:cNvPr id="10" name="TextBox 9"/>
+          <p:cNvSpPr txBox="1"/>
+          <p:nvPr/>
+        </p:nvSpPr>
+        <p:spPr>
+          <a:xfrm>
+            <a:off x="1828800" y="2240280"/>
+            <a:ext cx="3657600" cy="365760"/>
+          </a:xfrm>
+          <a:prstGeom prst="rect">
+            <a:avLst/>
+          </a:prstGeom>
+          <a:noFill/>
+        </p:spPr>
+        <p:txBody>
+          <a:bodyPr wrap="square" lIns="45720" rIns="45720" tIns="27432" bIns="27432">
+            <a:spAutoFit/>
+          </a:bodyPr>
+          <a:lstStyle/>
+          <a:p>
+            <a:pPr algn="l">
+              <a:defRPr sz="1600" b="1">
+                <a:solidFill>
+                  <a:srgbClr val="FFF8F0"/>
+                </a:solidFill>
+                <a:latin typeface="Calibri"/>
+              </a:defRPr>
+            </a:pPr>
+            <a:r>
+              <a:t>マイナ保険証 = 収入</a:t>
+            </a:r>
+          </a:p>
+        </p:txBody>
+      </p:sp>
+      <p:sp>
+        <p:nvSpPr>
+          <p:cNvPr id="11" name="TextBox 10"/>
+          <p:cNvSpPr txBox="1"/>
+          <p:nvPr/>
+        </p:nvSpPr>
+        <p:spPr>
+          <a:xfrm>
+            <a:off x="1828800" y="2606040"/>
+            <a:ext cx="6858000" cy="457200"/>
+          </a:xfrm>
+          <a:prstGeom prst="rect">
+            <a:avLst/>
+          </a:prstGeom>
+          <a:noFill/>
+        </p:spPr>
+        <p:txBody>
+          <a:bodyPr wrap="square" lIns="45720" rIns="45720" tIns="27432" bIns="27432">
+            <a:spAutoFit/>
+          </a:bodyPr>
+          <a:lstStyle/>
+          <a:p>
+            <a:pPr algn="l">
+              <a:defRPr sz="1200" b="0">
+                <a:solidFill>
+                  <a:srgbClr val="FFF8F0"/>
+                </a:solidFill>
+                <a:latin typeface="Calibri"/>
+              </a:defRPr>
+            </a:pPr>
+            <a:r>
+              <a:t>利用率30%で区分1（15点）</a:t>
+            </a:r>
+            <a:br/>
+            <a:r>
+              <a:t>窓口の声かけが鍵</a:t>
+            </a:r>
+          </a:p>
+        </p:txBody>
+      </p:sp>
+      <p:sp>
+        <p:nvSpPr>
+          <p:cNvPr id="12" name="Rectangle 11"/>
+          <p:cNvSpPr/>
+          <p:nvPr/>
+        </p:nvSpPr>
+        <p:spPr>
+          <a:xfrm>
+            <a:off x="731520" y="3383280"/>
+            <a:ext cx="914400" cy="914400"/>
+          </a:xfrm>
+          <a:prstGeom prst="rect">
+            <a:avLst/>
+          </a:prstGeom>
+          <a:solidFill>
+            <a:srgbClr val="E8A84C"/>
+          </a:solidFill>
+          <a:ln>
+            <a:noFill/>
+          </a:ln>
+        </p:spPr>
+        <p:style>
+          <a:lnRef idx="1">
+            <a:schemeClr val="accent1"/>
+          </a:lnRef>
+          <a:fillRef idx="3">
+            <a:schemeClr val="accent1"/>
+          </a:fillRef>
+          <a:effectRef idx="2">
+            <a:schemeClr val="accent1"/>
+          </a:effectRef>
+          <a:fontRef idx="minor">
+            <a:schemeClr val="lt1"/>
+          </a:fontRef>
+        </p:style>
+        <p:txBody>
+          <a:bodyPr rtlCol="0" anchor="ctr"/>
+          <a:lstStyle/>
+          <a:p>
+            <a:pPr algn="ctr"/>
+          </a:p>
+        </p:txBody>
+      </p:sp>
+      <p:sp>
+        <p:nvSpPr>
+          <p:cNvPr id="13" name="TextBox 12"/>
+          <p:cNvSpPr txBox="1"/>
+          <p:nvPr/>
+        </p:nvSpPr>
+        <p:spPr>
+          <a:xfrm>
+            <a:off x="731520" y="3474720"/>
+            <a:ext cx="914400" cy="731520"/>
+          </a:xfrm>
+          <a:prstGeom prst="rect">
+            <a:avLst/>
+          </a:prstGeom>
+          <a:noFill/>
+        </p:spPr>
+        <p:txBody>
+          <a:bodyPr wrap="square" lIns="45720" rIns="45720" tIns="27432" bIns="27432">
+            <a:spAutoFit/>
+          </a:bodyPr>
+          <a:lstStyle/>
+          <a:p>
+            <a:pPr algn="ctr">
+              <a:defRPr sz="2800" b="1">
+                <a:solidFill>
+                  <a:srgbClr val="3D6B5E"/>
+                </a:solidFill>
+                <a:latin typeface="Calibri"/>
+              </a:defRPr>
+            </a:pPr>
+            <a:r>
+              <a:t>3</a:t>
+            </a:r>
+          </a:p>
+        </p:txBody>
+      </p:sp>
+      <p:sp>
+        <p:nvSpPr>
+          <p:cNvPr id="14" name="TextBox 13"/>
+          <p:cNvSpPr txBox="1"/>
+          <p:nvPr/>
+        </p:nvSpPr>
+        <p:spPr>
+          <a:xfrm>
+            <a:off x="1828800" y="3429000"/>
+            <a:ext cx="3657600" cy="365760"/>
+          </a:xfrm>
+          <a:prstGeom prst="rect">
+            <a:avLst/>
+          </a:prstGeom>
+          <a:noFill/>
+        </p:spPr>
+        <p:txBody>
+          <a:bodyPr wrap="square" lIns="45720" rIns="45720" tIns="27432" bIns="27432">
+            <a:spAutoFit/>
+          </a:bodyPr>
+          <a:lstStyle/>
+          <a:p>
+            <a:pPr algn="l">
+              <a:defRPr sz="1600" b="1">
+                <a:solidFill>
+                  <a:srgbClr val="FFF8F0"/>
+                </a:solidFill>
+                <a:latin typeface="Calibri"/>
+              </a:defRPr>
+            </a:pPr>
+            <a:r>
+              <a:t>BCP策定に全員参加</a:t>
+            </a:r>
+          </a:p>
+        </p:txBody>
+      </p:sp>
+      <p:sp>
+        <p:nvSpPr>
+          <p:cNvPr id="15" name="TextBox 14"/>
+          <p:cNvSpPr txBox="1"/>
+          <p:nvPr/>
+        </p:nvSpPr>
+        <p:spPr>
+          <a:xfrm>
+            <a:off x="1828800" y="3794760"/>
+            <a:ext cx="6858000" cy="457200"/>
+          </a:xfrm>
+          <a:prstGeom prst="rect">
+            <a:avLst/>
+          </a:prstGeom>
+          <a:noFill/>
+        </p:spPr>
+        <p:txBody>
+          <a:bodyPr wrap="square" lIns="45720" rIns="45720" tIns="27432" bIns="27432">
+            <a:spAutoFit/>
+          </a:bodyPr>
+          <a:lstStyle/>
+          <a:p>
+            <a:pPr algn="l">
+              <a:defRPr sz="1200" b="0">
+                <a:solidFill>
+                  <a:srgbClr val="FFF8F0"/>
+                </a:solidFill>
+                <a:latin typeface="Calibri"/>
+              </a:defRPr>
+            </a:pPr>
+            <a:r>
+              <a:t>2027年5月末までに策定</a:t>
+            </a:r>
+            <a:br/>
+            <a:r>
+              <a:t>「あなたの役割」を確認</a:t>
+            </a:r>
+          </a:p>
+        </p:txBody>
+      </p:sp>
+      <p:sp>
+        <p:nvSpPr>
+          <p:cNvPr id="16" name="Rectangle 15"/>
+          <p:cNvSpPr/>
+          <p:nvPr/>
+        </p:nvSpPr>
+        <p:spPr>
+          <a:xfrm>
+            <a:off x="1371600" y="4572000"/>
+            <a:ext cx="54864" cy="365760"/>
+          </a:xfrm>
+          <a:prstGeom prst="rect">
+            <a:avLst/>
+          </a:prstGeom>
+          <a:solidFill>
+            <a:srgbClr val="E8A84C"/>
+          </a:solidFill>
+          <a:ln>
+            <a:noFill/>
+          </a:ln>
+        </p:spPr>
+        <p:style>
+          <a:lnRef idx="1">
+            <a:schemeClr val="accent1"/>
+          </a:lnRef>
+          <a:fillRef idx="3">
+            <a:schemeClr val="accent1"/>
+          </a:fillRef>
+          <a:effectRef idx="2">
+            <a:schemeClr val="accent1"/>
+          </a:effectRef>
+          <a:fontRef idx="minor">
+            <a:schemeClr val="lt1"/>
+          </a:fontRef>
+        </p:style>
+        <p:txBody>
+          <a:bodyPr rtlCol="0" anchor="ctr"/>
+          <a:lstStyle/>
+          <a:p>
+            <a:pPr algn="ctr"/>
+          </a:p>
+        </p:txBody>
+      </p:sp>
+      <p:sp>
+        <p:nvSpPr>
+          <p:cNvPr id="17" name="Rectangle 16"/>
+          <p:cNvSpPr/>
+          <p:nvPr/>
+        </p:nvSpPr>
+        <p:spPr>
+          <a:xfrm>
+            <a:off x="1481328" y="4572000"/>
+            <a:ext cx="6291072" cy="365760"/>
           </a:xfrm>
           <a:prstGeom prst="rect">
             <a:avLst/>
@@ -6319,14 +6487,14 @@
       </p:sp>
       <p:sp>
         <p:nvSpPr>
-          <p:cNvPr id="7" name="TextBox 6"/>
+          <p:cNvPr id="18" name="TextBox 17"/>
           <p:cNvSpPr txBox="1"/>
           <p:nvPr/>
         </p:nvSpPr>
         <p:spPr>
           <a:xfrm>
-            <a:off x="1143000" y="1901952"/>
-            <a:ext cx="6949440" cy="768096"/>
+            <a:off x="1600200" y="4645152"/>
+            <a:ext cx="6035040" cy="219456"/>
           </a:xfrm>
           <a:prstGeom prst="rect">
             <a:avLst/>
@@ -6340,7 +6508,7 @@
           <a:lstStyle/>
           <a:p>
             <a:pPr algn="l">
-              <a:defRPr sz="1600" b="0">
+              <a:defRPr sz="1400" b="0">
                 <a:solidFill>
                   <a:srgbClr val="2D2D2D"/>
                 </a:solidFill>
@@ -6348,972 +6516,7 @@
               </a:defRPr>
             </a:pPr>
             <a:r>
-              <a:t>今日聞いた改定内容の中で、あなたの日常業務に一番影響がありそうなのは何ですか？</a:t>
-            </a:r>
-          </a:p>
-        </p:txBody>
-      </p:sp>
-      <p:sp>
-        <p:nvSpPr>
-          <p:cNvPr id="8" name="TextBox 7"/>
-          <p:cNvSpPr txBox="1"/>
-          <p:nvPr/>
-        </p:nvSpPr>
-        <p:spPr>
-          <a:xfrm>
-            <a:off x="1371600" y="3017520"/>
-            <a:ext cx="6400800" cy="1371600"/>
-          </a:xfrm>
-          <a:prstGeom prst="rect">
-            <a:avLst/>
-          </a:prstGeom>
-          <a:noFill/>
-        </p:spPr>
-        <p:txBody>
-          <a:bodyPr wrap="square" lIns="45720" rIns="45720" tIns="27432" bIns="27432">
-            <a:spAutoFit/>
-          </a:bodyPr>
-          <a:lstStyle/>
-          <a:p>
-            <a:pPr>
-              <a:defRPr sz="1300">
-                <a:solidFill>
-                  <a:srgbClr val="FFF8F0"/>
-                </a:solidFill>
-                <a:latin typeface="Calibri"/>
-              </a:defRPr>
-              <a:buChar char="●"/>
-            </a:pPr>
-            <a:r>
-              <a:t>「受付でマイナ保険証の声かけを増やさないと…」</a:t>
-            </a:r>
-          </a:p>
-          <a:p>
-            <a:pPr>
-              <a:defRPr sz="1300">
-                <a:solidFill>
-                  <a:srgbClr val="FFF8F0"/>
-                </a:solidFill>
-                <a:latin typeface="Calibri"/>
-              </a:defRPr>
-              <a:buChar char="●"/>
-            </a:pPr>
-            <a:r>
-              <a:t>「BCPって、うちの部署ではどうなるんだろう？」</a:t>
-            </a:r>
-          </a:p>
-          <a:p>
-            <a:pPr>
-              <a:defRPr sz="1300">
-                <a:solidFill>
-                  <a:srgbClr val="FFF8F0"/>
-                </a:solidFill>
-                <a:latin typeface="Calibri"/>
-              </a:defRPr>
-              <a:buChar char="●"/>
-            </a:pPr>
-            <a:r>
-              <a:t>「ベースアップ評価料の拡大、給与にいつ反映？」</a:t>
-            </a:r>
-          </a:p>
-        </p:txBody>
-      </p:sp>
-    </p:spTree>
-  </p:cSld>
-  <p:clrMapOvr>
-    <a:masterClrMapping/>
-  </p:clrMapOvr>
-</p:sld>
-</file>
-
-<file path=ppt/slides/slide7.xml><?xml version="1.0" encoding="utf-8"?>
-<p:sld xmlns:a="http://schemas.openxmlformats.org/drawingml/2006/main" xmlns:p="http://schemas.openxmlformats.org/presentationml/2006/main" xmlns:r="http://schemas.openxmlformats.org/officeDocument/2006/relationships">
-  <p:cSld>
-    <p:bg>
-      <p:bgPr>
-        <a:solidFill>
-          <a:srgbClr val="FFF8F0"/>
-        </a:solidFill>
-        <a:effectLst/>
-      </p:bgPr>
-    </p:bg>
-    <p:spTree>
-      <p:nvGrpSpPr>
-        <p:cNvPr id="1" name=""/>
-        <p:cNvGrpSpPr/>
-        <p:nvPr/>
-      </p:nvGrpSpPr>
-      <p:grpSpPr/>
-      <p:sp>
-        <p:nvSpPr>
-          <p:cNvPr id="2" name="TextBox 1"/>
-          <p:cNvSpPr txBox="1"/>
-          <p:nvPr/>
-        </p:nvSpPr>
-        <p:spPr>
-          <a:xfrm>
-            <a:off x="457200" y="182880"/>
-            <a:ext cx="8229600" cy="457200"/>
-          </a:xfrm>
-          <a:prstGeom prst="rect">
-            <a:avLst/>
-          </a:prstGeom>
-          <a:noFill/>
-        </p:spPr>
-        <p:txBody>
-          <a:bodyPr wrap="square" lIns="45720" rIns="45720" tIns="27432" bIns="27432">
-            <a:spAutoFit/>
-          </a:bodyPr>
-          <a:lstStyle/>
-          <a:p>
-            <a:pPr algn="l">
-              <a:defRPr sz="2200" b="1">
-                <a:solidFill>
-                  <a:srgbClr val="2D2D2D"/>
-                </a:solidFill>
-                <a:latin typeface="Calibri"/>
-              </a:defRPr>
-            </a:pPr>
-            <a:r>
-              <a:t>まとめと次のアクション</a:t>
-            </a:r>
-          </a:p>
-        </p:txBody>
-      </p:sp>
-      <p:sp>
-        <p:nvSpPr>
-          <p:cNvPr id="3" name="Rectangle 2"/>
-          <p:cNvSpPr/>
-          <p:nvPr/>
-        </p:nvSpPr>
-        <p:spPr>
-          <a:xfrm>
-            <a:off x="457200" y="640080"/>
-            <a:ext cx="2286000" cy="54864"/>
-          </a:xfrm>
-          <a:prstGeom prst="rect">
-            <a:avLst/>
-          </a:prstGeom>
-          <a:solidFill>
-            <a:srgbClr val="E8A84C"/>
-          </a:solidFill>
-          <a:ln>
-            <a:noFill/>
-          </a:ln>
-        </p:spPr>
-        <p:style>
-          <a:lnRef idx="1">
-            <a:schemeClr val="accent1"/>
-          </a:lnRef>
-          <a:fillRef idx="3">
-            <a:schemeClr val="accent1"/>
-          </a:fillRef>
-          <a:effectRef idx="2">
-            <a:schemeClr val="accent1"/>
-          </a:effectRef>
-          <a:fontRef idx="minor">
-            <a:schemeClr val="lt1"/>
-          </a:fontRef>
-        </p:style>
-        <p:txBody>
-          <a:bodyPr rtlCol="0" anchor="ctr"/>
-          <a:lstStyle/>
-          <a:p>
-            <a:pPr algn="ctr"/>
-          </a:p>
-        </p:txBody>
-      </p:sp>
-      <p:sp>
-        <p:nvSpPr>
-          <p:cNvPr id="4" name="TextBox 3"/>
-          <p:cNvSpPr txBox="1"/>
-          <p:nvPr/>
-        </p:nvSpPr>
-        <p:spPr>
-          <a:xfrm>
-            <a:off x="457200" y="822960"/>
-            <a:ext cx="8229600" cy="274320"/>
-          </a:xfrm>
-          <a:prstGeom prst="rect">
-            <a:avLst/>
-          </a:prstGeom>
-          <a:noFill/>
-        </p:spPr>
-        <p:txBody>
-          <a:bodyPr wrap="square" lIns="45720" rIns="45720" tIns="27432" bIns="27432">
-            <a:spAutoFit/>
-          </a:bodyPr>
-          <a:lstStyle/>
-          <a:p>
-            <a:pPr algn="l">
-              <a:defRPr sz="1400" b="0">
-                <a:solidFill>
-                  <a:srgbClr val="8A9E8C"/>
-                </a:solidFill>
-                <a:latin typeface="Calibri"/>
-              </a:defRPr>
-            </a:pPr>
-            <a:r>
-              <a:t>3つだけ覚えてください</a:t>
-            </a:r>
-          </a:p>
-        </p:txBody>
-      </p:sp>
-      <p:graphicFrame>
-        <p:nvGraphicFramePr>
-          <p:cNvPr id="5" name="Table 4"/>
-          <p:cNvGraphicFramePr>
-            <a:graphicFrameLocks noGrp="1"/>
-          </p:cNvGraphicFramePr>
-          <p:nvPr/>
-        </p:nvGraphicFramePr>
-        <p:xfrm>
-          <a:off x="274320" y="1188720"/>
-          <a:ext cx="8595360" cy="1389888"/>
-        </p:xfrm>
-        <a:graphic>
-          <a:graphicData uri="http://schemas.openxmlformats.org/drawingml/2006/table">
-            <a:tbl>
-              <a:tblPr firstRow="1" bandRow="1">
-                <a:tableStyleId>{5C22544A-7EE6-4342-B048-85BDC9FD1C3A}</a:tableStyleId>
-              </a:tblPr>
-              <a:tblGrid>
-                <a:gridCol w="457200"/>
-                <a:gridCol w="3200400"/>
-                <a:gridCol w="4937760"/>
-              </a:tblGrid>
-              <a:tr h="347472">
-                <a:tc>
-                  <a:txBody>
-                    <a:bodyPr/>
-                    <a:lstStyle/>
-                    <a:p>
-                      <a:pPr>
-                        <a:defRPr sz="1100" b="1">
-                          <a:solidFill>
-                            <a:srgbClr val="FFF8F0"/>
-                          </a:solidFill>
-                          <a:latin typeface="Calibri"/>
-                        </a:defRPr>
-                      </a:pPr>
-                      <a:r>
-                        <a:t>#</a:t>
-                      </a:r>
-                    </a:p>
-                  </a:txBody>
-                  <a:tcPr marL="45720" marR="45720" marT="18288" marB="18288">
-                    <a:solidFill>
-                      <a:srgbClr val="3D6B5E"/>
-                    </a:solidFill>
-                  </a:tcPr>
-                </a:tc>
-                <a:tc>
-                  <a:txBody>
-                    <a:bodyPr/>
-                    <a:lstStyle/>
-                    <a:p>
-                      <a:pPr>
-                        <a:defRPr sz="1100" b="1">
-                          <a:solidFill>
-                            <a:srgbClr val="FFF8F0"/>
-                          </a:solidFill>
-                          <a:latin typeface="Calibri"/>
-                        </a:defRPr>
-                      </a:pPr>
-                      <a:r>
-                        <a:t>ポイント</a:t>
-                      </a:r>
-                    </a:p>
-                  </a:txBody>
-                  <a:tcPr marL="45720" marR="45720" marT="18288" marB="18288">
-                    <a:solidFill>
-                      <a:srgbClr val="3D6B5E"/>
-                    </a:solidFill>
-                  </a:tcPr>
-                </a:tc>
-                <a:tc>
-                  <a:txBody>
-                    <a:bodyPr/>
-                    <a:lstStyle/>
-                    <a:p>
-                      <a:pPr>
-                        <a:defRPr sz="1100" b="1">
-                          <a:solidFill>
-                            <a:srgbClr val="FFF8F0"/>
-                          </a:solidFill>
-                          <a:latin typeface="Calibri"/>
-                        </a:defRPr>
-                      </a:pPr>
-                      <a:r>
-                        <a:t>キーワード</a:t>
-                      </a:r>
-                    </a:p>
-                  </a:txBody>
-                  <a:tcPr marL="45720" marR="45720" marT="18288" marB="18288">
-                    <a:solidFill>
-                      <a:srgbClr val="3D6B5E"/>
-                    </a:solidFill>
-                  </a:tcPr>
-                </a:tc>
-              </a:tr>
-              <a:tr h="347472">
-                <a:tc>
-                  <a:txBody>
-                    <a:bodyPr/>
-                    <a:lstStyle/>
-                    <a:p>
-                      <a:pPr>
-                        <a:defRPr sz="1100">
-                          <a:solidFill>
-                            <a:srgbClr val="2D2D2D"/>
-                          </a:solidFill>
-                          <a:latin typeface="Calibri"/>
-                        </a:defRPr>
-                      </a:pPr>
-                      <a:r>
-                        <a:t>1</a:t>
-                      </a:r>
-                    </a:p>
-                  </a:txBody>
-                  <a:tcPr marL="45720" marR="45720" marT="18288" marB="18288">
-                    <a:solidFill>
-                      <a:srgbClr val="F0F7F2"/>
-                    </a:solidFill>
-                  </a:tcPr>
-                </a:tc>
-                <a:tc>
-                  <a:txBody>
-                    <a:bodyPr/>
-                    <a:lstStyle/>
-                    <a:p>
-                      <a:pPr>
-                        <a:defRPr sz="1100">
-                          <a:solidFill>
-                            <a:srgbClr val="2D2D2D"/>
-                          </a:solidFill>
-                          <a:latin typeface="Calibri"/>
-                        </a:defRPr>
-                      </a:pPr>
-                      <a:r>
-                        <a:t>賃上げ原資が大幅増</a:t>
-                      </a:r>
-                    </a:p>
-                  </a:txBody>
-                  <a:tcPr marL="45720" marR="45720" marT="18288" marB="18288">
-                    <a:solidFill>
-                      <a:srgbClr val="F0F7F2"/>
-                    </a:solidFill>
-                  </a:tcPr>
-                </a:tc>
-                <a:tc>
-                  <a:txBody>
-                    <a:bodyPr/>
-                    <a:lstStyle/>
-                    <a:p>
-                      <a:pPr>
-                        <a:defRPr sz="1100">
-                          <a:solidFill>
-                            <a:srgbClr val="2D2D2D"/>
-                          </a:solidFill>
-                          <a:latin typeface="Calibri"/>
-                        </a:defRPr>
-                      </a:pPr>
-                      <a:r>
-                        <a:t>ベースアップ評価料17点、全職員対象</a:t>
-                      </a:r>
-                    </a:p>
-                  </a:txBody>
-                  <a:tcPr marL="45720" marR="45720" marT="18288" marB="18288">
-                    <a:solidFill>
-                      <a:srgbClr val="F0F7F2"/>
-                    </a:solidFill>
-                  </a:tcPr>
-                </a:tc>
-              </a:tr>
-              <a:tr h="347472">
-                <a:tc>
-                  <a:txBody>
-                    <a:bodyPr/>
-                    <a:lstStyle/>
-                    <a:p>
-                      <a:pPr>
-                        <a:defRPr sz="1100">
-                          <a:solidFill>
-                            <a:srgbClr val="2D2D2D"/>
-                          </a:solidFill>
-                          <a:latin typeface="Calibri"/>
-                        </a:defRPr>
-                      </a:pPr>
-                      <a:r>
-                        <a:t>2</a:t>
-                      </a:r>
-                    </a:p>
-                  </a:txBody>
-                  <a:tcPr marL="45720" marR="45720" marT="18288" marB="18288">
-                    <a:solidFill>
-                      <a:srgbClr val="FFF8F0"/>
-                    </a:solidFill>
-                  </a:tcPr>
-                </a:tc>
-                <a:tc>
-                  <a:txBody>
-                    <a:bodyPr/>
-                    <a:lstStyle/>
-                    <a:p>
-                      <a:pPr>
-                        <a:defRPr sz="1100">
-                          <a:solidFill>
-                            <a:srgbClr val="2D2D2D"/>
-                          </a:solidFill>
-                          <a:latin typeface="Calibri"/>
-                        </a:defRPr>
-                      </a:pPr>
-                      <a:r>
-                        <a:t>マイナ保険証の声かけが収入直結</a:t>
-                      </a:r>
-                    </a:p>
-                  </a:txBody>
-                  <a:tcPr marL="45720" marR="45720" marT="18288" marB="18288">
-                    <a:solidFill>
-                      <a:srgbClr val="FFF8F0"/>
-                    </a:solidFill>
-                  </a:tcPr>
-                </a:tc>
-                <a:tc>
-                  <a:txBody>
-                    <a:bodyPr/>
-                    <a:lstStyle/>
-                    <a:p>
-                      <a:pPr>
-                        <a:defRPr sz="1100">
-                          <a:solidFill>
-                            <a:srgbClr val="2D2D2D"/>
-                          </a:solidFill>
-                          <a:latin typeface="Calibri"/>
-                        </a:defRPr>
-                      </a:pPr>
-                      <a:r>
-                        <a:t>利用率30%で区分1（15点）</a:t>
-                      </a:r>
-                    </a:p>
-                  </a:txBody>
-                  <a:tcPr marL="45720" marR="45720" marT="18288" marB="18288">
-                    <a:solidFill>
-                      <a:srgbClr val="FFF8F0"/>
-                    </a:solidFill>
-                  </a:tcPr>
-                </a:tc>
-              </a:tr>
-              <a:tr h="347472">
-                <a:tc>
-                  <a:txBody>
-                    <a:bodyPr/>
-                    <a:lstStyle/>
-                    <a:p>
-                      <a:pPr>
-                        <a:defRPr sz="1100">
-                          <a:solidFill>
-                            <a:srgbClr val="2D2D2D"/>
-                          </a:solidFill>
-                          <a:latin typeface="Calibri"/>
-                        </a:defRPr>
-                      </a:pPr>
-                      <a:r>
-                        <a:t>3</a:t>
-                      </a:r>
-                    </a:p>
-                  </a:txBody>
-                  <a:tcPr marL="45720" marR="45720" marT="18288" marB="18288">
-                    <a:solidFill>
-                      <a:srgbClr val="F0F7F2"/>
-                    </a:solidFill>
-                  </a:tcPr>
-                </a:tc>
-                <a:tc>
-                  <a:txBody>
-                    <a:bodyPr/>
-                    <a:lstStyle/>
-                    <a:p>
-                      <a:pPr>
-                        <a:defRPr sz="1100">
-                          <a:solidFill>
-                            <a:srgbClr val="2D2D2D"/>
-                          </a:solidFill>
-                          <a:latin typeface="Calibri"/>
-                        </a:defRPr>
-                      </a:pPr>
-                      <a:r>
-                        <a:t>BCP策定に全員参加</a:t>
-                      </a:r>
-                    </a:p>
-                  </a:txBody>
-                  <a:tcPr marL="45720" marR="45720" marT="18288" marB="18288">
-                    <a:solidFill>
-                      <a:srgbClr val="F0F7F2"/>
-                    </a:solidFill>
-                  </a:tcPr>
-                </a:tc>
-                <a:tc>
-                  <a:txBody>
-                    <a:bodyPr/>
-                    <a:lstStyle/>
-                    <a:p>
-                      <a:pPr>
-                        <a:defRPr sz="1100">
-                          <a:solidFill>
-                            <a:srgbClr val="2D2D2D"/>
-                          </a:solidFill>
-                          <a:latin typeface="Calibri"/>
-                        </a:defRPr>
-                      </a:pPr>
-                      <a:r>
-                        <a:t>2027年5月末までに策定</a:t>
-                      </a:r>
-                    </a:p>
-                  </a:txBody>
-                  <a:tcPr marL="45720" marR="45720" marT="18288" marB="18288">
-                    <a:solidFill>
-                      <a:srgbClr val="F0F7F2"/>
-                    </a:solidFill>
-                  </a:tcPr>
-                </a:tc>
-              </a:tr>
-            </a:tbl>
-          </a:graphicData>
-        </a:graphic>
-      </p:graphicFrame>
-      <p:sp>
-        <p:nvSpPr>
-          <p:cNvPr id="6" name="TextBox 5"/>
-          <p:cNvSpPr txBox="1"/>
-          <p:nvPr/>
-        </p:nvSpPr>
-        <p:spPr>
-          <a:xfrm>
-            <a:off x="457200" y="2926080"/>
-            <a:ext cx="8229600" cy="274320"/>
-          </a:xfrm>
-          <a:prstGeom prst="rect">
-            <a:avLst/>
-          </a:prstGeom>
-          <a:noFill/>
-        </p:spPr>
-        <p:txBody>
-          <a:bodyPr wrap="square" lIns="45720" rIns="45720" tIns="27432" bIns="27432">
-            <a:spAutoFit/>
-          </a:bodyPr>
-          <a:lstStyle/>
-          <a:p>
-            <a:pPr algn="l">
-              <a:defRPr sz="1400" b="1">
-                <a:solidFill>
-                  <a:srgbClr val="E8A84C"/>
-                </a:solidFill>
-                <a:latin typeface="Calibri"/>
-              </a:defRPr>
-            </a:pPr>
-            <a:r>
-              <a:t>スケジュール</a:t>
-            </a:r>
-          </a:p>
-        </p:txBody>
-      </p:sp>
-      <p:graphicFrame>
-        <p:nvGraphicFramePr>
-          <p:cNvPr id="7" name="Table 6"/>
-          <p:cNvGraphicFramePr>
-            <a:graphicFrameLocks noGrp="1"/>
-          </p:cNvGraphicFramePr>
-          <p:nvPr/>
-        </p:nvGraphicFramePr>
-        <p:xfrm>
-          <a:off x="274320" y="3291840"/>
-          <a:ext cx="8595360" cy="1371600"/>
-        </p:xfrm>
-        <a:graphic>
-          <a:graphicData uri="http://schemas.openxmlformats.org/drawingml/2006/table">
-            <a:tbl>
-              <a:tblPr firstRow="1" bandRow="1">
-                <a:tableStyleId>{5C22544A-7EE6-4342-B048-85BDC9FD1C3A}</a:tableStyleId>
-              </a:tblPr>
-              <a:tblGrid>
-                <a:gridCol w="1828800"/>
-                <a:gridCol w="6766560"/>
-              </a:tblGrid>
-              <a:tr h="274320">
-                <a:tc>
-                  <a:txBody>
-                    <a:bodyPr/>
-                    <a:lstStyle/>
-                    <a:p>
-                      <a:pPr>
-                        <a:defRPr sz="1000" b="1">
-                          <a:solidFill>
-                            <a:srgbClr val="FFF8F0"/>
-                          </a:solidFill>
-                          <a:latin typeface="Calibri"/>
-                        </a:defRPr>
-                      </a:pPr>
-                      <a:r>
-                        <a:t>時期</a:t>
-                      </a:r>
-                    </a:p>
-                  </a:txBody>
-                  <a:tcPr marL="45720" marR="45720" marT="18288" marB="18288">
-                    <a:solidFill>
-                      <a:srgbClr val="3D6B5E"/>
-                    </a:solidFill>
-                  </a:tcPr>
-                </a:tc>
-                <a:tc>
-                  <a:txBody>
-                    <a:bodyPr/>
-                    <a:lstStyle/>
-                    <a:p>
-                      <a:pPr>
-                        <a:defRPr sz="1000" b="1">
-                          <a:solidFill>
-                            <a:srgbClr val="FFF8F0"/>
-                          </a:solidFill>
-                          <a:latin typeface="Calibri"/>
-                        </a:defRPr>
-                      </a:pPr>
-                      <a:r>
-                        <a:t>やること</a:t>
-                      </a:r>
-                    </a:p>
-                  </a:txBody>
-                  <a:tcPr marL="45720" marR="45720" marT="18288" marB="18288">
-                    <a:solidFill>
-                      <a:srgbClr val="3D6B5E"/>
-                    </a:solidFill>
-                  </a:tcPr>
-                </a:tc>
-              </a:tr>
-              <a:tr h="274320">
-                <a:tc>
-                  <a:txBody>
-                    <a:bodyPr/>
-                    <a:lstStyle/>
-                    <a:p>
-                      <a:pPr>
-                        <a:defRPr sz="1000">
-                          <a:solidFill>
-                            <a:srgbClr val="2D2D2D"/>
-                          </a:solidFill>
-                          <a:latin typeface="Calibri"/>
-                        </a:defRPr>
-                      </a:pPr>
-                      <a:r>
-                        <a:t>今日</a:t>
-                      </a:r>
-                    </a:p>
-                  </a:txBody>
-                  <a:tcPr marL="45720" marR="45720" marT="18288" marB="18288">
-                    <a:solidFill>
-                      <a:srgbClr val="F0F7F2"/>
-                    </a:solidFill>
-                  </a:tcPr>
-                </a:tc>
-                <a:tc>
-                  <a:txBody>
-                    <a:bodyPr/>
-                    <a:lstStyle/>
-                    <a:p>
-                      <a:pPr>
-                        <a:defRPr sz="1000">
-                          <a:solidFill>
-                            <a:srgbClr val="2D2D2D"/>
-                          </a:solidFill>
-                          <a:latin typeface="Calibri"/>
-                        </a:defRPr>
-                      </a:pPr>
-                      <a:r>
-                        <a:t>BCPに関して自部署の状況確認</a:t>
-                      </a:r>
-                    </a:p>
-                  </a:txBody>
-                  <a:tcPr marL="45720" marR="45720" marT="18288" marB="18288">
-                    <a:solidFill>
-                      <a:srgbClr val="F0F7F2"/>
-                    </a:solidFill>
-                  </a:tcPr>
-                </a:tc>
-              </a:tr>
-              <a:tr h="274320">
-                <a:tc>
-                  <a:txBody>
-                    <a:bodyPr/>
-                    <a:lstStyle/>
-                    <a:p>
-                      <a:pPr>
-                        <a:defRPr sz="1000">
-                          <a:solidFill>
-                            <a:srgbClr val="2D2D2D"/>
-                          </a:solidFill>
-                          <a:latin typeface="Calibri"/>
-                        </a:defRPr>
-                      </a:pPr>
-                      <a:r>
-                        <a:t>今月中</a:t>
-                      </a:r>
-                    </a:p>
-                  </a:txBody>
-                  <a:tcPr marL="45720" marR="45720" marT="18288" marB="18288">
-                    <a:solidFill>
-                      <a:srgbClr val="FFF8F0"/>
-                    </a:solidFill>
-                  </a:tcPr>
-                </a:tc>
-                <a:tc>
-                  <a:txBody>
-                    <a:bodyPr/>
-                    <a:lstStyle/>
-                    <a:p>
-                      <a:pPr>
-                        <a:defRPr sz="1000">
-                          <a:solidFill>
-                            <a:srgbClr val="2D2D2D"/>
-                          </a:solidFill>
-                          <a:latin typeface="Calibri"/>
-                        </a:defRPr>
-                      </a:pPr>
-                      <a:r>
-                        <a:t>マイナ保険証の案内方法を見直す</a:t>
-                      </a:r>
-                    </a:p>
-                  </a:txBody>
-                  <a:tcPr marL="45720" marR="45720" marT="18288" marB="18288">
-                    <a:solidFill>
-                      <a:srgbClr val="FFF8F0"/>
-                    </a:solidFill>
-                  </a:tcPr>
-                </a:tc>
-              </a:tr>
-              <a:tr h="274320">
-                <a:tc>
-                  <a:txBody>
-                    <a:bodyPr/>
-                    <a:lstStyle/>
-                    <a:p>
-                      <a:pPr>
-                        <a:defRPr sz="1000">
-                          <a:solidFill>
-                            <a:srgbClr val="2D2D2D"/>
-                          </a:solidFill>
-                          <a:latin typeface="Calibri"/>
-                        </a:defRPr>
-                      </a:pPr>
-                      <a:r>
-                        <a:t>2026年6月</a:t>
-                      </a:r>
-                    </a:p>
-                  </a:txBody>
-                  <a:tcPr marL="45720" marR="45720" marT="18288" marB="18288">
-                    <a:solidFill>
-                      <a:srgbClr val="F0F7F2"/>
-                    </a:solidFill>
-                  </a:tcPr>
-                </a:tc>
-                <a:tc>
-                  <a:txBody>
-                    <a:bodyPr/>
-                    <a:lstStyle/>
-                    <a:p>
-                      <a:pPr>
-                        <a:defRPr sz="1000">
-                          <a:solidFill>
-                            <a:srgbClr val="2D2D2D"/>
-                          </a:solidFill>
-                          <a:latin typeface="Calibri"/>
-                        </a:defRPr>
-                      </a:pPr>
-                      <a:r>
-                        <a:t>改定施行 — 新しい運用開始</a:t>
-                      </a:r>
-                    </a:p>
-                  </a:txBody>
-                  <a:tcPr marL="45720" marR="45720" marT="18288" marB="18288">
-                    <a:solidFill>
-                      <a:srgbClr val="F0F7F2"/>
-                    </a:solidFill>
-                  </a:tcPr>
-                </a:tc>
-              </a:tr>
-              <a:tr h="274320">
-                <a:tc>
-                  <a:txBody>
-                    <a:bodyPr/>
-                    <a:lstStyle/>
-                    <a:p>
-                      <a:pPr>
-                        <a:defRPr sz="1000">
-                          <a:solidFill>
-                            <a:srgbClr val="2D2D2D"/>
-                          </a:solidFill>
-                          <a:latin typeface="Calibri"/>
-                        </a:defRPr>
-                      </a:pPr>
-                      <a:r>
-                        <a:t>2027年5月末</a:t>
-                      </a:r>
-                    </a:p>
-                  </a:txBody>
-                  <a:tcPr marL="45720" marR="45720" marT="18288" marB="18288">
-                    <a:solidFill>
-                      <a:srgbClr val="FFF8F0"/>
-                    </a:solidFill>
-                  </a:tcPr>
-                </a:tc>
-                <a:tc>
-                  <a:txBody>
-                    <a:bodyPr/>
-                    <a:lstStyle/>
-                    <a:p>
-                      <a:pPr>
-                        <a:defRPr sz="1000">
-                          <a:solidFill>
-                            <a:srgbClr val="2D2D2D"/>
-                          </a:solidFill>
-                          <a:latin typeface="Calibri"/>
-                        </a:defRPr>
-                      </a:pPr>
-                      <a:r>
-                        <a:t>BCP策定の経過措置期限</a:t>
-                      </a:r>
-                    </a:p>
-                  </a:txBody>
-                  <a:tcPr marL="45720" marR="45720" marT="18288" marB="18288">
-                    <a:solidFill>
-                      <a:srgbClr val="FFF8F0"/>
-                    </a:solidFill>
-                  </a:tcPr>
-                </a:tc>
-              </a:tr>
-            </a:tbl>
-          </a:graphicData>
-        </a:graphic>
-      </p:graphicFrame>
-      <p:sp>
-        <p:nvSpPr>
-          <p:cNvPr id="8" name="Rectangle 7"/>
-          <p:cNvSpPr/>
-          <p:nvPr/>
-        </p:nvSpPr>
-        <p:spPr>
-          <a:xfrm>
-            <a:off x="1828800" y="4572000"/>
-            <a:ext cx="54864" cy="411480"/>
-          </a:xfrm>
-          <a:prstGeom prst="rect">
-            <a:avLst/>
-          </a:prstGeom>
-          <a:solidFill>
-            <a:srgbClr val="E8A84C"/>
-          </a:solidFill>
-          <a:ln>
-            <a:noFill/>
-          </a:ln>
-        </p:spPr>
-        <p:style>
-          <a:lnRef idx="1">
-            <a:schemeClr val="accent1"/>
-          </a:lnRef>
-          <a:fillRef idx="3">
-            <a:schemeClr val="accent1"/>
-          </a:fillRef>
-          <a:effectRef idx="2">
-            <a:schemeClr val="accent1"/>
-          </a:effectRef>
-          <a:fontRef idx="minor">
-            <a:schemeClr val="lt1"/>
-          </a:fontRef>
-        </p:style>
-        <p:txBody>
-          <a:bodyPr rtlCol="0" anchor="ctr"/>
-          <a:lstStyle/>
-          <a:p>
-            <a:pPr algn="ctr"/>
-          </a:p>
-        </p:txBody>
-      </p:sp>
-      <p:sp>
-        <p:nvSpPr>
-          <p:cNvPr id="9" name="Rectangle 8"/>
-          <p:cNvSpPr/>
-          <p:nvPr/>
-        </p:nvSpPr>
-        <p:spPr>
-          <a:xfrm>
-            <a:off x="1938528" y="4572000"/>
-            <a:ext cx="5376672" cy="411480"/>
-          </a:xfrm>
-          <a:prstGeom prst="rect">
-            <a:avLst/>
-          </a:prstGeom>
-          <a:solidFill>
-            <a:srgbClr val="FFFFFF"/>
-          </a:solidFill>
-          <a:ln w="12700">
-            <a:solidFill>
-              <a:srgbClr val="7DB89E"/>
-            </a:solidFill>
-          </a:ln>
-        </p:spPr>
-        <p:style>
-          <a:lnRef idx="1">
-            <a:schemeClr val="accent1"/>
-          </a:lnRef>
-          <a:fillRef idx="3">
-            <a:schemeClr val="accent1"/>
-          </a:fillRef>
-          <a:effectRef idx="2">
-            <a:schemeClr val="accent1"/>
-          </a:effectRef>
-          <a:fontRef idx="minor">
-            <a:schemeClr val="lt1"/>
-          </a:fontRef>
-        </p:style>
-        <p:txBody>
-          <a:bodyPr rtlCol="0" anchor="ctr"/>
-          <a:lstStyle/>
-          <a:p>
-            <a:pPr algn="ctr"/>
-          </a:p>
-        </p:txBody>
-      </p:sp>
-      <p:sp>
-        <p:nvSpPr>
-          <p:cNvPr id="10" name="TextBox 9"/>
-          <p:cNvSpPr txBox="1"/>
-          <p:nvPr/>
-        </p:nvSpPr>
-        <p:spPr>
-          <a:xfrm>
-            <a:off x="2057400" y="4645152"/>
-            <a:ext cx="5120640" cy="265176"/>
-          </a:xfrm>
-          <a:prstGeom prst="rect">
-            <a:avLst/>
-          </a:prstGeom>
-          <a:noFill/>
-        </p:spPr>
-        <p:txBody>
-          <a:bodyPr wrap="square" lIns="45720" rIns="45720" tIns="27432" bIns="27432">
-            <a:spAutoFit/>
-          </a:bodyPr>
-          <a:lstStyle/>
-          <a:p>
-            <a:pPr algn="l">
-              <a:defRPr sz="1400" b="0">
-                <a:solidFill>
-                  <a:srgbClr val="2D2D2D"/>
-                </a:solidFill>
-                <a:latin typeface="Georgia"/>
-              </a:defRPr>
-            </a:pPr>
-            <a:r>
-              <a:t>「明日、1つだけ変えるとしたら何を変えますか？」</a:t>
+              <a:t>明日、1つだけ変えるとしたら何を変えますか？</a:t>
             </a:r>
           </a:p>
         </p:txBody>
